--- a/docs/Campus_360_Presentation.pptx
+++ b/docs/Campus_360_Presentation.pptx
@@ -20,6 +20,12 @@
     <p:sldId id="268" r:id="rId19"/>
     <p:sldId id="269" r:id="rId20"/>
     <p:sldId id="270" r:id="rId21"/>
+    <p:sldId id="271" r:id="rId22"/>
+    <p:sldId id="272" r:id="rId23"/>
+    <p:sldId id="273" r:id="rId24"/>
+    <p:sldId id="274" r:id="rId25"/>
+    <p:sldId id="275" r:id="rId26"/>
+    <p:sldId id="276" r:id="rId27"/>
   </p:sldIdLst>
   <p:sldSz cx="12191695" cy="6858000" type="screen4x3"/>
   <p:notesSz cx="6858000" cy="9144000"/>
@@ -3566,7 +3572,7 @@
                   <a:srgbClr val="71C9CE"/>
                 </a:solidFill>
               </a:rPr>
-              <a:t>Prof. Rajashree Chaudhari</a:t>
+              <a:t>Prof. Rajashri Chaudhari</a:t>
             </a:r>
           </a:p>
           <a:p>
@@ -3593,7 +3599,7 @@
               </a:defRPr>
             </a:pPr>
             <a:r>
-              <a:t>Specialization: Data Science | A.Y. 2025–2026</a:t>
+              <a:t>Specialization: Data Science | A.Y. 2026–2027</a:t>
             </a:r>
           </a:p>
         </p:txBody>
@@ -3674,7 +3680,7 @@
               </a:defRPr>
             </a:pPr>
             <a:r>
-              <a:t>CHAPTER 6: PRACTICAL FEATURES &amp; WORKFLOWS</a:t>
+              <a:t>CHAPTER 5: STUDENT VS. ADMIN FUNCTIONING</a:t>
             </a:r>
           </a:p>
           <a:p>
@@ -3687,7 +3693,7 @@
               </a:defRPr>
             </a:pPr>
             <a:r>
-              <a:t>Functional Module Implementation</a:t>
+              <a:t>System Design: Dual-Role Modules</a:t>
             </a:r>
           </a:p>
         </p:txBody>
@@ -3929,7 +3935,7 @@
               </a:defRPr>
             </a:pPr>
             <a:r>
-              <a:t>ACADEMIC &amp; LEARNING SERVICES</a:t>
+              <a:t>STUDENT CONSOLE (ALEX TURNER)</a:t>
             </a:r>
           </a:p>
         </p:txBody>
@@ -3942,8 +3948,8 @@
         </p:nvSpPr>
         <p:spPr>
           <a:xfrm>
-            <a:off x="914400" y="2121408"/>
-            <a:ext cx="3931920" cy="3840480"/>
+            <a:off x="914400" y="2194560"/>
+            <a:ext cx="3931920" cy="3749039"/>
           </a:xfrm>
           <a:prstGeom prst="rect">
             <a:avLst/>
@@ -3959,7 +3965,7 @@
           <a:p>
             <a:pPr>
               <a:spcAft>
-                <a:spcPts val="800"/>
+                <a:spcPts val="1400"/>
               </a:spcAft>
               <a:defRPr sz="1800">
                 <a:latin typeface="Segoe UI"/>
@@ -3979,7 +3985,7 @@
                   <a:srgbClr val="0D3B4C"/>
                 </a:solidFill>
               </a:rPr>
-              <a:t>Interactive Timetable: </a:t>
+              <a:t>Predictive Attendance: </a:t>
             </a:r>
             <a:r>
               <a:rPr>
@@ -3987,13 +3993,13 @@
                   <a:srgbClr val="28323C"/>
                 </a:solidFill>
               </a:rPr>
-              <a:t>Monday-to-Saturday schedule matrix with active period highlights and syllabus handouts.</a:t>
+              <a:t>Real-time 85.2% display with shortage warning (DBMS at 72.0% -&gt; 'Need 3 more classes').</a:t>
             </a:r>
           </a:p>
           <a:p>
             <a:pPr>
               <a:spcAft>
-                <a:spcPts val="800"/>
+                <a:spcPts val="1400"/>
               </a:spcAft>
               <a:defRPr sz="1800">
                 <a:latin typeface="Segoe UI"/>
@@ -4013,7 +4019,7 @@
                   <a:srgbClr val="0D3B4C"/>
                 </a:solidFill>
               </a:rPr>
-              <a:t>Assignment Submissions: </a:t>
+              <a:t>Interactive Timetable: </a:t>
             </a:r>
             <a:r>
               <a:rPr>
@@ -4021,13 +4027,13 @@
                   <a:srgbClr val="28323C"/>
                 </a:solidFill>
               </a:rPr>
-              <a:t>Direct GitHub repo submissions modal with deadline tracking and real-time status chips.</a:t>
+              <a:t>Monday-to-Saturday schedule matrix with period highlight and lecture handouts.</a:t>
             </a:r>
           </a:p>
           <a:p>
             <a:pPr>
               <a:spcAft>
-                <a:spcPts val="800"/>
+                <a:spcPts val="1400"/>
               </a:spcAft>
               <a:defRPr sz="1800">
                 <a:latin typeface="Segoe UI"/>
@@ -4047,7 +4053,7 @@
                   <a:srgbClr val="0D3B4C"/>
                 </a:solidFill>
               </a:rPr>
-              <a:t>Digital Event Ticketing: </a:t>
+              <a:t>Submissions &amp; Passes: </a:t>
             </a:r>
             <a:r>
               <a:rPr>
@@ -4055,7 +4061,7 @@
                   <a:srgbClr val="28323C"/>
                 </a:solidFill>
               </a:rPr>
-              <a:t>Instant registration and unique barcode event pass issuance (e.g. TCK-TECHNOVA-8842).</a:t>
+              <a:t>GitHub repo submissions modal and digital barcode event passes (Technova 2026).</a:t>
             </a:r>
           </a:p>
         </p:txBody>
@@ -4180,7 +4186,7 @@
               </a:defRPr>
             </a:pPr>
             <a:r>
-              <a:t>CAMPUS WELFARE &amp; INTELLIGENCE</a:t>
+              <a:t>ADMIN COMMAND (DR. V. MALHOTRA)</a:t>
             </a:r>
           </a:p>
         </p:txBody>
@@ -4193,8 +4199,8 @@
         </p:nvSpPr>
         <p:spPr>
           <a:xfrm>
-            <a:off x="5486400" y="2121408"/>
-            <a:ext cx="3931920" cy="3840480"/>
+            <a:off x="5486400" y="2194560"/>
+            <a:ext cx="3931920" cy="3749039"/>
           </a:xfrm>
           <a:prstGeom prst="rect">
             <a:avLst/>
@@ -4210,7 +4216,7 @@
           <a:p>
             <a:pPr>
               <a:spcAft>
-                <a:spcPts val="800"/>
+                <a:spcPts val="1400"/>
               </a:spcAft>
               <a:defRPr sz="1800">
                 <a:latin typeface="Segoe UI"/>
@@ -4230,7 +4236,7 @@
                   <a:srgbClr val="0D3B4C"/>
                 </a:solidFill>
               </a:rPr>
-              <a:t>Grievance Redressal: </a:t>
+              <a:t>Executive Telemetry: </a:t>
             </a:r>
             <a:r>
               <a:rPr>
@@ -4238,13 +4244,13 @@
                   <a:srgbClr val="28323C"/>
                 </a:solidFill>
               </a:rPr>
-              <a:t>Transparent ticketing desk tracking Academic, Facility, and Administrative complaints.</a:t>
+              <a:t>Live metrics: 4 active enrolled students, 11 department courses, and 2 pending tickets.</a:t>
             </a:r>
           </a:p>
           <a:p>
             <a:pPr>
               <a:spcAft>
-                <a:spcPts val="800"/>
+                <a:spcPts val="1400"/>
               </a:spcAft>
               <a:defRPr sz="1800">
                 <a:latin typeface="Segoe UI"/>
@@ -4264,7 +4270,7 @@
                   <a:srgbClr val="0D3B4C"/>
                 </a:solidFill>
               </a:rPr>
-              <a:t>Lost &amp; Found Portal: </a:t>
+              <a:t>Grievance Resolution: </a:t>
             </a:r>
             <a:r>
               <a:rPr>
@@ -4272,13 +4278,13 @@
                   <a:srgbClr val="28323C"/>
                 </a:solidFill>
               </a:rPr>
-              <a:t>Searchable campus inventory desk with item photographs and claim verification status.</a:t>
+              <a:t>1-click status resolution transitioning ISSUE-2026-881 to 'Resolved' with audit remarks.</a:t>
             </a:r>
           </a:p>
           <a:p>
             <a:pPr>
               <a:spcAft>
-                <a:spcPts val="800"/>
+                <a:spcPts val="1400"/>
               </a:spcAft>
               <a:defRPr sz="1800">
                 <a:latin typeface="Segoe UI"/>
@@ -4298,7 +4304,7 @@
                   <a:srgbClr val="0D3B4C"/>
                 </a:solidFill>
               </a:rPr>
-              <a:t>Grounded Campus AI: </a:t>
+              <a:t>Circulars &amp; Claims: </a:t>
             </a:r>
             <a:r>
               <a:rPr>
@@ -4306,7 +4312,7 @@
                   <a:srgbClr val="28323C"/>
                 </a:solidFill>
               </a:rPr>
-              <a:t>Zero-hallucination semantic assistant translating student queries to SQL in &lt;15ms.</a:t>
+              <a:t>Departmental broadcast pipeline drafting circulars and Lost &amp; Found claims desk.</a:t>
             </a:r>
           </a:p>
         </p:txBody>
@@ -4387,7 +4393,7 @@
               </a:defRPr>
             </a:pPr>
             <a:r>
-              <a:t>CHAPTER 6: QUALITY ASSURANCE &amp; FUNCTIONAL TESTING</a:t>
+              <a:t>CHAPTER 5: ALGORITHMIC LOGIC &amp; FORMULATIONS</a:t>
             </a:r>
           </a:p>
           <a:p>
@@ -4400,7 +4406,7 @@
               </a:defRPr>
             </a:pPr>
             <a:r>
-              <a:t>Verification: Test Execution Matrix</a:t>
+              <a:t>System Design: Mathematical Models</a:t>
             </a:r>
           </a:p>
         </p:txBody>
@@ -4518,6 +4524,3138 @@
             </a:pPr>
             <a:r>
               <a:t>Slide 11</a:t>
+            </a:r>
+          </a:p>
+        </p:txBody>
+      </p:sp>
+      <p:pic>
+        <p:nvPicPr>
+          <p:cNvPr id="7" name="Picture 6" descr="diagram_attendance_math.png"/>
+          <p:cNvPicPr>
+            <a:picLocks noChangeAspect="1"/>
+          </p:cNvPicPr>
+          <p:nvPr/>
+        </p:nvPicPr>
+        <p:blipFill>
+          <a:blip r:embed="rId3"/>
+          <a:stretch>
+            <a:fillRect/>
+          </a:stretch>
+        </p:blipFill>
+        <p:spPr>
+          <a:xfrm>
+            <a:off x="731520" y="1444752"/>
+            <a:ext cx="8961120" cy="3383280"/>
+          </a:xfrm>
+          <a:prstGeom prst="rect">
+            <a:avLst/>
+          </a:prstGeom>
+        </p:spPr>
+      </p:pic>
+      <p:sp>
+        <p:nvSpPr>
+          <p:cNvPr id="8" name="Rounded Rectangle 7"/>
+          <p:cNvSpPr/>
+          <p:nvPr/>
+        </p:nvSpPr>
+        <p:spPr>
+          <a:xfrm>
+            <a:off x="731520" y="4956048"/>
+            <a:ext cx="8961120" cy="1280160"/>
+          </a:xfrm>
+          <a:prstGeom prst="roundRect">
+            <a:avLst/>
+          </a:prstGeom>
+          <a:solidFill>
+            <a:srgbClr val="E3FDFD"/>
+          </a:solidFill>
+          <a:ln w="19050">
+            <a:solidFill>
+              <a:srgbClr val="71C9CE"/>
+            </a:solidFill>
+          </a:ln>
+        </p:spPr>
+        <p:style>
+          <a:lnRef idx="1">
+            <a:schemeClr val="accent1"/>
+          </a:lnRef>
+          <a:fillRef idx="3">
+            <a:schemeClr val="accent1"/>
+          </a:fillRef>
+          <a:effectRef idx="2">
+            <a:schemeClr val="accent1"/>
+          </a:effectRef>
+          <a:fontRef idx="minor">
+            <a:schemeClr val="lt1"/>
+          </a:fontRef>
+        </p:style>
+        <p:txBody>
+          <a:bodyPr rtlCol="0" anchor="ctr"/>
+          <a:lstStyle/>
+          <a:p>
+            <a:pPr algn="ctr"/>
+          </a:p>
+        </p:txBody>
+      </p:sp>
+      <p:sp>
+        <p:nvSpPr>
+          <p:cNvPr id="9" name="TextBox 8"/>
+          <p:cNvSpPr txBox="1"/>
+          <p:nvPr/>
+        </p:nvSpPr>
+        <p:spPr>
+          <a:xfrm>
+            <a:off x="914400" y="5029200"/>
+            <a:ext cx="8595360" cy="1143000"/>
+          </a:xfrm>
+          <a:prstGeom prst="rect">
+            <a:avLst/>
+          </a:prstGeom>
+          <a:noFill/>
+        </p:spPr>
+        <p:txBody>
+          <a:bodyPr wrap="square" tIns="0" bIns="0" lIns="0" rIns="0">
+            <a:spAutoFit/>
+          </a:bodyPr>
+          <a:lstStyle/>
+          <a:p/>
+          <a:p>
+            <a:pPr>
+              <a:spcAft>
+                <a:spcPts val="0"/>
+              </a:spcAft>
+              <a:defRPr sz="1800">
+                <a:latin typeface="Segoe UI"/>
+              </a:defRPr>
+            </a:pPr>
+            <a:r>
+              <a:rPr b="1">
+                <a:solidFill>
+                  <a:srgbClr val="71C9CE"/>
+                </a:solidFill>
+              </a:rPr>
+              <a:t>▪ </a:t>
+            </a:r>
+            <a:r>
+              <a:rPr b="1">
+                <a:solidFill>
+                  <a:srgbClr val="0D3B4C"/>
+                </a:solidFill>
+              </a:rPr>
+              <a:t>Algorithmic Efficiency: </a:t>
+            </a:r>
+            <a:r>
+              <a:rPr>
+                <a:solidFill>
+                  <a:srgbClr val="28323C"/>
+                </a:solidFill>
+              </a:rPr>
+              <a:t>Dijkstra indoor pathing calculates optimal multi-floor routes in under 5ms, while attendance margins calculate in O(1) time.</a:t>
+            </a:r>
+          </a:p>
+        </p:txBody>
+      </p:sp>
+    </p:spTree>
+  </p:cSld>
+  <p:clrMapOvr>
+    <a:masterClrMapping/>
+  </p:clrMapOvr>
+</p:sld>
+</file>
+
+<file path=ppt/slides/slide12.xml><?xml version="1.0" encoding="utf-8"?>
+<p:sld xmlns:a="http://schemas.openxmlformats.org/drawingml/2006/main" xmlns:p="http://schemas.openxmlformats.org/presentationml/2006/main" xmlns:r="http://schemas.openxmlformats.org/officeDocument/2006/relationships">
+  <p:cSld>
+    <p:spTree>
+      <p:nvGrpSpPr>
+        <p:cNvPr id="1" name=""/>
+        <p:cNvGrpSpPr/>
+        <p:nvPr/>
+      </p:nvGrpSpPr>
+      <p:grpSpPr/>
+      <p:pic>
+        <p:nvPicPr>
+          <p:cNvPr id="2" name="Picture 1" descr="page2_Image2.jpg"/>
+          <p:cNvPicPr>
+            <a:picLocks noChangeAspect="1"/>
+          </p:cNvPicPr>
+          <p:nvPr/>
+        </p:nvPicPr>
+        <p:blipFill>
+          <a:blip r:embed="rId2"/>
+          <a:stretch>
+            <a:fillRect/>
+          </a:stretch>
+        </p:blipFill>
+        <p:spPr>
+          <a:xfrm>
+            <a:off x="9784080" y="0"/>
+            <a:ext cx="2407615" cy="6858000"/>
+          </a:xfrm>
+          <a:prstGeom prst="rect">
+            <a:avLst/>
+          </a:prstGeom>
+        </p:spPr>
+      </p:pic>
+      <p:sp>
+        <p:nvSpPr>
+          <p:cNvPr id="3" name="TextBox 2"/>
+          <p:cNvSpPr txBox="1"/>
+          <p:nvPr/>
+        </p:nvSpPr>
+        <p:spPr>
+          <a:xfrm>
+            <a:off x="731520" y="320040"/>
+            <a:ext cx="8961120" cy="914400"/>
+          </a:xfrm>
+          <a:prstGeom prst="rect">
+            <a:avLst/>
+          </a:prstGeom>
+          <a:noFill/>
+        </p:spPr>
+        <p:txBody>
+          <a:bodyPr wrap="square" lIns="0" tIns="0" rIns="0" bIns="0">
+            <a:spAutoFit/>
+          </a:bodyPr>
+          <a:lstStyle/>
+          <a:p>
+            <a:pPr>
+              <a:spcAft>
+                <a:spcPts val="200"/>
+              </a:spcAft>
+              <a:defRPr sz="1700" b="1">
+                <a:solidFill>
+                  <a:srgbClr val="71C9CE"/>
+                </a:solidFill>
+                <a:latin typeface="Segoe UI"/>
+              </a:defRPr>
+            </a:pPr>
+            <a:r>
+              <a:t>CHAPTER 4: MODERN DECOUPLED TECH STACK</a:t>
+            </a:r>
+          </a:p>
+          <a:p>
+            <a:pPr>
+              <a:defRPr sz="2800" b="1">
+                <a:solidFill>
+                  <a:srgbClr val="0D3B4C"/>
+                </a:solidFill>
+                <a:latin typeface="Segoe UI"/>
+              </a:defRPr>
+            </a:pPr>
+            <a:r>
+              <a:t>Technologies &amp; Methodologies</a:t>
+            </a:r>
+          </a:p>
+        </p:txBody>
+      </p:sp>
+      <p:sp>
+        <p:nvSpPr>
+          <p:cNvPr id="4" name="Rectangle 3"/>
+          <p:cNvSpPr/>
+          <p:nvPr/>
+        </p:nvSpPr>
+        <p:spPr>
+          <a:xfrm>
+            <a:off x="731520" y="1298448"/>
+            <a:ext cx="8961120" cy="36576"/>
+          </a:xfrm>
+          <a:prstGeom prst="rect">
+            <a:avLst/>
+          </a:prstGeom>
+          <a:solidFill>
+            <a:srgbClr val="71C9CE"/>
+          </a:solidFill>
+          <a:ln>
+            <a:solidFill>
+              <a:srgbClr val="71C9CE"/>
+            </a:solidFill>
+          </a:ln>
+        </p:spPr>
+        <p:style>
+          <a:lnRef idx="1">
+            <a:schemeClr val="accent1"/>
+          </a:lnRef>
+          <a:fillRef idx="3">
+            <a:schemeClr val="accent1"/>
+          </a:fillRef>
+          <a:effectRef idx="2">
+            <a:schemeClr val="accent1"/>
+          </a:effectRef>
+          <a:fontRef idx="minor">
+            <a:schemeClr val="lt1"/>
+          </a:fontRef>
+        </p:style>
+        <p:txBody>
+          <a:bodyPr rtlCol="0" anchor="ctr"/>
+          <a:lstStyle/>
+          <a:p>
+            <a:pPr algn="ctr"/>
+          </a:p>
+        </p:txBody>
+      </p:sp>
+      <p:sp>
+        <p:nvSpPr>
+          <p:cNvPr id="5" name="TextBox 4"/>
+          <p:cNvSpPr txBox="1"/>
+          <p:nvPr/>
+        </p:nvSpPr>
+        <p:spPr>
+          <a:xfrm>
+            <a:off x="731520" y="6446520"/>
+            <a:ext cx="7863840" cy="320040"/>
+          </a:xfrm>
+          <a:prstGeom prst="rect">
+            <a:avLst/>
+          </a:prstGeom>
+          <a:noFill/>
+        </p:spPr>
+        <p:txBody>
+          <a:bodyPr wrap="none" lIns="0" tIns="0" rIns="0" bIns="0">
+            <a:spAutoFit/>
+          </a:bodyPr>
+          <a:lstStyle/>
+          <a:p>
+            <a:pPr>
+              <a:defRPr sz="1700">
+                <a:solidFill>
+                  <a:srgbClr val="6E7882"/>
+                </a:solidFill>
+                <a:latin typeface="Segoe UI"/>
+              </a:defRPr>
+            </a:pPr>
+            <a:r>
+              <a:t>A.P. Shah Institute of Technology | Dept. of CSE (Data Science) | Campus 360</a:t>
+            </a:r>
+          </a:p>
+        </p:txBody>
+      </p:sp>
+      <p:sp>
+        <p:nvSpPr>
+          <p:cNvPr id="6" name="TextBox 5"/>
+          <p:cNvSpPr txBox="1"/>
+          <p:nvPr/>
+        </p:nvSpPr>
+        <p:spPr>
+          <a:xfrm>
+            <a:off x="8686800" y="6446520"/>
+            <a:ext cx="1005840" cy="320040"/>
+          </a:xfrm>
+          <a:prstGeom prst="rect">
+            <a:avLst/>
+          </a:prstGeom>
+          <a:noFill/>
+        </p:spPr>
+        <p:txBody>
+          <a:bodyPr wrap="none" lIns="0" tIns="0" rIns="0" bIns="0">
+            <a:spAutoFit/>
+          </a:bodyPr>
+          <a:lstStyle/>
+          <a:p>
+            <a:pPr algn="r">
+              <a:defRPr sz="1700" b="1">
+                <a:solidFill>
+                  <a:srgbClr val="0D3B4C"/>
+                </a:solidFill>
+                <a:latin typeface="Segoe UI"/>
+              </a:defRPr>
+            </a:pPr>
+            <a:r>
+              <a:t>Slide 12</a:t>
+            </a:r>
+          </a:p>
+        </p:txBody>
+      </p:sp>
+      <p:sp>
+        <p:nvSpPr>
+          <p:cNvPr id="7" name="Rounded Rectangle 6"/>
+          <p:cNvSpPr/>
+          <p:nvPr/>
+        </p:nvSpPr>
+        <p:spPr>
+          <a:xfrm>
+            <a:off x="731520" y="1463040"/>
+            <a:ext cx="2834640" cy="4709160"/>
+          </a:xfrm>
+          <a:prstGeom prst="roundRect">
+            <a:avLst/>
+          </a:prstGeom>
+          <a:solidFill>
+            <a:srgbClr val="FFFFFF"/>
+          </a:solidFill>
+          <a:ln w="19050">
+            <a:solidFill>
+              <a:srgbClr val="71C9CE"/>
+            </a:solidFill>
+          </a:ln>
+        </p:spPr>
+        <p:style>
+          <a:lnRef idx="1">
+            <a:schemeClr val="accent1"/>
+          </a:lnRef>
+          <a:fillRef idx="3">
+            <a:schemeClr val="accent1"/>
+          </a:fillRef>
+          <a:effectRef idx="2">
+            <a:schemeClr val="accent1"/>
+          </a:effectRef>
+          <a:fontRef idx="minor">
+            <a:schemeClr val="lt1"/>
+          </a:fontRef>
+        </p:style>
+        <p:txBody>
+          <a:bodyPr rtlCol="0" anchor="ctr"/>
+          <a:lstStyle/>
+          <a:p>
+            <a:pPr algn="ctr"/>
+          </a:p>
+        </p:txBody>
+      </p:sp>
+      <p:sp>
+        <p:nvSpPr>
+          <p:cNvPr id="8" name="Rounded Rectangle 7"/>
+          <p:cNvSpPr/>
+          <p:nvPr/>
+        </p:nvSpPr>
+        <p:spPr>
+          <a:xfrm>
+            <a:off x="731520" y="1463040"/>
+            <a:ext cx="2834640" cy="640080"/>
+          </a:xfrm>
+          <a:prstGeom prst="roundRect">
+            <a:avLst/>
+          </a:prstGeom>
+          <a:solidFill>
+            <a:srgbClr val="0D3B4C"/>
+          </a:solidFill>
+          <a:ln w="19050">
+            <a:solidFill>
+              <a:srgbClr val="0D3B4C"/>
+            </a:solidFill>
+          </a:ln>
+        </p:spPr>
+        <p:style>
+          <a:lnRef idx="1">
+            <a:schemeClr val="accent1"/>
+          </a:lnRef>
+          <a:fillRef idx="3">
+            <a:schemeClr val="accent1"/>
+          </a:fillRef>
+          <a:effectRef idx="2">
+            <a:schemeClr val="accent1"/>
+          </a:effectRef>
+          <a:fontRef idx="minor">
+            <a:schemeClr val="lt1"/>
+          </a:fontRef>
+        </p:style>
+        <p:txBody>
+          <a:bodyPr rtlCol="0" anchor="ctr"/>
+          <a:lstStyle/>
+          <a:p>
+            <a:pPr algn="ctr"/>
+          </a:p>
+        </p:txBody>
+      </p:sp>
+      <p:sp>
+        <p:nvSpPr>
+          <p:cNvPr id="9" name="TextBox 8"/>
+          <p:cNvSpPr txBox="1"/>
+          <p:nvPr/>
+        </p:nvSpPr>
+        <p:spPr>
+          <a:xfrm>
+            <a:off x="822960" y="1527048"/>
+            <a:ext cx="2651760" cy="502920"/>
+          </a:xfrm>
+          <a:prstGeom prst="rect">
+            <a:avLst/>
+          </a:prstGeom>
+          <a:noFill/>
+        </p:spPr>
+        <p:txBody>
+          <a:bodyPr wrap="square">
+            <a:spAutoFit/>
+          </a:bodyPr>
+          <a:lstStyle/>
+          <a:p>
+            <a:pPr>
+              <a:defRPr sz="1700" b="1">
+                <a:solidFill>
+                  <a:srgbClr val="FFFFFF"/>
+                </a:solidFill>
+              </a:defRPr>
+            </a:pPr>
+            <a:r>
+              <a:t>React 19 &amp; Vite</a:t>
+            </a:r>
+          </a:p>
+        </p:txBody>
+      </p:sp>
+      <p:sp>
+        <p:nvSpPr>
+          <p:cNvPr id="10" name="TextBox 9"/>
+          <p:cNvSpPr txBox="1"/>
+          <p:nvPr/>
+        </p:nvSpPr>
+        <p:spPr>
+          <a:xfrm>
+            <a:off x="868680" y="2240280"/>
+            <a:ext cx="2560320" cy="3749039"/>
+          </a:xfrm>
+          <a:prstGeom prst="rect">
+            <a:avLst/>
+          </a:prstGeom>
+          <a:noFill/>
+        </p:spPr>
+        <p:txBody>
+          <a:bodyPr wrap="square">
+            <a:spAutoFit/>
+          </a:bodyPr>
+          <a:lstStyle/>
+          <a:p/>
+          <a:p>
+            <a:pPr>
+              <a:spcAft>
+                <a:spcPts val="2200"/>
+              </a:spcAft>
+              <a:defRPr sz="1700">
+                <a:latin typeface="Segoe UI"/>
+              </a:defRPr>
+            </a:pPr>
+            <a:r>
+              <a:rPr b="1">
+                <a:solidFill>
+                  <a:srgbClr val="71C9CE"/>
+                </a:solidFill>
+              </a:rPr>
+              <a:t>▪ </a:t>
+            </a:r>
+            <a:r>
+              <a:rPr b="1">
+                <a:solidFill>
+                  <a:srgbClr val="0D3B4C"/>
+                </a:solidFill>
+              </a:rPr>
+              <a:t>Modern React 19 SPA: </a:t>
+            </a:r>
+            <a:r>
+              <a:rPr>
+                <a:solidFill>
+                  <a:srgbClr val="28323C"/>
+                </a:solidFill>
+              </a:rPr>
+              <a:t>Declarative component UI with optimized rendering and sub-100ms transitions [2].</a:t>
+            </a:r>
+          </a:p>
+          <a:p>
+            <a:pPr>
+              <a:spcAft>
+                <a:spcPts val="2200"/>
+              </a:spcAft>
+              <a:defRPr sz="1700">
+                <a:latin typeface="Segoe UI"/>
+              </a:defRPr>
+            </a:pPr>
+            <a:r>
+              <a:rPr b="1">
+                <a:solidFill>
+                  <a:srgbClr val="71C9CE"/>
+                </a:solidFill>
+              </a:rPr>
+              <a:t>▪ </a:t>
+            </a:r>
+            <a:r>
+              <a:rPr b="1">
+                <a:solidFill>
+                  <a:srgbClr val="0D3B4C"/>
+                </a:solidFill>
+              </a:rPr>
+              <a:t>Vite Tooling &amp; HMR: </a:t>
+            </a:r>
+            <a:r>
+              <a:rPr>
+                <a:solidFill>
+                  <a:srgbClr val="28323C"/>
+                </a:solidFill>
+              </a:rPr>
+              <a:t>Lightning-fast build pipeline with instant module replacement (&lt;150ms).</a:t>
+            </a:r>
+          </a:p>
+        </p:txBody>
+      </p:sp>
+      <p:sp>
+        <p:nvSpPr>
+          <p:cNvPr id="11" name="Rounded Rectangle 10"/>
+          <p:cNvSpPr/>
+          <p:nvPr/>
+        </p:nvSpPr>
+        <p:spPr>
+          <a:xfrm>
+            <a:off x="3794760" y="1463040"/>
+            <a:ext cx="2834640" cy="4709160"/>
+          </a:xfrm>
+          <a:prstGeom prst="roundRect">
+            <a:avLst/>
+          </a:prstGeom>
+          <a:solidFill>
+            <a:srgbClr val="FFFFFF"/>
+          </a:solidFill>
+          <a:ln w="19050">
+            <a:solidFill>
+              <a:srgbClr val="71C9CE"/>
+            </a:solidFill>
+          </a:ln>
+        </p:spPr>
+        <p:style>
+          <a:lnRef idx="1">
+            <a:schemeClr val="accent1"/>
+          </a:lnRef>
+          <a:fillRef idx="3">
+            <a:schemeClr val="accent1"/>
+          </a:fillRef>
+          <a:effectRef idx="2">
+            <a:schemeClr val="accent1"/>
+          </a:effectRef>
+          <a:fontRef idx="minor">
+            <a:schemeClr val="lt1"/>
+          </a:fontRef>
+        </p:style>
+        <p:txBody>
+          <a:bodyPr rtlCol="0" anchor="ctr"/>
+          <a:lstStyle/>
+          <a:p>
+            <a:pPr algn="ctr"/>
+          </a:p>
+        </p:txBody>
+      </p:sp>
+      <p:sp>
+        <p:nvSpPr>
+          <p:cNvPr id="12" name="Rounded Rectangle 11"/>
+          <p:cNvSpPr/>
+          <p:nvPr/>
+        </p:nvSpPr>
+        <p:spPr>
+          <a:xfrm>
+            <a:off x="3794760" y="1463040"/>
+            <a:ext cx="2834640" cy="640080"/>
+          </a:xfrm>
+          <a:prstGeom prst="roundRect">
+            <a:avLst/>
+          </a:prstGeom>
+          <a:solidFill>
+            <a:srgbClr val="0D3B4C"/>
+          </a:solidFill>
+          <a:ln w="19050">
+            <a:solidFill>
+              <a:srgbClr val="0D3B4C"/>
+            </a:solidFill>
+          </a:ln>
+        </p:spPr>
+        <p:style>
+          <a:lnRef idx="1">
+            <a:schemeClr val="accent1"/>
+          </a:lnRef>
+          <a:fillRef idx="3">
+            <a:schemeClr val="accent1"/>
+          </a:fillRef>
+          <a:effectRef idx="2">
+            <a:schemeClr val="accent1"/>
+          </a:effectRef>
+          <a:fontRef idx="minor">
+            <a:schemeClr val="lt1"/>
+          </a:fontRef>
+        </p:style>
+        <p:txBody>
+          <a:bodyPr rtlCol="0" anchor="ctr"/>
+          <a:lstStyle/>
+          <a:p>
+            <a:pPr algn="ctr"/>
+          </a:p>
+        </p:txBody>
+      </p:sp>
+      <p:sp>
+        <p:nvSpPr>
+          <p:cNvPr id="13" name="TextBox 12"/>
+          <p:cNvSpPr txBox="1"/>
+          <p:nvPr/>
+        </p:nvSpPr>
+        <p:spPr>
+          <a:xfrm>
+            <a:off x="3886200" y="1527048"/>
+            <a:ext cx="2651760" cy="502920"/>
+          </a:xfrm>
+          <a:prstGeom prst="rect">
+            <a:avLst/>
+          </a:prstGeom>
+          <a:noFill/>
+        </p:spPr>
+        <p:txBody>
+          <a:bodyPr wrap="square">
+            <a:spAutoFit/>
+          </a:bodyPr>
+          <a:lstStyle/>
+          <a:p>
+            <a:pPr>
+              <a:defRPr sz="1700" b="1">
+                <a:solidFill>
+                  <a:srgbClr val="FFFFFF"/>
+                </a:solidFill>
+              </a:defRPr>
+            </a:pPr>
+            <a:r>
+              <a:t>Node.js &amp; Express API</a:t>
+            </a:r>
+          </a:p>
+        </p:txBody>
+      </p:sp>
+      <p:sp>
+        <p:nvSpPr>
+          <p:cNvPr id="14" name="TextBox 13"/>
+          <p:cNvSpPr txBox="1"/>
+          <p:nvPr/>
+        </p:nvSpPr>
+        <p:spPr>
+          <a:xfrm>
+            <a:off x="3931920" y="2240280"/>
+            <a:ext cx="2560320" cy="3749039"/>
+          </a:xfrm>
+          <a:prstGeom prst="rect">
+            <a:avLst/>
+          </a:prstGeom>
+          <a:noFill/>
+        </p:spPr>
+        <p:txBody>
+          <a:bodyPr wrap="square">
+            <a:spAutoFit/>
+          </a:bodyPr>
+          <a:lstStyle/>
+          <a:p/>
+          <a:p>
+            <a:pPr>
+              <a:spcAft>
+                <a:spcPts val="2200"/>
+              </a:spcAft>
+              <a:defRPr sz="1700">
+                <a:latin typeface="Segoe UI"/>
+              </a:defRPr>
+            </a:pPr>
+            <a:r>
+              <a:rPr b="1">
+                <a:solidFill>
+                  <a:srgbClr val="71C9CE"/>
+                </a:solidFill>
+              </a:rPr>
+              <a:t>▪ </a:t>
+            </a:r>
+            <a:r>
+              <a:rPr b="1">
+                <a:solidFill>
+                  <a:srgbClr val="0D3B4C"/>
+                </a:solidFill>
+              </a:rPr>
+              <a:t>Express 4.21 Microservice: </a:t>
+            </a:r>
+            <a:r>
+              <a:rPr>
+                <a:solidFill>
+                  <a:srgbClr val="28323C"/>
+                </a:solidFill>
+              </a:rPr>
+              <a:t>Asynchronous unopinionated routing middleware on port 5000 [7].</a:t>
+            </a:r>
+          </a:p>
+          <a:p>
+            <a:pPr>
+              <a:spcAft>
+                <a:spcPts val="2200"/>
+              </a:spcAft>
+              <a:defRPr sz="1700">
+                <a:latin typeface="Segoe UI"/>
+              </a:defRPr>
+            </a:pPr>
+            <a:r>
+              <a:rPr b="1">
+                <a:solidFill>
+                  <a:srgbClr val="71C9CE"/>
+                </a:solidFill>
+              </a:rPr>
+              <a:t>▪ </a:t>
+            </a:r>
+            <a:r>
+              <a:rPr b="1">
+                <a:solidFill>
+                  <a:srgbClr val="0D3B4C"/>
+                </a:solidFill>
+              </a:rPr>
+              <a:t>Security &amp; Stateless API: </a:t>
+            </a:r>
+            <a:r>
+              <a:rPr>
+                <a:solidFill>
+                  <a:srgbClr val="28323C"/>
+                </a:solidFill>
+              </a:rPr>
+              <a:t>CORS-enabled JSON endpoints with role-based access validation.</a:t>
+            </a:r>
+          </a:p>
+        </p:txBody>
+      </p:sp>
+      <p:sp>
+        <p:nvSpPr>
+          <p:cNvPr id="15" name="Rounded Rectangle 14"/>
+          <p:cNvSpPr/>
+          <p:nvPr/>
+        </p:nvSpPr>
+        <p:spPr>
+          <a:xfrm>
+            <a:off x="6858000" y="1463040"/>
+            <a:ext cx="2834640" cy="4709160"/>
+          </a:xfrm>
+          <a:prstGeom prst="roundRect">
+            <a:avLst/>
+          </a:prstGeom>
+          <a:solidFill>
+            <a:srgbClr val="FFFFFF"/>
+          </a:solidFill>
+          <a:ln w="19050">
+            <a:solidFill>
+              <a:srgbClr val="71C9CE"/>
+            </a:solidFill>
+          </a:ln>
+        </p:spPr>
+        <p:style>
+          <a:lnRef idx="1">
+            <a:schemeClr val="accent1"/>
+          </a:lnRef>
+          <a:fillRef idx="3">
+            <a:schemeClr val="accent1"/>
+          </a:fillRef>
+          <a:effectRef idx="2">
+            <a:schemeClr val="accent1"/>
+          </a:effectRef>
+          <a:fontRef idx="minor">
+            <a:schemeClr val="lt1"/>
+          </a:fontRef>
+        </p:style>
+        <p:txBody>
+          <a:bodyPr rtlCol="0" anchor="ctr"/>
+          <a:lstStyle/>
+          <a:p>
+            <a:pPr algn="ctr"/>
+          </a:p>
+        </p:txBody>
+      </p:sp>
+      <p:sp>
+        <p:nvSpPr>
+          <p:cNvPr id="16" name="Rounded Rectangle 15"/>
+          <p:cNvSpPr/>
+          <p:nvPr/>
+        </p:nvSpPr>
+        <p:spPr>
+          <a:xfrm>
+            <a:off x="6858000" y="1463040"/>
+            <a:ext cx="2834640" cy="640080"/>
+          </a:xfrm>
+          <a:prstGeom prst="roundRect">
+            <a:avLst/>
+          </a:prstGeom>
+          <a:solidFill>
+            <a:srgbClr val="0D3B4C"/>
+          </a:solidFill>
+          <a:ln w="19050">
+            <a:solidFill>
+              <a:srgbClr val="0D3B4C"/>
+            </a:solidFill>
+          </a:ln>
+        </p:spPr>
+        <p:style>
+          <a:lnRef idx="1">
+            <a:schemeClr val="accent1"/>
+          </a:lnRef>
+          <a:fillRef idx="3">
+            <a:schemeClr val="accent1"/>
+          </a:fillRef>
+          <a:effectRef idx="2">
+            <a:schemeClr val="accent1"/>
+          </a:effectRef>
+          <a:fontRef idx="minor">
+            <a:schemeClr val="lt1"/>
+          </a:fontRef>
+        </p:style>
+        <p:txBody>
+          <a:bodyPr rtlCol="0" anchor="ctr"/>
+          <a:lstStyle/>
+          <a:p>
+            <a:pPr algn="ctr"/>
+          </a:p>
+        </p:txBody>
+      </p:sp>
+      <p:sp>
+        <p:nvSpPr>
+          <p:cNvPr id="17" name="TextBox 16"/>
+          <p:cNvSpPr txBox="1"/>
+          <p:nvPr/>
+        </p:nvSpPr>
+        <p:spPr>
+          <a:xfrm>
+            <a:off x="6949440" y="1527048"/>
+            <a:ext cx="2651760" cy="502920"/>
+          </a:xfrm>
+          <a:prstGeom prst="rect">
+            <a:avLst/>
+          </a:prstGeom>
+          <a:noFill/>
+        </p:spPr>
+        <p:txBody>
+          <a:bodyPr wrap="square">
+            <a:spAutoFit/>
+          </a:bodyPr>
+          <a:lstStyle/>
+          <a:p>
+            <a:pPr>
+              <a:defRPr sz="1700" b="1">
+                <a:solidFill>
+                  <a:srgbClr val="FFFFFF"/>
+                </a:solidFill>
+              </a:defRPr>
+            </a:pPr>
+            <a:r>
+              <a:t>Native SQLite (3NF)</a:t>
+            </a:r>
+          </a:p>
+        </p:txBody>
+      </p:sp>
+      <p:sp>
+        <p:nvSpPr>
+          <p:cNvPr id="18" name="TextBox 17"/>
+          <p:cNvSpPr txBox="1"/>
+          <p:nvPr/>
+        </p:nvSpPr>
+        <p:spPr>
+          <a:xfrm>
+            <a:off x="6995160" y="2240280"/>
+            <a:ext cx="2560320" cy="3749039"/>
+          </a:xfrm>
+          <a:prstGeom prst="rect">
+            <a:avLst/>
+          </a:prstGeom>
+          <a:noFill/>
+        </p:spPr>
+        <p:txBody>
+          <a:bodyPr wrap="square">
+            <a:spAutoFit/>
+          </a:bodyPr>
+          <a:lstStyle/>
+          <a:p/>
+          <a:p>
+            <a:pPr>
+              <a:spcAft>
+                <a:spcPts val="2200"/>
+              </a:spcAft>
+              <a:defRPr sz="1700">
+                <a:latin typeface="Segoe UI"/>
+              </a:defRPr>
+            </a:pPr>
+            <a:r>
+              <a:rPr b="1">
+                <a:solidFill>
+                  <a:srgbClr val="71C9CE"/>
+                </a:solidFill>
+              </a:rPr>
+              <a:t>▪ </a:t>
+            </a:r>
+            <a:r>
+              <a:rPr b="1">
+                <a:solidFill>
+                  <a:srgbClr val="0D3B4C"/>
+                </a:solidFill>
+              </a:rPr>
+              <a:t>Zero-Dependency Driver: </a:t>
+            </a:r>
+            <a:r>
+              <a:rPr>
+                <a:solidFill>
+                  <a:srgbClr val="28323C"/>
+                </a:solidFill>
+              </a:rPr>
+              <a:t>Node.js built-in database requiring zero external configuration [5].</a:t>
+            </a:r>
+          </a:p>
+          <a:p>
+            <a:pPr>
+              <a:spcAft>
+                <a:spcPts val="2200"/>
+              </a:spcAft>
+              <a:defRPr sz="1700">
+                <a:latin typeface="Segoe UI"/>
+              </a:defRPr>
+            </a:pPr>
+            <a:r>
+              <a:rPr b="1">
+                <a:solidFill>
+                  <a:srgbClr val="71C9CE"/>
+                </a:solidFill>
+              </a:rPr>
+              <a:t>▪ </a:t>
+            </a:r>
+            <a:r>
+              <a:rPr b="1">
+                <a:solidFill>
+                  <a:srgbClr val="0D3B4C"/>
+                </a:solidFill>
+              </a:rPr>
+              <a:t>ACID Compliance &amp; 3NF: </a:t>
+            </a:r>
+            <a:r>
+              <a:rPr>
+                <a:solidFill>
+                  <a:srgbClr val="28323C"/>
+                </a:solidFill>
+              </a:rPr>
+              <a:t>Strict atomic transactions across 26 normalized relational tables [1].</a:t>
+            </a:r>
+          </a:p>
+        </p:txBody>
+      </p:sp>
+    </p:spTree>
+  </p:cSld>
+  <p:clrMapOvr>
+    <a:masterClrMapping/>
+  </p:clrMapOvr>
+</p:sld>
+</file>
+
+<file path=ppt/slides/slide13.xml><?xml version="1.0" encoding="utf-8"?>
+<p:sld xmlns:a="http://schemas.openxmlformats.org/drawingml/2006/main" xmlns:p="http://schemas.openxmlformats.org/presentationml/2006/main" xmlns:r="http://schemas.openxmlformats.org/officeDocument/2006/relationships">
+  <p:cSld>
+    <p:spTree>
+      <p:nvGrpSpPr>
+        <p:cNvPr id="1" name=""/>
+        <p:cNvGrpSpPr/>
+        <p:nvPr/>
+      </p:nvGrpSpPr>
+      <p:grpSpPr/>
+      <p:pic>
+        <p:nvPicPr>
+          <p:cNvPr id="2" name="Picture 1" descr="page2_Image2.jpg"/>
+          <p:cNvPicPr>
+            <a:picLocks noChangeAspect="1"/>
+          </p:cNvPicPr>
+          <p:nvPr/>
+        </p:nvPicPr>
+        <p:blipFill>
+          <a:blip r:embed="rId2"/>
+          <a:stretch>
+            <a:fillRect/>
+          </a:stretch>
+        </p:blipFill>
+        <p:spPr>
+          <a:xfrm>
+            <a:off x="9784080" y="0"/>
+            <a:ext cx="2407615" cy="6858000"/>
+          </a:xfrm>
+          <a:prstGeom prst="rect">
+            <a:avLst/>
+          </a:prstGeom>
+        </p:spPr>
+      </p:pic>
+      <p:sp>
+        <p:nvSpPr>
+          <p:cNvPr id="3" name="TextBox 2"/>
+          <p:cNvSpPr txBox="1"/>
+          <p:nvPr/>
+        </p:nvSpPr>
+        <p:spPr>
+          <a:xfrm>
+            <a:off x="731520" y="320040"/>
+            <a:ext cx="8961120" cy="914400"/>
+          </a:xfrm>
+          <a:prstGeom prst="rect">
+            <a:avLst/>
+          </a:prstGeom>
+          <a:noFill/>
+        </p:spPr>
+        <p:txBody>
+          <a:bodyPr wrap="square" lIns="0" tIns="0" rIns="0" bIns="0">
+            <a:spAutoFit/>
+          </a:bodyPr>
+          <a:lstStyle/>
+          <a:p>
+            <a:pPr>
+              <a:spcAft>
+                <a:spcPts val="200"/>
+              </a:spcAft>
+              <a:defRPr sz="1700" b="1">
+                <a:solidFill>
+                  <a:srgbClr val="71C9CE"/>
+                </a:solidFill>
+                <a:latin typeface="Segoe UI"/>
+              </a:defRPr>
+            </a:pPr>
+            <a:r>
+              <a:t>CHAPTER 4: VISUAL ERGONOMICS &amp; COLOR PALETTE</a:t>
+            </a:r>
+          </a:p>
+          <a:p>
+            <a:pPr>
+              <a:defRPr sz="2800" b="1">
+                <a:solidFill>
+                  <a:srgbClr val="0D3B4C"/>
+                </a:solidFill>
+                <a:latin typeface="Segoe UI"/>
+              </a:defRPr>
+            </a:pPr>
+            <a:r>
+              <a:t>Technologies: Aquatic Design System</a:t>
+            </a:r>
+          </a:p>
+        </p:txBody>
+      </p:sp>
+      <p:sp>
+        <p:nvSpPr>
+          <p:cNvPr id="4" name="Rectangle 3"/>
+          <p:cNvSpPr/>
+          <p:nvPr/>
+        </p:nvSpPr>
+        <p:spPr>
+          <a:xfrm>
+            <a:off x="731520" y="1298448"/>
+            <a:ext cx="8961120" cy="36576"/>
+          </a:xfrm>
+          <a:prstGeom prst="rect">
+            <a:avLst/>
+          </a:prstGeom>
+          <a:solidFill>
+            <a:srgbClr val="71C9CE"/>
+          </a:solidFill>
+          <a:ln>
+            <a:solidFill>
+              <a:srgbClr val="71C9CE"/>
+            </a:solidFill>
+          </a:ln>
+        </p:spPr>
+        <p:style>
+          <a:lnRef idx="1">
+            <a:schemeClr val="accent1"/>
+          </a:lnRef>
+          <a:fillRef idx="3">
+            <a:schemeClr val="accent1"/>
+          </a:fillRef>
+          <a:effectRef idx="2">
+            <a:schemeClr val="accent1"/>
+          </a:effectRef>
+          <a:fontRef idx="minor">
+            <a:schemeClr val="lt1"/>
+          </a:fontRef>
+        </p:style>
+        <p:txBody>
+          <a:bodyPr rtlCol="0" anchor="ctr"/>
+          <a:lstStyle/>
+          <a:p>
+            <a:pPr algn="ctr"/>
+          </a:p>
+        </p:txBody>
+      </p:sp>
+      <p:sp>
+        <p:nvSpPr>
+          <p:cNvPr id="5" name="TextBox 4"/>
+          <p:cNvSpPr txBox="1"/>
+          <p:nvPr/>
+        </p:nvSpPr>
+        <p:spPr>
+          <a:xfrm>
+            <a:off x="731520" y="6446520"/>
+            <a:ext cx="7863840" cy="320040"/>
+          </a:xfrm>
+          <a:prstGeom prst="rect">
+            <a:avLst/>
+          </a:prstGeom>
+          <a:noFill/>
+        </p:spPr>
+        <p:txBody>
+          <a:bodyPr wrap="none" lIns="0" tIns="0" rIns="0" bIns="0">
+            <a:spAutoFit/>
+          </a:bodyPr>
+          <a:lstStyle/>
+          <a:p>
+            <a:pPr>
+              <a:defRPr sz="1700">
+                <a:solidFill>
+                  <a:srgbClr val="6E7882"/>
+                </a:solidFill>
+                <a:latin typeface="Segoe UI"/>
+              </a:defRPr>
+            </a:pPr>
+            <a:r>
+              <a:t>A.P. Shah Institute of Technology | Dept. of CSE (Data Science) | Campus 360</a:t>
+            </a:r>
+          </a:p>
+        </p:txBody>
+      </p:sp>
+      <p:sp>
+        <p:nvSpPr>
+          <p:cNvPr id="6" name="TextBox 5"/>
+          <p:cNvSpPr txBox="1"/>
+          <p:nvPr/>
+        </p:nvSpPr>
+        <p:spPr>
+          <a:xfrm>
+            <a:off x="8686800" y="6446520"/>
+            <a:ext cx="1005840" cy="320040"/>
+          </a:xfrm>
+          <a:prstGeom prst="rect">
+            <a:avLst/>
+          </a:prstGeom>
+          <a:noFill/>
+        </p:spPr>
+        <p:txBody>
+          <a:bodyPr wrap="none" lIns="0" tIns="0" rIns="0" bIns="0">
+            <a:spAutoFit/>
+          </a:bodyPr>
+          <a:lstStyle/>
+          <a:p>
+            <a:pPr algn="r">
+              <a:defRPr sz="1700" b="1">
+                <a:solidFill>
+                  <a:srgbClr val="0D3B4C"/>
+                </a:solidFill>
+                <a:latin typeface="Segoe UI"/>
+              </a:defRPr>
+            </a:pPr>
+            <a:r>
+              <a:t>Slide 13</a:t>
+            </a:r>
+          </a:p>
+        </p:txBody>
+      </p:sp>
+      <p:sp>
+        <p:nvSpPr>
+          <p:cNvPr id="7" name="Rounded Rectangle 6"/>
+          <p:cNvSpPr/>
+          <p:nvPr/>
+        </p:nvSpPr>
+        <p:spPr>
+          <a:xfrm>
+            <a:off x="731520" y="1463040"/>
+            <a:ext cx="2057400" cy="1691640"/>
+          </a:xfrm>
+          <a:prstGeom prst="roundRect">
+            <a:avLst/>
+          </a:prstGeom>
+          <a:solidFill>
+            <a:srgbClr val="E3FDFD"/>
+          </a:solidFill>
+          <a:ln w="19050">
+            <a:solidFill>
+              <a:srgbClr val="71C9CE"/>
+            </a:solidFill>
+          </a:ln>
+        </p:spPr>
+        <p:style>
+          <a:lnRef idx="1">
+            <a:schemeClr val="accent1"/>
+          </a:lnRef>
+          <a:fillRef idx="3">
+            <a:schemeClr val="accent1"/>
+          </a:fillRef>
+          <a:effectRef idx="2">
+            <a:schemeClr val="accent1"/>
+          </a:effectRef>
+          <a:fontRef idx="minor">
+            <a:schemeClr val="lt1"/>
+          </a:fontRef>
+        </p:style>
+        <p:txBody>
+          <a:bodyPr rtlCol="0" anchor="ctr"/>
+          <a:lstStyle/>
+          <a:p>
+            <a:pPr algn="ctr"/>
+          </a:p>
+        </p:txBody>
+      </p:sp>
+      <p:sp>
+        <p:nvSpPr>
+          <p:cNvPr id="8" name="TextBox 7"/>
+          <p:cNvSpPr txBox="1"/>
+          <p:nvPr/>
+        </p:nvSpPr>
+        <p:spPr>
+          <a:xfrm>
+            <a:off x="822960" y="1554480"/>
+            <a:ext cx="1874520" cy="1508760"/>
+          </a:xfrm>
+          <a:prstGeom prst="rect">
+            <a:avLst/>
+          </a:prstGeom>
+          <a:noFill/>
+        </p:spPr>
+        <p:txBody>
+          <a:bodyPr wrap="square">
+            <a:spAutoFit/>
+          </a:bodyPr>
+          <a:lstStyle/>
+          <a:p>
+            <a:pPr>
+              <a:spcAft>
+                <a:spcPts val="200"/>
+              </a:spcAft>
+              <a:defRPr sz="2000" b="1">
+                <a:solidFill>
+                  <a:srgbClr val="0D3B4C"/>
+                </a:solidFill>
+                <a:latin typeface="Segoe UI"/>
+              </a:defRPr>
+            </a:pPr>
+            <a:r>
+              <a:t>#E3FDFD</a:t>
+            </a:r>
+          </a:p>
+          <a:p>
+            <a:pPr>
+              <a:spcAft>
+                <a:spcPts val="400"/>
+              </a:spcAft>
+              <a:defRPr sz="1700" b="1">
+                <a:solidFill>
+                  <a:srgbClr val="0D3B4C"/>
+                </a:solidFill>
+                <a:latin typeface="Segoe UI"/>
+              </a:defRPr>
+            </a:pPr>
+            <a:r>
+              <a:t>Light Ice Blue</a:t>
+            </a:r>
+          </a:p>
+          <a:p>
+            <a:pPr>
+              <a:defRPr sz="1700">
+                <a:solidFill>
+                  <a:srgbClr val="0D3B4C"/>
+                </a:solidFill>
+                <a:latin typeface="Segoe UI"/>
+              </a:defRPr>
+            </a:pPr>
+            <a:r>
+              <a:t>Primary Canvas &amp; Viewport Background</a:t>
+            </a:r>
+          </a:p>
+        </p:txBody>
+      </p:sp>
+      <p:sp>
+        <p:nvSpPr>
+          <p:cNvPr id="9" name="Rounded Rectangle 8"/>
+          <p:cNvSpPr/>
+          <p:nvPr/>
+        </p:nvSpPr>
+        <p:spPr>
+          <a:xfrm>
+            <a:off x="3026664" y="1463040"/>
+            <a:ext cx="2057400" cy="1691640"/>
+          </a:xfrm>
+          <a:prstGeom prst="roundRect">
+            <a:avLst/>
+          </a:prstGeom>
+          <a:solidFill>
+            <a:srgbClr val="CBF1F5"/>
+          </a:solidFill>
+          <a:ln w="19050">
+            <a:solidFill>
+              <a:srgbClr val="71C9CE"/>
+            </a:solidFill>
+          </a:ln>
+        </p:spPr>
+        <p:style>
+          <a:lnRef idx="1">
+            <a:schemeClr val="accent1"/>
+          </a:lnRef>
+          <a:fillRef idx="3">
+            <a:schemeClr val="accent1"/>
+          </a:fillRef>
+          <a:effectRef idx="2">
+            <a:schemeClr val="accent1"/>
+          </a:effectRef>
+          <a:fontRef idx="minor">
+            <a:schemeClr val="lt1"/>
+          </a:fontRef>
+        </p:style>
+        <p:txBody>
+          <a:bodyPr rtlCol="0" anchor="ctr"/>
+          <a:lstStyle/>
+          <a:p>
+            <a:pPr algn="ctr"/>
+          </a:p>
+        </p:txBody>
+      </p:sp>
+      <p:sp>
+        <p:nvSpPr>
+          <p:cNvPr id="10" name="TextBox 9"/>
+          <p:cNvSpPr txBox="1"/>
+          <p:nvPr/>
+        </p:nvSpPr>
+        <p:spPr>
+          <a:xfrm>
+            <a:off x="3118104" y="1554480"/>
+            <a:ext cx="1874520" cy="1508760"/>
+          </a:xfrm>
+          <a:prstGeom prst="rect">
+            <a:avLst/>
+          </a:prstGeom>
+          <a:noFill/>
+        </p:spPr>
+        <p:txBody>
+          <a:bodyPr wrap="square">
+            <a:spAutoFit/>
+          </a:bodyPr>
+          <a:lstStyle/>
+          <a:p>
+            <a:pPr>
+              <a:spcAft>
+                <a:spcPts val="200"/>
+              </a:spcAft>
+              <a:defRPr sz="2000" b="1">
+                <a:solidFill>
+                  <a:srgbClr val="0D3B4C"/>
+                </a:solidFill>
+                <a:latin typeface="Segoe UI"/>
+              </a:defRPr>
+            </a:pPr>
+            <a:r>
+              <a:t>#CBF1F5</a:t>
+            </a:r>
+          </a:p>
+          <a:p>
+            <a:pPr>
+              <a:spcAft>
+                <a:spcPts val="400"/>
+              </a:spcAft>
+              <a:defRPr sz="1700" b="1">
+                <a:solidFill>
+                  <a:srgbClr val="0D3B4C"/>
+                </a:solidFill>
+                <a:latin typeface="Segoe UI"/>
+              </a:defRPr>
+            </a:pPr>
+            <a:r>
+              <a:t>Soft Aqua</a:t>
+            </a:r>
+          </a:p>
+          <a:p>
+            <a:pPr>
+              <a:defRPr sz="1700">
+                <a:solidFill>
+                  <a:srgbClr val="0D3B4C"/>
+                </a:solidFill>
+                <a:latin typeface="Segoe UI"/>
+              </a:defRPr>
+            </a:pPr>
+            <a:r>
+              <a:t>Card Surfaces, Active Tabs &amp; Modals</a:t>
+            </a:r>
+          </a:p>
+        </p:txBody>
+      </p:sp>
+      <p:sp>
+        <p:nvSpPr>
+          <p:cNvPr id="11" name="Rounded Rectangle 10"/>
+          <p:cNvSpPr/>
+          <p:nvPr/>
+        </p:nvSpPr>
+        <p:spPr>
+          <a:xfrm>
+            <a:off x="5321808" y="1463040"/>
+            <a:ext cx="2057400" cy="1691640"/>
+          </a:xfrm>
+          <a:prstGeom prst="roundRect">
+            <a:avLst/>
+          </a:prstGeom>
+          <a:solidFill>
+            <a:srgbClr val="A6E3E9"/>
+          </a:solidFill>
+          <a:ln w="19050">
+            <a:solidFill>
+              <a:srgbClr val="71C9CE"/>
+            </a:solidFill>
+          </a:ln>
+        </p:spPr>
+        <p:style>
+          <a:lnRef idx="1">
+            <a:schemeClr val="accent1"/>
+          </a:lnRef>
+          <a:fillRef idx="3">
+            <a:schemeClr val="accent1"/>
+          </a:fillRef>
+          <a:effectRef idx="2">
+            <a:schemeClr val="accent1"/>
+          </a:effectRef>
+          <a:fontRef idx="minor">
+            <a:schemeClr val="lt1"/>
+          </a:fontRef>
+        </p:style>
+        <p:txBody>
+          <a:bodyPr rtlCol="0" anchor="ctr"/>
+          <a:lstStyle/>
+          <a:p>
+            <a:pPr algn="ctr"/>
+          </a:p>
+        </p:txBody>
+      </p:sp>
+      <p:sp>
+        <p:nvSpPr>
+          <p:cNvPr id="12" name="TextBox 11"/>
+          <p:cNvSpPr txBox="1"/>
+          <p:nvPr/>
+        </p:nvSpPr>
+        <p:spPr>
+          <a:xfrm>
+            <a:off x="5413248" y="1554480"/>
+            <a:ext cx="1874520" cy="1508760"/>
+          </a:xfrm>
+          <a:prstGeom prst="rect">
+            <a:avLst/>
+          </a:prstGeom>
+          <a:noFill/>
+        </p:spPr>
+        <p:txBody>
+          <a:bodyPr wrap="square">
+            <a:spAutoFit/>
+          </a:bodyPr>
+          <a:lstStyle/>
+          <a:p>
+            <a:pPr>
+              <a:spcAft>
+                <a:spcPts val="200"/>
+              </a:spcAft>
+              <a:defRPr sz="2000" b="1">
+                <a:solidFill>
+                  <a:srgbClr val="0D3B4C"/>
+                </a:solidFill>
+                <a:latin typeface="Segoe UI"/>
+              </a:defRPr>
+            </a:pPr>
+            <a:r>
+              <a:t>#A6E3E9</a:t>
+            </a:r>
+          </a:p>
+          <a:p>
+            <a:pPr>
+              <a:spcAft>
+                <a:spcPts val="400"/>
+              </a:spcAft>
+              <a:defRPr sz="1700" b="1">
+                <a:solidFill>
+                  <a:srgbClr val="0D3B4C"/>
+                </a:solidFill>
+                <a:latin typeface="Segoe UI"/>
+              </a:defRPr>
+            </a:pPr>
+            <a:r>
+              <a:t>Vibrant Cyan</a:t>
+            </a:r>
+          </a:p>
+          <a:p>
+            <a:pPr>
+              <a:defRPr sz="1700">
+                <a:solidFill>
+                  <a:srgbClr val="0D3B4C"/>
+                </a:solidFill>
+                <a:latin typeface="Segoe UI"/>
+              </a:defRPr>
+            </a:pPr>
+            <a:r>
+              <a:t>Borders, Badges &amp; Secondary Accents</a:t>
+            </a:r>
+          </a:p>
+        </p:txBody>
+      </p:sp>
+      <p:sp>
+        <p:nvSpPr>
+          <p:cNvPr id="13" name="Rounded Rectangle 12"/>
+          <p:cNvSpPr/>
+          <p:nvPr/>
+        </p:nvSpPr>
+        <p:spPr>
+          <a:xfrm>
+            <a:off x="7616952" y="1463040"/>
+            <a:ext cx="2057400" cy="1691640"/>
+          </a:xfrm>
+          <a:prstGeom prst="roundRect">
+            <a:avLst/>
+          </a:prstGeom>
+          <a:solidFill>
+            <a:srgbClr val="71C9CE"/>
+          </a:solidFill>
+          <a:ln w="19050">
+            <a:solidFill>
+              <a:srgbClr val="71C9CE"/>
+            </a:solidFill>
+          </a:ln>
+        </p:spPr>
+        <p:style>
+          <a:lnRef idx="1">
+            <a:schemeClr val="accent1"/>
+          </a:lnRef>
+          <a:fillRef idx="3">
+            <a:schemeClr val="accent1"/>
+          </a:fillRef>
+          <a:effectRef idx="2">
+            <a:schemeClr val="accent1"/>
+          </a:effectRef>
+          <a:fontRef idx="minor">
+            <a:schemeClr val="lt1"/>
+          </a:fontRef>
+        </p:style>
+        <p:txBody>
+          <a:bodyPr rtlCol="0" anchor="ctr"/>
+          <a:lstStyle/>
+          <a:p>
+            <a:pPr algn="ctr"/>
+          </a:p>
+        </p:txBody>
+      </p:sp>
+      <p:sp>
+        <p:nvSpPr>
+          <p:cNvPr id="14" name="TextBox 13"/>
+          <p:cNvSpPr txBox="1"/>
+          <p:nvPr/>
+        </p:nvSpPr>
+        <p:spPr>
+          <a:xfrm>
+            <a:off x="7708392" y="1554480"/>
+            <a:ext cx="1874520" cy="1508760"/>
+          </a:xfrm>
+          <a:prstGeom prst="rect">
+            <a:avLst/>
+          </a:prstGeom>
+          <a:noFill/>
+        </p:spPr>
+        <p:txBody>
+          <a:bodyPr wrap="square">
+            <a:spAutoFit/>
+          </a:bodyPr>
+          <a:lstStyle/>
+          <a:p>
+            <a:pPr>
+              <a:spcAft>
+                <a:spcPts val="200"/>
+              </a:spcAft>
+              <a:defRPr sz="2000" b="1">
+                <a:solidFill>
+                  <a:srgbClr val="FFFFFF"/>
+                </a:solidFill>
+                <a:latin typeface="Segoe UI"/>
+              </a:defRPr>
+            </a:pPr>
+            <a:r>
+              <a:t>#71C9CE</a:t>
+            </a:r>
+          </a:p>
+          <a:p>
+            <a:pPr>
+              <a:spcAft>
+                <a:spcPts val="400"/>
+              </a:spcAft>
+              <a:defRPr sz="1700" b="1">
+                <a:solidFill>
+                  <a:srgbClr val="FFFFFF"/>
+                </a:solidFill>
+                <a:latin typeface="Segoe UI"/>
+              </a:defRPr>
+            </a:pPr>
+            <a:r>
+              <a:t>Deep Cyan Accent</a:t>
+            </a:r>
+          </a:p>
+          <a:p>
+            <a:pPr>
+              <a:defRPr sz="1700">
+                <a:solidFill>
+                  <a:srgbClr val="FFFFFF"/>
+                </a:solidFill>
+                <a:latin typeface="Segoe UI"/>
+              </a:defRPr>
+            </a:pPr>
+            <a:r>
+              <a:t>Primary CTAs, Buttons &amp; Active Headers</a:t>
+            </a:r>
+          </a:p>
+        </p:txBody>
+      </p:sp>
+      <p:sp>
+        <p:nvSpPr>
+          <p:cNvPr id="15" name="Rounded Rectangle 14"/>
+          <p:cNvSpPr/>
+          <p:nvPr/>
+        </p:nvSpPr>
+        <p:spPr>
+          <a:xfrm>
+            <a:off x="731520" y="3337560"/>
+            <a:ext cx="8961120" cy="2834640"/>
+          </a:xfrm>
+          <a:prstGeom prst="roundRect">
+            <a:avLst/>
+          </a:prstGeom>
+          <a:solidFill>
+            <a:srgbClr val="FFFFFF"/>
+          </a:solidFill>
+          <a:ln w="19050">
+            <a:solidFill>
+              <a:srgbClr val="A6E3E9"/>
+            </a:solidFill>
+          </a:ln>
+        </p:spPr>
+        <p:style>
+          <a:lnRef idx="1">
+            <a:schemeClr val="accent1"/>
+          </a:lnRef>
+          <a:fillRef idx="3">
+            <a:schemeClr val="accent1"/>
+          </a:fillRef>
+          <a:effectRef idx="2">
+            <a:schemeClr val="accent1"/>
+          </a:effectRef>
+          <a:fontRef idx="minor">
+            <a:schemeClr val="lt1"/>
+          </a:fontRef>
+        </p:style>
+        <p:txBody>
+          <a:bodyPr rtlCol="0" anchor="ctr"/>
+          <a:lstStyle/>
+          <a:p>
+            <a:pPr algn="ctr"/>
+          </a:p>
+        </p:txBody>
+      </p:sp>
+      <p:sp>
+        <p:nvSpPr>
+          <p:cNvPr id="16" name="TextBox 15"/>
+          <p:cNvSpPr txBox="1"/>
+          <p:nvPr/>
+        </p:nvSpPr>
+        <p:spPr>
+          <a:xfrm>
+            <a:off x="914400" y="3429000"/>
+            <a:ext cx="8595360" cy="2651760"/>
+          </a:xfrm>
+          <a:prstGeom prst="rect">
+            <a:avLst/>
+          </a:prstGeom>
+          <a:noFill/>
+        </p:spPr>
+        <p:txBody>
+          <a:bodyPr wrap="square">
+            <a:spAutoFit/>
+          </a:bodyPr>
+          <a:lstStyle/>
+          <a:p/>
+          <a:p>
+            <a:pPr>
+              <a:spcAft>
+                <a:spcPts val="1200"/>
+              </a:spcAft>
+              <a:defRPr sz="1800">
+                <a:latin typeface="Segoe UI"/>
+              </a:defRPr>
+            </a:pPr>
+            <a:r>
+              <a:rPr b="1">
+                <a:solidFill>
+                  <a:srgbClr val="71C9CE"/>
+                </a:solidFill>
+              </a:rPr>
+              <a:t>▪ </a:t>
+            </a:r>
+            <a:r>
+              <a:rPr b="1">
+                <a:solidFill>
+                  <a:srgbClr val="0D3B4C"/>
+                </a:solidFill>
+              </a:rPr>
+              <a:t>Visual Ergonomics &amp; Contrast Ratio: </a:t>
+            </a:r>
+            <a:r>
+              <a:rPr>
+                <a:solidFill>
+                  <a:srgbClr val="28323C"/>
+                </a:solidFill>
+              </a:rPr>
+              <a:t>Exceeds WCAG 2.1 AA standards with contrast ratios exceeding 4.8:1 against deep slate text, minimizing eye strain [8].</a:t>
+            </a:r>
+          </a:p>
+          <a:p>
+            <a:pPr>
+              <a:spcAft>
+                <a:spcPts val="1200"/>
+              </a:spcAft>
+              <a:defRPr sz="1800">
+                <a:latin typeface="Segoe UI"/>
+              </a:defRPr>
+            </a:pPr>
+            <a:r>
+              <a:rPr b="1">
+                <a:solidFill>
+                  <a:srgbClr val="71C9CE"/>
+                </a:solidFill>
+              </a:rPr>
+              <a:t>▪ </a:t>
+            </a:r>
+            <a:r>
+              <a:rPr b="1">
+                <a:solidFill>
+                  <a:srgbClr val="0D3B4C"/>
+                </a:solidFill>
+              </a:rPr>
+              <a:t>100% Cross-Device Responsiveness: </a:t>
+            </a:r>
+            <a:r>
+              <a:rPr>
+                <a:solidFill>
+                  <a:srgbClr val="28323C"/>
+                </a:solidFill>
+              </a:rPr>
+              <a:t>CSS Flexbox and Grid layouts dynamically adapt from mobile screens (360px) to ultra-wide displays (4K).</a:t>
+            </a:r>
+          </a:p>
+          <a:p>
+            <a:pPr>
+              <a:spcAft>
+                <a:spcPts val="1200"/>
+              </a:spcAft>
+              <a:defRPr sz="1800">
+                <a:latin typeface="Segoe UI"/>
+              </a:defRPr>
+            </a:pPr>
+            <a:r>
+              <a:rPr b="1">
+                <a:solidFill>
+                  <a:srgbClr val="71C9CE"/>
+                </a:solidFill>
+              </a:rPr>
+              <a:t>▪ </a:t>
+            </a:r>
+            <a:r>
+              <a:rPr b="1">
+                <a:solidFill>
+                  <a:srgbClr val="0D3B4C"/>
+                </a:solidFill>
+              </a:rPr>
+              <a:t>Unified Interaction States: </a:t>
+            </a:r>
+            <a:r>
+              <a:rPr>
+                <a:solidFill>
+                  <a:srgbClr val="28323C"/>
+                </a:solidFill>
+              </a:rPr>
+              <a:t>Consistent interactive button states (hover, focus, active) with subtle 150ms cubic-bezier transition curves.</a:t>
+            </a:r>
+          </a:p>
+        </p:txBody>
+      </p:sp>
+    </p:spTree>
+  </p:cSld>
+  <p:clrMapOvr>
+    <a:masterClrMapping/>
+  </p:clrMapOvr>
+</p:sld>
+</file>
+
+<file path=ppt/slides/slide14.xml><?xml version="1.0" encoding="utf-8"?>
+<p:sld xmlns:a="http://schemas.openxmlformats.org/drawingml/2006/main" xmlns:p="http://schemas.openxmlformats.org/presentationml/2006/main" xmlns:r="http://schemas.openxmlformats.org/officeDocument/2006/relationships">
+  <p:cSld>
+    <p:spTree>
+      <p:nvGrpSpPr>
+        <p:cNvPr id="1" name=""/>
+        <p:cNvGrpSpPr/>
+        <p:nvPr/>
+      </p:nvGrpSpPr>
+      <p:grpSpPr/>
+      <p:pic>
+        <p:nvPicPr>
+          <p:cNvPr id="2" name="Picture 1" descr="page2_Image2.jpg"/>
+          <p:cNvPicPr>
+            <a:picLocks noChangeAspect="1"/>
+          </p:cNvPicPr>
+          <p:nvPr/>
+        </p:nvPicPr>
+        <p:blipFill>
+          <a:blip r:embed="rId2"/>
+          <a:stretch>
+            <a:fillRect/>
+          </a:stretch>
+        </p:blipFill>
+        <p:spPr>
+          <a:xfrm>
+            <a:off x="9784080" y="0"/>
+            <a:ext cx="2407615" cy="6858000"/>
+          </a:xfrm>
+          <a:prstGeom prst="rect">
+            <a:avLst/>
+          </a:prstGeom>
+        </p:spPr>
+      </p:pic>
+      <p:sp>
+        <p:nvSpPr>
+          <p:cNvPr id="3" name="TextBox 2"/>
+          <p:cNvSpPr txBox="1"/>
+          <p:nvPr/>
+        </p:nvSpPr>
+        <p:spPr>
+          <a:xfrm>
+            <a:off x="731520" y="320040"/>
+            <a:ext cx="8961120" cy="914400"/>
+          </a:xfrm>
+          <a:prstGeom prst="rect">
+            <a:avLst/>
+          </a:prstGeom>
+          <a:noFill/>
+        </p:spPr>
+        <p:txBody>
+          <a:bodyPr wrap="square" lIns="0" tIns="0" rIns="0" bIns="0">
+            <a:spAutoFit/>
+          </a:bodyPr>
+          <a:lstStyle/>
+          <a:p>
+            <a:pPr>
+              <a:spcAft>
+                <a:spcPts val="200"/>
+              </a:spcAft>
+              <a:defRPr sz="1700" b="1">
+                <a:solidFill>
+                  <a:srgbClr val="71C9CE"/>
+                </a:solidFill>
+                <a:latin typeface="Segoe UI"/>
+              </a:defRPr>
+            </a:pPr>
+            <a:r>
+              <a:t>CHAPTER 4: COMPARISON WITH EXISTING SOLUTIONS</a:t>
+            </a:r>
+          </a:p>
+          <a:p>
+            <a:pPr>
+              <a:defRPr sz="2800" b="1">
+                <a:solidFill>
+                  <a:srgbClr val="0D3B4C"/>
+                </a:solidFill>
+                <a:latin typeface="Segoe UI"/>
+              </a:defRPr>
+            </a:pPr>
+            <a:r>
+              <a:t>Technologies: Value Addition</a:t>
+            </a:r>
+          </a:p>
+        </p:txBody>
+      </p:sp>
+      <p:sp>
+        <p:nvSpPr>
+          <p:cNvPr id="4" name="Rectangle 3"/>
+          <p:cNvSpPr/>
+          <p:nvPr/>
+        </p:nvSpPr>
+        <p:spPr>
+          <a:xfrm>
+            <a:off x="731520" y="1298448"/>
+            <a:ext cx="8961120" cy="36576"/>
+          </a:xfrm>
+          <a:prstGeom prst="rect">
+            <a:avLst/>
+          </a:prstGeom>
+          <a:solidFill>
+            <a:srgbClr val="71C9CE"/>
+          </a:solidFill>
+          <a:ln>
+            <a:solidFill>
+              <a:srgbClr val="71C9CE"/>
+            </a:solidFill>
+          </a:ln>
+        </p:spPr>
+        <p:style>
+          <a:lnRef idx="1">
+            <a:schemeClr val="accent1"/>
+          </a:lnRef>
+          <a:fillRef idx="3">
+            <a:schemeClr val="accent1"/>
+          </a:fillRef>
+          <a:effectRef idx="2">
+            <a:schemeClr val="accent1"/>
+          </a:effectRef>
+          <a:fontRef idx="minor">
+            <a:schemeClr val="lt1"/>
+          </a:fontRef>
+        </p:style>
+        <p:txBody>
+          <a:bodyPr rtlCol="0" anchor="ctr"/>
+          <a:lstStyle/>
+          <a:p>
+            <a:pPr algn="ctr"/>
+          </a:p>
+        </p:txBody>
+      </p:sp>
+      <p:sp>
+        <p:nvSpPr>
+          <p:cNvPr id="5" name="TextBox 4"/>
+          <p:cNvSpPr txBox="1"/>
+          <p:nvPr/>
+        </p:nvSpPr>
+        <p:spPr>
+          <a:xfrm>
+            <a:off x="731520" y="6446520"/>
+            <a:ext cx="7863840" cy="320040"/>
+          </a:xfrm>
+          <a:prstGeom prst="rect">
+            <a:avLst/>
+          </a:prstGeom>
+          <a:noFill/>
+        </p:spPr>
+        <p:txBody>
+          <a:bodyPr wrap="none" lIns="0" tIns="0" rIns="0" bIns="0">
+            <a:spAutoFit/>
+          </a:bodyPr>
+          <a:lstStyle/>
+          <a:p>
+            <a:pPr>
+              <a:defRPr sz="1700">
+                <a:solidFill>
+                  <a:srgbClr val="6E7882"/>
+                </a:solidFill>
+                <a:latin typeface="Segoe UI"/>
+              </a:defRPr>
+            </a:pPr>
+            <a:r>
+              <a:t>A.P. Shah Institute of Technology | Dept. of CSE (Data Science) | Campus 360</a:t>
+            </a:r>
+          </a:p>
+        </p:txBody>
+      </p:sp>
+      <p:sp>
+        <p:nvSpPr>
+          <p:cNvPr id="6" name="TextBox 5"/>
+          <p:cNvSpPr txBox="1"/>
+          <p:nvPr/>
+        </p:nvSpPr>
+        <p:spPr>
+          <a:xfrm>
+            <a:off x="8686800" y="6446520"/>
+            <a:ext cx="1005840" cy="320040"/>
+          </a:xfrm>
+          <a:prstGeom prst="rect">
+            <a:avLst/>
+          </a:prstGeom>
+          <a:noFill/>
+        </p:spPr>
+        <p:txBody>
+          <a:bodyPr wrap="none" lIns="0" tIns="0" rIns="0" bIns="0">
+            <a:spAutoFit/>
+          </a:bodyPr>
+          <a:lstStyle/>
+          <a:p>
+            <a:pPr algn="r">
+              <a:defRPr sz="1700" b="1">
+                <a:solidFill>
+                  <a:srgbClr val="0D3B4C"/>
+                </a:solidFill>
+                <a:latin typeface="Segoe UI"/>
+              </a:defRPr>
+            </a:pPr>
+            <a:r>
+              <a:t>Slide 14</a:t>
+            </a:r>
+          </a:p>
+        </p:txBody>
+      </p:sp>
+      <p:graphicFrame>
+        <p:nvGraphicFramePr>
+          <p:cNvPr id="7" name="Table 6"/>
+          <p:cNvGraphicFramePr>
+            <a:graphicFrameLocks noGrp="1"/>
+          </p:cNvGraphicFramePr>
+          <p:nvPr/>
+        </p:nvGraphicFramePr>
+        <p:xfrm>
+          <a:off x="731520" y="1463040"/>
+          <a:ext cx="8961120" cy="4709160"/>
+        </p:xfrm>
+        <a:graphic>
+          <a:graphicData uri="http://schemas.openxmlformats.org/drawingml/2006/table">
+            <a:tbl>
+              <a:tblPr firstRow="1" bandRow="1">
+                <a:tableStyleId>{5C22544A-7EE6-4342-B048-85BDC9FD1C3A}</a:tableStyleId>
+              </a:tblPr>
+              <a:tblGrid>
+                <a:gridCol w="2011680"/>
+                <a:gridCol w="3474720"/>
+                <a:gridCol w="3474720"/>
+              </a:tblGrid>
+              <a:tr h="784860">
+                <a:tc>
+                  <a:txBody>
+                    <a:bodyPr/>
+                    <a:lstStyle/>
+                    <a:p>
+                      <a:pPr>
+                        <a:defRPr sz="1700" b="1">
+                          <a:solidFill>
+                            <a:srgbClr val="FFFFFF"/>
+                          </a:solidFill>
+                          <a:latin typeface="Segoe UI"/>
+                        </a:defRPr>
+                      </a:pPr>
+                      <a:r>
+                        <a:t>FEATURE / METRIC</a:t>
+                      </a:r>
+                    </a:p>
+                  </a:txBody>
+                  <a:tcPr>
+                    <a:solidFill>
+                      <a:srgbClr val="0D3B4C"/>
+                    </a:solidFill>
+                  </a:tcPr>
+                </a:tc>
+                <a:tc>
+                  <a:txBody>
+                    <a:bodyPr/>
+                    <a:lstStyle/>
+                    <a:p>
+                      <a:pPr>
+                        <a:defRPr sz="1700" b="1">
+                          <a:solidFill>
+                            <a:srgbClr val="FFFFFF"/>
+                          </a:solidFill>
+                          <a:latin typeface="Segoe UI"/>
+                        </a:defRPr>
+                      </a:pPr>
+                      <a:r>
+                        <a:t>TRADITIONAL COLLEGE PORTALS</a:t>
+                      </a:r>
+                    </a:p>
+                  </a:txBody>
+                  <a:tcPr>
+                    <a:solidFill>
+                      <a:srgbClr val="0D3B4C"/>
+                    </a:solidFill>
+                  </a:tcPr>
+                </a:tc>
+                <a:tc>
+                  <a:txBody>
+                    <a:bodyPr/>
+                    <a:lstStyle/>
+                    <a:p>
+                      <a:pPr>
+                        <a:defRPr sz="1700" b="1">
+                          <a:solidFill>
+                            <a:srgbClr val="FFFFFF"/>
+                          </a:solidFill>
+                          <a:latin typeface="Segoe UI"/>
+                        </a:defRPr>
+                      </a:pPr>
+                      <a:r>
+                        <a:t>PROPOSED CAMPUS 360 SYSTEM</a:t>
+                      </a:r>
+                    </a:p>
+                  </a:txBody>
+                  <a:tcPr>
+                    <a:solidFill>
+                      <a:srgbClr val="0D3B4C"/>
+                    </a:solidFill>
+                  </a:tcPr>
+                </a:tc>
+              </a:tr>
+              <a:tr h="784860">
+                <a:tc>
+                  <a:txBody>
+                    <a:bodyPr/>
+                    <a:lstStyle/>
+                    <a:p>
+                      <a:pPr>
+                        <a:defRPr sz="1700" b="1">
+                          <a:solidFill>
+                            <a:srgbClr val="0D3B4C"/>
+                          </a:solidFill>
+                          <a:latin typeface="Segoe UI"/>
+                        </a:defRPr>
+                      </a:pPr>
+                      <a:r>
+                        <a:t>Architecture</a:t>
+                      </a:r>
+                    </a:p>
+                  </a:txBody>
+                  <a:tcPr>
+                    <a:solidFill>
+                      <a:srgbClr val="E3FDFD"/>
+                    </a:solidFill>
+                  </a:tcPr>
+                </a:tc>
+                <a:tc>
+                  <a:txBody>
+                    <a:bodyPr/>
+                    <a:lstStyle/>
+                    <a:p>
+                      <a:pPr>
+                        <a:defRPr sz="1700">
+                          <a:solidFill>
+                            <a:srgbClr val="28323C"/>
+                          </a:solidFill>
+                          <a:latin typeface="Segoe UI"/>
+                        </a:defRPr>
+                      </a:pPr>
+                      <a:r>
+                        <a:t>Monolithic server-rendered PHP / JSP</a:t>
+                      </a:r>
+                    </a:p>
+                  </a:txBody>
+                  <a:tcPr>
+                    <a:solidFill>
+                      <a:srgbClr val="E3FDFD"/>
+                    </a:solidFill>
+                  </a:tcPr>
+                </a:tc>
+                <a:tc>
+                  <a:txBody>
+                    <a:bodyPr/>
+                    <a:lstStyle/>
+                    <a:p>
+                      <a:pPr>
+                        <a:defRPr sz="1700" b="1">
+                          <a:solidFill>
+                            <a:srgbClr val="102542"/>
+                          </a:solidFill>
+                          <a:latin typeface="Segoe UI"/>
+                        </a:defRPr>
+                      </a:pPr>
+                      <a:r>
+                        <a:t>Decoupled React 19 SPA + Express REST API</a:t>
+                      </a:r>
+                    </a:p>
+                  </a:txBody>
+                  <a:tcPr>
+                    <a:solidFill>
+                      <a:srgbClr val="E3FDFD"/>
+                    </a:solidFill>
+                  </a:tcPr>
+                </a:tc>
+              </a:tr>
+              <a:tr h="784860">
+                <a:tc>
+                  <a:txBody>
+                    <a:bodyPr/>
+                    <a:lstStyle/>
+                    <a:p>
+                      <a:pPr>
+                        <a:defRPr sz="1700" b="1">
+                          <a:solidFill>
+                            <a:srgbClr val="0D3B4C"/>
+                          </a:solidFill>
+                          <a:latin typeface="Segoe UI"/>
+                        </a:defRPr>
+                      </a:pPr>
+                      <a:r>
+                        <a:t>Database Model</a:t>
+                      </a:r>
+                    </a:p>
+                  </a:txBody>
+                  <a:tcPr>
+                    <a:solidFill>
+                      <a:srgbClr val="FFFFFF"/>
+                    </a:solidFill>
+                  </a:tcPr>
+                </a:tc>
+                <a:tc>
+                  <a:txBody>
+                    <a:bodyPr/>
+                    <a:lstStyle/>
+                    <a:p>
+                      <a:pPr>
+                        <a:defRPr sz="1700">
+                          <a:solidFill>
+                            <a:srgbClr val="28323C"/>
+                          </a:solidFill>
+                          <a:latin typeface="Segoe UI"/>
+                        </a:defRPr>
+                      </a:pPr>
+                      <a:r>
+                        <a:t>Un-indexed flat tables with redundancies</a:t>
+                      </a:r>
+                    </a:p>
+                  </a:txBody>
+                  <a:tcPr>
+                    <a:solidFill>
+                      <a:srgbClr val="FFFFFF"/>
+                    </a:solidFill>
+                  </a:tcPr>
+                </a:tc>
+                <a:tc>
+                  <a:txBody>
+                    <a:bodyPr/>
+                    <a:lstStyle/>
+                    <a:p>
+                      <a:pPr>
+                        <a:defRPr sz="1700" b="1">
+                          <a:solidFill>
+                            <a:srgbClr val="102542"/>
+                          </a:solidFill>
+                          <a:latin typeface="Segoe UI"/>
+                        </a:defRPr>
+                      </a:pPr>
+                      <a:r>
+                        <a:t>26 Relational SQL tables normalized in 3NF</a:t>
+                      </a:r>
+                    </a:p>
+                  </a:txBody>
+                  <a:tcPr>
+                    <a:solidFill>
+                      <a:srgbClr val="FFFFFF"/>
+                    </a:solidFill>
+                  </a:tcPr>
+                </a:tc>
+              </a:tr>
+              <a:tr h="784860">
+                <a:tc>
+                  <a:txBody>
+                    <a:bodyPr/>
+                    <a:lstStyle/>
+                    <a:p>
+                      <a:pPr>
+                        <a:defRPr sz="1700" b="1">
+                          <a:solidFill>
+                            <a:srgbClr val="0D3B4C"/>
+                          </a:solidFill>
+                          <a:latin typeface="Segoe UI"/>
+                        </a:defRPr>
+                      </a:pPr>
+                      <a:r>
+                        <a:t>Design Theme</a:t>
+                      </a:r>
+                    </a:p>
+                  </a:txBody>
+                  <a:tcPr>
+                    <a:solidFill>
+                      <a:srgbClr val="E3FDFD"/>
+                    </a:solidFill>
+                  </a:tcPr>
+                </a:tc>
+                <a:tc>
+                  <a:txBody>
+                    <a:bodyPr/>
+                    <a:lstStyle/>
+                    <a:p>
+                      <a:pPr>
+                        <a:defRPr sz="1700">
+                          <a:solidFill>
+                            <a:srgbClr val="28323C"/>
+                          </a:solidFill>
+                          <a:latin typeface="Segoe UI"/>
+                        </a:defRPr>
+                      </a:pPr>
+                      <a:r>
+                        <a:t>Cluttered enterprise tables, poor mobile UX</a:t>
+                      </a:r>
+                    </a:p>
+                  </a:txBody>
+                  <a:tcPr>
+                    <a:solidFill>
+                      <a:srgbClr val="E3FDFD"/>
+                    </a:solidFill>
+                  </a:tcPr>
+                </a:tc>
+                <a:tc>
+                  <a:txBody>
+                    <a:bodyPr/>
+                    <a:lstStyle/>
+                    <a:p>
+                      <a:pPr>
+                        <a:defRPr sz="1700" b="1">
+                          <a:solidFill>
+                            <a:srgbClr val="102542"/>
+                          </a:solidFill>
+                          <a:latin typeface="Segoe UI"/>
+                        </a:defRPr>
+                      </a:pPr>
+                      <a:r>
+                        <a:t>Bespoke 4-Color Aquatic Palette (#71C9CE)</a:t>
+                      </a:r>
+                    </a:p>
+                  </a:txBody>
+                  <a:tcPr>
+                    <a:solidFill>
+                      <a:srgbClr val="E3FDFD"/>
+                    </a:solidFill>
+                  </a:tcPr>
+                </a:tc>
+              </a:tr>
+              <a:tr h="784860">
+                <a:tc>
+                  <a:txBody>
+                    <a:bodyPr/>
+                    <a:lstStyle/>
+                    <a:p>
+                      <a:pPr>
+                        <a:defRPr sz="1700" b="1">
+                          <a:solidFill>
+                            <a:srgbClr val="0D3B4C"/>
+                          </a:solidFill>
+                          <a:latin typeface="Segoe UI"/>
+                        </a:defRPr>
+                      </a:pPr>
+                      <a:r>
+                        <a:t>Attendance Logic</a:t>
+                      </a:r>
+                    </a:p>
+                  </a:txBody>
+                  <a:tcPr>
+                    <a:solidFill>
+                      <a:srgbClr val="FFFFFF"/>
+                    </a:solidFill>
+                  </a:tcPr>
+                </a:tc>
+                <a:tc>
+                  <a:txBody>
+                    <a:bodyPr/>
+                    <a:lstStyle/>
+                    <a:p>
+                      <a:pPr>
+                        <a:defRPr sz="1700">
+                          <a:solidFill>
+                            <a:srgbClr val="28323C"/>
+                          </a:solidFill>
+                          <a:latin typeface="Segoe UI"/>
+                        </a:defRPr>
+                      </a:pPr>
+                      <a:r>
+                        <a:t>Static percentage without predictive margin</a:t>
+                      </a:r>
+                    </a:p>
+                  </a:txBody>
+                  <a:tcPr>
+                    <a:solidFill>
+                      <a:srgbClr val="FFFFFF"/>
+                    </a:solidFill>
+                  </a:tcPr>
+                </a:tc>
+                <a:tc>
+                  <a:txBody>
+                    <a:bodyPr/>
+                    <a:lstStyle/>
+                    <a:p>
+                      <a:pPr>
+                        <a:defRPr sz="1700" b="1">
+                          <a:solidFill>
+                            <a:srgbClr val="102542"/>
+                          </a:solidFill>
+                          <a:latin typeface="Segoe UI"/>
+                        </a:defRPr>
+                      </a:pPr>
+                      <a:r>
+                        <a:t>Dynamic Safe-Margin &amp; Debarment Alert Engine</a:t>
+                      </a:r>
+                    </a:p>
+                  </a:txBody>
+                  <a:tcPr>
+                    <a:solidFill>
+                      <a:srgbClr val="FFFFFF"/>
+                    </a:solidFill>
+                  </a:tcPr>
+                </a:tc>
+              </a:tr>
+              <a:tr h="784860">
+                <a:tc>
+                  <a:txBody>
+                    <a:bodyPr/>
+                    <a:lstStyle/>
+                    <a:p>
+                      <a:pPr>
+                        <a:defRPr sz="1700" b="1">
+                          <a:solidFill>
+                            <a:srgbClr val="0D3B4C"/>
+                          </a:solidFill>
+                          <a:latin typeface="Segoe UI"/>
+                        </a:defRPr>
+                      </a:pPr>
+                      <a:r>
+                        <a:t>Campus AI Assist</a:t>
+                      </a:r>
+                    </a:p>
+                  </a:txBody>
+                  <a:tcPr>
+                    <a:solidFill>
+                      <a:srgbClr val="E3FDFD"/>
+                    </a:solidFill>
+                  </a:tcPr>
+                </a:tc>
+                <a:tc>
+                  <a:txBody>
+                    <a:bodyPr/>
+                    <a:lstStyle/>
+                    <a:p>
+                      <a:pPr>
+                        <a:defRPr sz="1700">
+                          <a:solidFill>
+                            <a:srgbClr val="28323C"/>
+                          </a:solidFill>
+                          <a:latin typeface="Segoe UI"/>
+                        </a:defRPr>
+                      </a:pPr>
+                      <a:r>
+                        <a:t>Absent or generic hallucinating models</a:t>
+                      </a:r>
+                    </a:p>
+                  </a:txBody>
+                  <a:tcPr>
+                    <a:solidFill>
+                      <a:srgbClr val="E3FDFD"/>
+                    </a:solidFill>
+                  </a:tcPr>
+                </a:tc>
+                <a:tc>
+                  <a:txBody>
+                    <a:bodyPr/>
+                    <a:lstStyle/>
+                    <a:p>
+                      <a:pPr>
+                        <a:defRPr sz="1700" b="1">
+                          <a:solidFill>
+                            <a:srgbClr val="102542"/>
+                          </a:solidFill>
+                          <a:latin typeface="Segoe UI"/>
+                        </a:defRPr>
+                      </a:pPr>
+                      <a:r>
+                        <a:t>Grounded SQL Natural Language Query Assistant</a:t>
+                      </a:r>
+                    </a:p>
+                  </a:txBody>
+                  <a:tcPr>
+                    <a:solidFill>
+                      <a:srgbClr val="E3FDFD"/>
+                    </a:solidFill>
+                  </a:tcPr>
+                </a:tc>
+              </a:tr>
+            </a:tbl>
+          </a:graphicData>
+        </a:graphic>
+      </p:graphicFrame>
+    </p:spTree>
+  </p:cSld>
+  <p:clrMapOvr>
+    <a:masterClrMapping/>
+  </p:clrMapOvr>
+</p:sld>
+</file>
+
+<file path=ppt/slides/slide15.xml><?xml version="1.0" encoding="utf-8"?>
+<p:sld xmlns:a="http://schemas.openxmlformats.org/drawingml/2006/main" xmlns:p="http://schemas.openxmlformats.org/presentationml/2006/main" xmlns:r="http://schemas.openxmlformats.org/officeDocument/2006/relationships">
+  <p:cSld>
+    <p:spTree>
+      <p:nvGrpSpPr>
+        <p:cNvPr id="1" name=""/>
+        <p:cNvGrpSpPr/>
+        <p:nvPr/>
+      </p:nvGrpSpPr>
+      <p:grpSpPr/>
+      <p:pic>
+        <p:nvPicPr>
+          <p:cNvPr id="2" name="Picture 1" descr="page2_Image2.jpg"/>
+          <p:cNvPicPr>
+            <a:picLocks noChangeAspect="1"/>
+          </p:cNvPicPr>
+          <p:nvPr/>
+        </p:nvPicPr>
+        <p:blipFill>
+          <a:blip r:embed="rId2"/>
+          <a:stretch>
+            <a:fillRect/>
+          </a:stretch>
+        </p:blipFill>
+        <p:spPr>
+          <a:xfrm>
+            <a:off x="9784080" y="0"/>
+            <a:ext cx="2407615" cy="6858000"/>
+          </a:xfrm>
+          <a:prstGeom prst="rect">
+            <a:avLst/>
+          </a:prstGeom>
+        </p:spPr>
+      </p:pic>
+      <p:sp>
+        <p:nvSpPr>
+          <p:cNvPr id="3" name="TextBox 2"/>
+          <p:cNvSpPr txBox="1"/>
+          <p:nvPr/>
+        </p:nvSpPr>
+        <p:spPr>
+          <a:xfrm>
+            <a:off x="731520" y="320040"/>
+            <a:ext cx="8961120" cy="914400"/>
+          </a:xfrm>
+          <a:prstGeom prst="rect">
+            <a:avLst/>
+          </a:prstGeom>
+          <a:noFill/>
+        </p:spPr>
+        <p:txBody>
+          <a:bodyPr wrap="square" lIns="0" tIns="0" rIns="0" bIns="0">
+            <a:spAutoFit/>
+          </a:bodyPr>
+          <a:lstStyle/>
+          <a:p>
+            <a:pPr>
+              <a:spcAft>
+                <a:spcPts val="200"/>
+              </a:spcAft>
+              <a:defRPr sz="1700" b="1">
+                <a:solidFill>
+                  <a:srgbClr val="71C9CE"/>
+                </a:solidFill>
+                <a:latin typeface="Segoe UI"/>
+              </a:defRPr>
+            </a:pPr>
+            <a:r>
+              <a:t>CHAPTER 6: SYSTEM MODULES &amp; OUTPUT VERIFICATION</a:t>
+            </a:r>
+          </a:p>
+          <a:p>
+            <a:pPr>
+              <a:defRPr sz="2800" b="1">
+                <a:solidFill>
+                  <a:srgbClr val="0D3B4C"/>
+                </a:solidFill>
+                <a:latin typeface="Segoe UI"/>
+              </a:defRPr>
+            </a:pPr>
+            <a:r>
+              <a:t>Implementation: Interactive Modules</a:t>
+            </a:r>
+          </a:p>
+        </p:txBody>
+      </p:sp>
+      <p:sp>
+        <p:nvSpPr>
+          <p:cNvPr id="4" name="Rectangle 3"/>
+          <p:cNvSpPr/>
+          <p:nvPr/>
+        </p:nvSpPr>
+        <p:spPr>
+          <a:xfrm>
+            <a:off x="731520" y="1298448"/>
+            <a:ext cx="8961120" cy="36576"/>
+          </a:xfrm>
+          <a:prstGeom prst="rect">
+            <a:avLst/>
+          </a:prstGeom>
+          <a:solidFill>
+            <a:srgbClr val="71C9CE"/>
+          </a:solidFill>
+          <a:ln>
+            <a:solidFill>
+              <a:srgbClr val="71C9CE"/>
+            </a:solidFill>
+          </a:ln>
+        </p:spPr>
+        <p:style>
+          <a:lnRef idx="1">
+            <a:schemeClr val="accent1"/>
+          </a:lnRef>
+          <a:fillRef idx="3">
+            <a:schemeClr val="accent1"/>
+          </a:fillRef>
+          <a:effectRef idx="2">
+            <a:schemeClr val="accent1"/>
+          </a:effectRef>
+          <a:fontRef idx="minor">
+            <a:schemeClr val="lt1"/>
+          </a:fontRef>
+        </p:style>
+        <p:txBody>
+          <a:bodyPr rtlCol="0" anchor="ctr"/>
+          <a:lstStyle/>
+          <a:p>
+            <a:pPr algn="ctr"/>
+          </a:p>
+        </p:txBody>
+      </p:sp>
+      <p:sp>
+        <p:nvSpPr>
+          <p:cNvPr id="5" name="TextBox 4"/>
+          <p:cNvSpPr txBox="1"/>
+          <p:nvPr/>
+        </p:nvSpPr>
+        <p:spPr>
+          <a:xfrm>
+            <a:off x="731520" y="6446520"/>
+            <a:ext cx="7863840" cy="320040"/>
+          </a:xfrm>
+          <a:prstGeom prst="rect">
+            <a:avLst/>
+          </a:prstGeom>
+          <a:noFill/>
+        </p:spPr>
+        <p:txBody>
+          <a:bodyPr wrap="none" lIns="0" tIns="0" rIns="0" bIns="0">
+            <a:spAutoFit/>
+          </a:bodyPr>
+          <a:lstStyle/>
+          <a:p>
+            <a:pPr>
+              <a:defRPr sz="1700">
+                <a:solidFill>
+                  <a:srgbClr val="6E7882"/>
+                </a:solidFill>
+                <a:latin typeface="Segoe UI"/>
+              </a:defRPr>
+            </a:pPr>
+            <a:r>
+              <a:t>A.P. Shah Institute of Technology | Dept. of CSE (Data Science) | Campus 360</a:t>
+            </a:r>
+          </a:p>
+        </p:txBody>
+      </p:sp>
+      <p:sp>
+        <p:nvSpPr>
+          <p:cNvPr id="6" name="TextBox 5"/>
+          <p:cNvSpPr txBox="1"/>
+          <p:nvPr/>
+        </p:nvSpPr>
+        <p:spPr>
+          <a:xfrm>
+            <a:off x="8686800" y="6446520"/>
+            <a:ext cx="1005840" cy="320040"/>
+          </a:xfrm>
+          <a:prstGeom prst="rect">
+            <a:avLst/>
+          </a:prstGeom>
+          <a:noFill/>
+        </p:spPr>
+        <p:txBody>
+          <a:bodyPr wrap="none" lIns="0" tIns="0" rIns="0" bIns="0">
+            <a:spAutoFit/>
+          </a:bodyPr>
+          <a:lstStyle/>
+          <a:p>
+            <a:pPr algn="r">
+              <a:defRPr sz="1700" b="1">
+                <a:solidFill>
+                  <a:srgbClr val="0D3B4C"/>
+                </a:solidFill>
+                <a:latin typeface="Segoe UI"/>
+              </a:defRPr>
+            </a:pPr>
+            <a:r>
+              <a:t>Slide 15</a:t>
+            </a:r>
+          </a:p>
+        </p:txBody>
+      </p:sp>
+      <p:sp>
+        <p:nvSpPr>
+          <p:cNvPr id="7" name="Rounded Rectangle 6"/>
+          <p:cNvSpPr/>
+          <p:nvPr/>
+        </p:nvSpPr>
+        <p:spPr>
+          <a:xfrm>
+            <a:off x="731520" y="1463040"/>
+            <a:ext cx="8961120" cy="4709160"/>
+          </a:xfrm>
+          <a:prstGeom prst="roundRect">
+            <a:avLst/>
+          </a:prstGeom>
+          <a:solidFill>
+            <a:srgbClr val="FFFFFF"/>
+          </a:solidFill>
+          <a:ln w="19050">
+            <a:solidFill>
+              <a:srgbClr val="71C9CE"/>
+            </a:solidFill>
+          </a:ln>
+        </p:spPr>
+        <p:style>
+          <a:lnRef idx="1">
+            <a:schemeClr val="accent1"/>
+          </a:lnRef>
+          <a:fillRef idx="3">
+            <a:schemeClr val="accent1"/>
+          </a:fillRef>
+          <a:effectRef idx="2">
+            <a:schemeClr val="accent1"/>
+          </a:effectRef>
+          <a:fontRef idx="minor">
+            <a:schemeClr val="lt1"/>
+          </a:fontRef>
+        </p:style>
+        <p:txBody>
+          <a:bodyPr rtlCol="0" anchor="ctr"/>
+          <a:lstStyle/>
+          <a:p>
+            <a:pPr algn="ctr"/>
+          </a:p>
+        </p:txBody>
+      </p:sp>
+      <p:sp>
+        <p:nvSpPr>
+          <p:cNvPr id="8" name="TextBox 7"/>
+          <p:cNvSpPr txBox="1"/>
+          <p:nvPr/>
+        </p:nvSpPr>
+        <p:spPr>
+          <a:xfrm>
+            <a:off x="1005840" y="1600200"/>
+            <a:ext cx="8412480" cy="4434840"/>
+          </a:xfrm>
+          <a:prstGeom prst="rect">
+            <a:avLst/>
+          </a:prstGeom>
+          <a:noFill/>
+        </p:spPr>
+        <p:txBody>
+          <a:bodyPr wrap="square">
+            <a:spAutoFit/>
+          </a:bodyPr>
+          <a:lstStyle/>
+          <a:p/>
+          <a:p>
+            <a:pPr>
+              <a:spcAft>
+                <a:spcPts val="1400"/>
+              </a:spcAft>
+              <a:defRPr sz="1800">
+                <a:latin typeface="Segoe UI"/>
+              </a:defRPr>
+            </a:pPr>
+            <a:r>
+              <a:rPr b="1">
+                <a:solidFill>
+                  <a:srgbClr val="71C9CE"/>
+                </a:solidFill>
+              </a:rPr>
+              <a:t>▪ </a:t>
+            </a:r>
+            <a:r>
+              <a:rPr b="1">
+                <a:solidFill>
+                  <a:srgbClr val="0D3B4C"/>
+                </a:solidFill>
+              </a:rPr>
+              <a:t>1. Smart Dashboard Console: </a:t>
+            </a:r>
+            <a:r>
+              <a:rPr>
+                <a:solidFill>
+                  <a:srgbClr val="28323C"/>
+                </a:solidFill>
+              </a:rPr>
+              <a:t>Real-time student gauge (85.2%), critical course debarment warning (DBMS at 72.0%), today's schedule card, and mid-term exam seat allocation (Hall 301, Seat B-14).</a:t>
+            </a:r>
+          </a:p>
+          <a:p>
+            <a:pPr>
+              <a:spcAft>
+                <a:spcPts val="1400"/>
+              </a:spcAft>
+              <a:defRPr sz="1800">
+                <a:latin typeface="Segoe UI"/>
+              </a:defRPr>
+            </a:pPr>
+            <a:r>
+              <a:rPr b="1">
+                <a:solidFill>
+                  <a:srgbClr val="71C9CE"/>
+                </a:solidFill>
+              </a:rPr>
+              <a:t>▪ </a:t>
+            </a:r>
+            <a:r>
+              <a:rPr b="1">
+                <a:solidFill>
+                  <a:srgbClr val="0D3B4C"/>
+                </a:solidFill>
+              </a:rPr>
+              <a:t>2. Administrator Command Center: </a:t>
+            </a:r>
+            <a:r>
+              <a:rPr>
+                <a:solidFill>
+                  <a:srgbClr val="28323C"/>
+                </a:solidFill>
+              </a:rPr>
+              <a:t>Executive telemetry panel (4 active students, 11 courses, 2 open tickets), 1-click grievance resolution tool, and departmental circular broadcast system.</a:t>
+            </a:r>
+          </a:p>
+          <a:p>
+            <a:pPr>
+              <a:spcAft>
+                <a:spcPts val="1400"/>
+              </a:spcAft>
+              <a:defRPr sz="1800">
+                <a:latin typeface="Segoe UI"/>
+              </a:defRPr>
+            </a:pPr>
+            <a:r>
+              <a:rPr b="1">
+                <a:solidFill>
+                  <a:srgbClr val="71C9CE"/>
+                </a:solidFill>
+              </a:rPr>
+              <a:t>▪ </a:t>
+            </a:r>
+            <a:r>
+              <a:rPr b="1">
+                <a:solidFill>
+                  <a:srgbClr val="0D3B4C"/>
+                </a:solidFill>
+              </a:rPr>
+              <a:t>3. Academics &amp; Timetables Hub: </a:t>
+            </a:r>
+            <a:r>
+              <a:rPr>
+                <a:solidFill>
+                  <a:srgbClr val="28323C"/>
+                </a:solidFill>
+              </a:rPr>
+              <a:t>Interactive Monday-to-Saturday schedule matrix with room codes, faculty designations, downloadable study materials, and GitHub submission modals.</a:t>
+            </a:r>
+          </a:p>
+          <a:p>
+            <a:pPr>
+              <a:spcAft>
+                <a:spcPts val="1400"/>
+              </a:spcAft>
+              <a:defRPr sz="1800">
+                <a:latin typeface="Segoe UI"/>
+              </a:defRPr>
+            </a:pPr>
+            <a:r>
+              <a:rPr b="1">
+                <a:solidFill>
+                  <a:srgbClr val="71C9CE"/>
+                </a:solidFill>
+              </a:rPr>
+              <a:t>▪ </a:t>
+            </a:r>
+            <a:r>
+              <a:rPr b="1">
+                <a:solidFill>
+                  <a:srgbClr val="0D3B4C"/>
+                </a:solidFill>
+              </a:rPr>
+              <a:t>4. Campus Life &amp; Utilities Desk: </a:t>
+            </a:r>
+            <a:r>
+              <a:rPr>
+                <a:solidFill>
+                  <a:srgbClr val="28323C"/>
+                </a:solidFill>
+              </a:rPr>
+              <a:t>Digital event pass ticketing (Technova 2026 pass TCK-TECHNOVA-8842), lost-and-found claims desk, and multi-floor campus navigation directory.</a:t>
+            </a:r>
+          </a:p>
+        </p:txBody>
+      </p:sp>
+    </p:spTree>
+  </p:cSld>
+  <p:clrMapOvr>
+    <a:masterClrMapping/>
+  </p:clrMapOvr>
+</p:sld>
+</file>
+
+<file path=ppt/slides/slide16.xml><?xml version="1.0" encoding="utf-8"?>
+<p:sld xmlns:a="http://schemas.openxmlformats.org/drawingml/2006/main" xmlns:p="http://schemas.openxmlformats.org/presentationml/2006/main" xmlns:r="http://schemas.openxmlformats.org/officeDocument/2006/relationships">
+  <p:cSld>
+    <p:spTree>
+      <p:nvGrpSpPr>
+        <p:cNvPr id="1" name=""/>
+        <p:cNvGrpSpPr/>
+        <p:nvPr/>
+      </p:nvGrpSpPr>
+      <p:grpSpPr/>
+      <p:pic>
+        <p:nvPicPr>
+          <p:cNvPr id="2" name="Picture 1" descr="page2_Image2.jpg"/>
+          <p:cNvPicPr>
+            <a:picLocks noChangeAspect="1"/>
+          </p:cNvPicPr>
+          <p:nvPr/>
+        </p:nvPicPr>
+        <p:blipFill>
+          <a:blip r:embed="rId2"/>
+          <a:stretch>
+            <a:fillRect/>
+          </a:stretch>
+        </p:blipFill>
+        <p:spPr>
+          <a:xfrm>
+            <a:off x="9784080" y="0"/>
+            <a:ext cx="2407615" cy="6858000"/>
+          </a:xfrm>
+          <a:prstGeom prst="rect">
+            <a:avLst/>
+          </a:prstGeom>
+        </p:spPr>
+      </p:pic>
+      <p:sp>
+        <p:nvSpPr>
+          <p:cNvPr id="3" name="TextBox 2"/>
+          <p:cNvSpPr txBox="1"/>
+          <p:nvPr/>
+        </p:nvSpPr>
+        <p:spPr>
+          <a:xfrm>
+            <a:off x="731520" y="320040"/>
+            <a:ext cx="8961120" cy="914400"/>
+          </a:xfrm>
+          <a:prstGeom prst="rect">
+            <a:avLst/>
+          </a:prstGeom>
+          <a:noFill/>
+        </p:spPr>
+        <p:txBody>
+          <a:bodyPr wrap="square" lIns="0" tIns="0" rIns="0" bIns="0">
+            <a:spAutoFit/>
+          </a:bodyPr>
+          <a:lstStyle/>
+          <a:p>
+            <a:pPr>
+              <a:spcAft>
+                <a:spcPts val="200"/>
+              </a:spcAft>
+              <a:defRPr sz="1700" b="1">
+                <a:solidFill>
+                  <a:srgbClr val="71C9CE"/>
+                </a:solidFill>
+                <a:latin typeface="Segoe UI"/>
+              </a:defRPr>
+            </a:pPr>
+            <a:r>
+              <a:t>CHAPTER 6: QUALITY ASSURANCE &amp; VERIFICATION</a:t>
+            </a:r>
+          </a:p>
+          <a:p>
+            <a:pPr>
+              <a:defRPr sz="2800" b="1">
+                <a:solidFill>
+                  <a:srgbClr val="0D3B4C"/>
+                </a:solidFill>
+                <a:latin typeface="Segoe UI"/>
+              </a:defRPr>
+            </a:pPr>
+            <a:r>
+              <a:t>Verification: Test Execution Matrix</a:t>
+            </a:r>
+          </a:p>
+        </p:txBody>
+      </p:sp>
+      <p:sp>
+        <p:nvSpPr>
+          <p:cNvPr id="4" name="Rectangle 3"/>
+          <p:cNvSpPr/>
+          <p:nvPr/>
+        </p:nvSpPr>
+        <p:spPr>
+          <a:xfrm>
+            <a:off x="731520" y="1298448"/>
+            <a:ext cx="8961120" cy="36576"/>
+          </a:xfrm>
+          <a:prstGeom prst="rect">
+            <a:avLst/>
+          </a:prstGeom>
+          <a:solidFill>
+            <a:srgbClr val="71C9CE"/>
+          </a:solidFill>
+          <a:ln>
+            <a:solidFill>
+              <a:srgbClr val="71C9CE"/>
+            </a:solidFill>
+          </a:ln>
+        </p:spPr>
+        <p:style>
+          <a:lnRef idx="1">
+            <a:schemeClr val="accent1"/>
+          </a:lnRef>
+          <a:fillRef idx="3">
+            <a:schemeClr val="accent1"/>
+          </a:fillRef>
+          <a:effectRef idx="2">
+            <a:schemeClr val="accent1"/>
+          </a:effectRef>
+          <a:fontRef idx="minor">
+            <a:schemeClr val="lt1"/>
+          </a:fontRef>
+        </p:style>
+        <p:txBody>
+          <a:bodyPr rtlCol="0" anchor="ctr"/>
+          <a:lstStyle/>
+          <a:p>
+            <a:pPr algn="ctr"/>
+          </a:p>
+        </p:txBody>
+      </p:sp>
+      <p:sp>
+        <p:nvSpPr>
+          <p:cNvPr id="5" name="TextBox 4"/>
+          <p:cNvSpPr txBox="1"/>
+          <p:nvPr/>
+        </p:nvSpPr>
+        <p:spPr>
+          <a:xfrm>
+            <a:off x="731520" y="6446520"/>
+            <a:ext cx="7863840" cy="320040"/>
+          </a:xfrm>
+          <a:prstGeom prst="rect">
+            <a:avLst/>
+          </a:prstGeom>
+          <a:noFill/>
+        </p:spPr>
+        <p:txBody>
+          <a:bodyPr wrap="none" lIns="0" tIns="0" rIns="0" bIns="0">
+            <a:spAutoFit/>
+          </a:bodyPr>
+          <a:lstStyle/>
+          <a:p>
+            <a:pPr>
+              <a:defRPr sz="1700">
+                <a:solidFill>
+                  <a:srgbClr val="6E7882"/>
+                </a:solidFill>
+                <a:latin typeface="Segoe UI"/>
+              </a:defRPr>
+            </a:pPr>
+            <a:r>
+              <a:t>A.P. Shah Institute of Technology | Dept. of CSE (Data Science) | Campus 360</a:t>
+            </a:r>
+          </a:p>
+        </p:txBody>
+      </p:sp>
+      <p:sp>
+        <p:nvSpPr>
+          <p:cNvPr id="6" name="TextBox 5"/>
+          <p:cNvSpPr txBox="1"/>
+          <p:nvPr/>
+        </p:nvSpPr>
+        <p:spPr>
+          <a:xfrm>
+            <a:off x="8686800" y="6446520"/>
+            <a:ext cx="1005840" cy="320040"/>
+          </a:xfrm>
+          <a:prstGeom prst="rect">
+            <a:avLst/>
+          </a:prstGeom>
+          <a:noFill/>
+        </p:spPr>
+        <p:txBody>
+          <a:bodyPr wrap="none" lIns="0" tIns="0" rIns="0" bIns="0">
+            <a:spAutoFit/>
+          </a:bodyPr>
+          <a:lstStyle/>
+          <a:p>
+            <a:pPr algn="r">
+              <a:defRPr sz="1700" b="1">
+                <a:solidFill>
+                  <a:srgbClr val="0D3B4C"/>
+                </a:solidFill>
+                <a:latin typeface="Segoe UI"/>
+              </a:defRPr>
+            </a:pPr>
+            <a:r>
+              <a:t>Slide 16</a:t>
             </a:r>
           </a:p>
         </p:txBody>
@@ -5249,7 +8387,7 @@
 </p:sld>
 </file>
 
-<file path=ppt/slides/slide12.xml><?xml version="1.0" encoding="utf-8"?>
+<file path=ppt/slides/slide17.xml><?xml version="1.0" encoding="utf-8"?>
 <p:sld xmlns:a="http://schemas.openxmlformats.org/drawingml/2006/main" xmlns:p="http://schemas.openxmlformats.org/presentationml/2006/main" xmlns:r="http://schemas.openxmlformats.org/officeDocument/2006/relationships">
   <p:cSld>
     <p:spTree>
@@ -5447,7 +8585,7 @@
               </a:defRPr>
             </a:pPr>
             <a:r>
-              <a:t>Slide 12</a:t>
+              <a:t>Slide 17</a:t>
             </a:r>
           </a:p>
         </p:txBody>
@@ -5574,7 +8712,7 @@
                   <a:srgbClr val="28323C"/>
                 </a:solidFill>
               </a:rPr>
-              <a:t>All core API endpoints comfortably fulfill the sub-50ms SLA limit, with database queries executing in &lt;10ms and UI rendering completing within 60fps frame budgets [2, 3].</a:t>
+              <a:t>All core API endpoints comfortably fulfill the sub-50ms SLA limit, with database queries executing in &lt;10ms and UI rendering completing within 60fps frame budgets [5, 7].</a:t>
             </a:r>
           </a:p>
         </p:txBody>
@@ -5587,7 +8725,7 @@
 </p:sld>
 </file>
 
-<file path=ppt/slides/slide13.xml><?xml version="1.0" encoding="utf-8"?>
+<file path=ppt/slides/slide18.xml><?xml version="1.0" encoding="utf-8"?>
 <p:sld xmlns:a="http://schemas.openxmlformats.org/drawingml/2006/main" xmlns:p="http://schemas.openxmlformats.org/presentationml/2006/main" xmlns:r="http://schemas.openxmlformats.org/officeDocument/2006/relationships">
   <p:cSld>
     <p:spTree>
@@ -5655,7 +8793,7 @@
               </a:defRPr>
             </a:pPr>
             <a:r>
-              <a:t>CHAPTER 7: SUMMARY &amp; STRATEGIC ROADMAP</a:t>
+              <a:t>CHAPTER 7: SUMMARY &amp; ROADMAP</a:t>
             </a:r>
           </a:p>
           <a:p>
@@ -5785,7 +8923,7 @@
               </a:defRPr>
             </a:pPr>
             <a:r>
-              <a:t>Slide 13</a:t>
+              <a:t>Slide 18</a:t>
             </a:r>
           </a:p>
         </p:txBody>
@@ -5968,7 +9106,7 @@
                   <a:srgbClr val="28323C"/>
                 </a:solidFill>
               </a:rPr>
-              <a:t>Centralized 8 academic and campus life services into a unified React 19 SPA [1].</a:t>
+              <a:t>Centralized 8 academic and campus life services into a unified React 19 SPA [2].</a:t>
             </a:r>
           </a:p>
           <a:p>
@@ -6002,7 +9140,7 @@
                   <a:srgbClr val="28323C"/>
                 </a:solidFill>
               </a:rPr>
-              <a:t>Deployed 26 normalized SQL tables, preventing anomalies and circularities [5].</a:t>
+              <a:t>Deployed 26 normalized SQL tables, preventing anomalies and circularities [1].</a:t>
             </a:r>
           </a:p>
           <a:p>
@@ -6300,7 +9438,7 @@
 </p:sld>
 </file>
 
-<file path=ppt/slides/slide14.xml><?xml version="1.0" encoding="utf-8"?>
+<file path=ppt/slides/slide19.xml><?xml version="1.0" encoding="utf-8"?>
 <p:sld xmlns:a="http://schemas.openxmlformats.org/drawingml/2006/main" xmlns:p="http://schemas.openxmlformats.org/presentationml/2006/main" xmlns:r="http://schemas.openxmlformats.org/officeDocument/2006/relationships">
   <p:cSld>
     <p:spTree>
@@ -6368,7 +9506,7 @@
               </a:defRPr>
             </a:pPr>
             <a:r>
-              <a:t>REVERSE CHRONOLOGICAL: 2026 – 2017</a:t>
+              <a:t>REVERSE CHRONOLOGICAL: 2026 – 2023</a:t>
             </a:r>
           </a:p>
           <a:p>
@@ -6381,7 +9519,7 @@
               </a:defRPr>
             </a:pPr>
             <a:r>
-              <a:t>References: Academic Literature</a:t>
+              <a:t>References: Modern Frameworks &amp; Standards</a:t>
             </a:r>
           </a:p>
         </p:txBody>
@@ -6498,7 +9636,7 @@
               </a:defRPr>
             </a:pPr>
             <a:r>
-              <a:t>Slide 14</a:t>
+              <a:t>Slide 19</a:t>
             </a:r>
           </a:p>
         </p:txBody>
@@ -6572,9 +9710,9 @@
           <a:p>
             <a:pPr>
               <a:spcAft>
-                <a:spcPts val="1000"/>
+                <a:spcPts val="1400"/>
               </a:spcAft>
-              <a:defRPr sz="1750">
+              <a:defRPr sz="1800">
                 <a:latin typeface="Segoe UI"/>
               </a:defRPr>
             </a:pPr>
@@ -6622,9 +9760,9 @@
           <a:p>
             <a:pPr>
               <a:spcAft>
-                <a:spcPts val="1000"/>
+                <a:spcPts val="1400"/>
               </a:spcAft>
-              <a:defRPr sz="1750">
+              <a:defRPr sz="1800">
                 <a:latin typeface="Segoe UI"/>
               </a:defRPr>
             </a:pPr>
@@ -6672,9 +9810,9 @@
           <a:p>
             <a:pPr>
               <a:spcAft>
-                <a:spcPts val="1000"/>
+                <a:spcPts val="1400"/>
               </a:spcAft>
-              <a:defRPr sz="1750">
+              <a:defRPr sz="1800">
                 <a:latin typeface="Segoe UI"/>
               </a:defRPr>
             </a:pPr>
@@ -6722,9 +9860,9 @@
           <a:p>
             <a:pPr>
               <a:spcAft>
-                <a:spcPts val="1000"/>
+                <a:spcPts val="1400"/>
               </a:spcAft>
-              <a:defRPr sz="1750">
+              <a:defRPr sz="1800">
                 <a:latin typeface="Segoe UI"/>
               </a:defRPr>
             </a:pPr>
@@ -6767,377 +9905,6 @@
                 </a:solidFill>
               </a:rPr>
               <a:t>Link: https://www.w3.org/TR/WCAG21/</a:t>
-            </a:r>
-          </a:p>
-          <a:p>
-            <a:pPr>
-              <a:spcAft>
-                <a:spcPts val="1000"/>
-              </a:spcAft>
-              <a:defRPr sz="1750">
-                <a:latin typeface="Segoe UI"/>
-              </a:defRPr>
-            </a:pPr>
-            <a:r>
-              <a:rPr>
-                <a:solidFill>
-                  <a:srgbClr val="28323C"/>
-                </a:solidFill>
-              </a:rPr>
-              <a:t>[5] R. Elmasri and S. B. Navathe, </a:t>
-            </a:r>
-            <a:r>
-              <a:rPr b="1">
-                <a:solidFill>
-                  <a:srgbClr val="0D3B4C"/>
-                </a:solidFill>
-              </a:rPr>
-              <a:t>"Fundamentals of Database Systems: Normalization &amp; 3NF Integrity"</a:t>
-            </a:r>
-            <a:r>
-              <a:rPr>
-                <a:solidFill>
-                  <a:srgbClr val="28323C"/>
-                </a:solidFill>
-              </a:rPr>
-              <a:t>, 7th ed., Pearson Education, pp. 415–462, </a:t>
-            </a:r>
-            <a:r>
-              <a:rPr b="1">
-                <a:solidFill>
-                  <a:srgbClr val="71C9CE"/>
-                </a:solidFill>
-              </a:rPr>
-              <a:t>Year: 2017. </a:t>
-            </a:r>
-            <a:r>
-              <a:rPr>
-                <a:solidFill>
-                  <a:srgbClr val="2563EB"/>
-                </a:solidFill>
-              </a:rPr>
-              <a:t>Link: https://www.pearson.com</a:t>
-            </a:r>
-          </a:p>
-        </p:txBody>
-      </p:sp>
-    </p:spTree>
-  </p:cSld>
-  <p:clrMapOvr>
-    <a:masterClrMapping/>
-  </p:clrMapOvr>
-</p:sld>
-</file>
-
-<file path=ppt/slides/slide15.xml><?xml version="1.0" encoding="utf-8"?>
-<p:sld xmlns:a="http://schemas.openxmlformats.org/drawingml/2006/main" xmlns:p="http://schemas.openxmlformats.org/presentationml/2006/main" xmlns:r="http://schemas.openxmlformats.org/officeDocument/2006/relationships">
-  <p:cSld>
-    <p:spTree>
-      <p:nvGrpSpPr>
-        <p:cNvPr id="1" name=""/>
-        <p:cNvGrpSpPr/>
-        <p:nvPr/>
-      </p:nvGrpSpPr>
-      <p:grpSpPr/>
-      <p:pic>
-        <p:nvPicPr>
-          <p:cNvPr id="2" name="Picture 1" descr="page2_Image2.jpg"/>
-          <p:cNvPicPr>
-            <a:picLocks noChangeAspect="1"/>
-          </p:cNvPicPr>
-          <p:nvPr/>
-        </p:nvPicPr>
-        <p:blipFill>
-          <a:blip r:embed="rId2"/>
-          <a:stretch>
-            <a:fillRect/>
-          </a:stretch>
-        </p:blipFill>
-        <p:spPr>
-          <a:xfrm>
-            <a:off x="9784080" y="0"/>
-            <a:ext cx="2407615" cy="6858000"/>
-          </a:xfrm>
-          <a:prstGeom prst="rect">
-            <a:avLst/>
-          </a:prstGeom>
-        </p:spPr>
-      </p:pic>
-      <p:pic>
-        <p:nvPicPr>
-          <p:cNvPr id="3" name="Picture 2" descr="page2_Image4.jpg"/>
-          <p:cNvPicPr>
-            <a:picLocks noChangeAspect="1"/>
-          </p:cNvPicPr>
-          <p:nvPr/>
-        </p:nvPicPr>
-        <p:blipFill>
-          <a:blip r:embed="rId3"/>
-          <a:stretch>
-            <a:fillRect/>
-          </a:stretch>
-        </p:blipFill>
-        <p:spPr>
-          <a:xfrm>
-            <a:off x="914400" y="274320"/>
-            <a:ext cx="8412480" cy="1417320"/>
-          </a:xfrm>
-          <a:prstGeom prst="rect">
-            <a:avLst/>
-          </a:prstGeom>
-        </p:spPr>
-      </p:pic>
-      <p:sp>
-        <p:nvSpPr>
-          <p:cNvPr id="4" name="Rectangle 3"/>
-          <p:cNvSpPr/>
-          <p:nvPr/>
-        </p:nvSpPr>
-        <p:spPr>
-          <a:xfrm>
-            <a:off x="914400" y="1783080"/>
-            <a:ext cx="8412480" cy="36576"/>
-          </a:xfrm>
-          <a:prstGeom prst="rect">
-            <a:avLst/>
-          </a:prstGeom>
-          <a:solidFill>
-            <a:srgbClr val="71C9CE"/>
-          </a:solidFill>
-          <a:ln>
-            <a:solidFill>
-              <a:srgbClr val="71C9CE"/>
-            </a:solidFill>
-          </a:ln>
-        </p:spPr>
-        <p:style>
-          <a:lnRef idx="1">
-            <a:schemeClr val="accent1"/>
-          </a:lnRef>
-          <a:fillRef idx="3">
-            <a:schemeClr val="accent1"/>
-          </a:fillRef>
-          <a:effectRef idx="2">
-            <a:schemeClr val="accent1"/>
-          </a:effectRef>
-          <a:fontRef idx="minor">
-            <a:schemeClr val="lt1"/>
-          </a:fontRef>
-        </p:style>
-        <p:txBody>
-          <a:bodyPr rtlCol="0" anchor="ctr"/>
-          <a:lstStyle/>
-          <a:p>
-            <a:pPr algn="ctr"/>
-          </a:p>
-        </p:txBody>
-      </p:sp>
-      <p:sp>
-        <p:nvSpPr>
-          <p:cNvPr id="5" name="Rounded Rectangle 4"/>
-          <p:cNvSpPr/>
-          <p:nvPr/>
-        </p:nvSpPr>
-        <p:spPr>
-          <a:xfrm>
-            <a:off x="914400" y="2011680"/>
-            <a:ext cx="8412480" cy="1920240"/>
-          </a:xfrm>
-          <a:prstGeom prst="roundRect">
-            <a:avLst/>
-          </a:prstGeom>
-          <a:solidFill>
-            <a:srgbClr val="E3FDFD"/>
-          </a:solidFill>
-          <a:ln w="19050">
-            <a:solidFill>
-              <a:srgbClr val="71C9CE"/>
-            </a:solidFill>
-          </a:ln>
-        </p:spPr>
-        <p:style>
-          <a:lnRef idx="1">
-            <a:schemeClr val="accent1"/>
-          </a:lnRef>
-          <a:fillRef idx="3">
-            <a:schemeClr val="accent1"/>
-          </a:fillRef>
-          <a:effectRef idx="2">
-            <a:schemeClr val="accent1"/>
-          </a:effectRef>
-          <a:fontRef idx="minor">
-            <a:schemeClr val="lt1"/>
-          </a:fontRef>
-        </p:style>
-        <p:txBody>
-          <a:bodyPr rtlCol="0" anchor="ctr"/>
-          <a:lstStyle/>
-          <a:p>
-            <a:pPr algn="ctr"/>
-          </a:p>
-        </p:txBody>
-      </p:sp>
-      <p:sp>
-        <p:nvSpPr>
-          <p:cNvPr id="6" name="TextBox 5"/>
-          <p:cNvSpPr txBox="1"/>
-          <p:nvPr/>
-        </p:nvSpPr>
-        <p:spPr>
-          <a:xfrm>
-            <a:off x="1097280" y="2194560"/>
-            <a:ext cx="8046720" cy="1554480"/>
-          </a:xfrm>
-          <a:prstGeom prst="rect">
-            <a:avLst/>
-          </a:prstGeom>
-          <a:noFill/>
-        </p:spPr>
-        <p:txBody>
-          <a:bodyPr wrap="square">
-            <a:spAutoFit/>
-          </a:bodyPr>
-          <a:lstStyle/>
-          <a:p>
-            <a:pPr algn="ctr">
-              <a:spcAft>
-                <a:spcPts val="800"/>
-              </a:spcAft>
-              <a:defRPr sz="3200" b="1">
-                <a:solidFill>
-                  <a:srgbClr val="0D3B4C"/>
-                </a:solidFill>
-                <a:latin typeface="Segoe UI"/>
-              </a:defRPr>
-            </a:pPr>
-            <a:r>
-              <a:t>Thank You...!!</a:t>
-            </a:r>
-          </a:p>
-          <a:p>
-            <a:pPr algn="ctr">
-              <a:defRPr sz="2200" b="1">
-                <a:solidFill>
-                  <a:srgbClr val="71C9CE"/>
-                </a:solidFill>
-                <a:latin typeface="Segoe UI"/>
-              </a:defRPr>
-            </a:pPr>
-            <a:r>
-              <a:t>Questions &amp; Answers / Viva Discussion</a:t>
-            </a:r>
-          </a:p>
-        </p:txBody>
-      </p:sp>
-      <p:sp>
-        <p:nvSpPr>
-          <p:cNvPr id="7" name="Rounded Rectangle 6"/>
-          <p:cNvSpPr/>
-          <p:nvPr/>
-        </p:nvSpPr>
-        <p:spPr>
-          <a:xfrm>
-            <a:off x="914400" y="4160520"/>
-            <a:ext cx="8412480" cy="2148840"/>
-          </a:xfrm>
-          <a:prstGeom prst="roundRect">
-            <a:avLst/>
-          </a:prstGeom>
-          <a:solidFill>
-            <a:srgbClr val="FFFFFF"/>
-          </a:solidFill>
-          <a:ln w="19050">
-            <a:solidFill>
-              <a:srgbClr val="A6E3E9"/>
-            </a:solidFill>
-          </a:ln>
-        </p:spPr>
-        <p:style>
-          <a:lnRef idx="1">
-            <a:schemeClr val="accent1"/>
-          </a:lnRef>
-          <a:fillRef idx="3">
-            <a:schemeClr val="accent1"/>
-          </a:fillRef>
-          <a:effectRef idx="2">
-            <a:schemeClr val="accent1"/>
-          </a:effectRef>
-          <a:fontRef idx="minor">
-            <a:schemeClr val="lt1"/>
-          </a:fontRef>
-        </p:style>
-        <p:txBody>
-          <a:bodyPr rtlCol="0" anchor="ctr"/>
-          <a:lstStyle/>
-          <a:p>
-            <a:pPr algn="ctr"/>
-          </a:p>
-        </p:txBody>
-      </p:sp>
-      <p:sp>
-        <p:nvSpPr>
-          <p:cNvPr id="8" name="TextBox 7"/>
-          <p:cNvSpPr txBox="1"/>
-          <p:nvPr/>
-        </p:nvSpPr>
-        <p:spPr>
-          <a:xfrm>
-            <a:off x="1097280" y="4297680"/>
-            <a:ext cx="8046720" cy="1874519"/>
-          </a:xfrm>
-          <a:prstGeom prst="rect">
-            <a:avLst/>
-          </a:prstGeom>
-          <a:noFill/>
-        </p:spPr>
-        <p:txBody>
-          <a:bodyPr wrap="square">
-            <a:spAutoFit/>
-          </a:bodyPr>
-          <a:lstStyle/>
-          <a:p>
-            <a:pPr algn="ctr">
-              <a:spcAft>
-                <a:spcPts val="400"/>
-              </a:spcAft>
-              <a:defRPr sz="1800" b="1">
-                <a:solidFill>
-                  <a:srgbClr val="0D3B4C"/>
-                </a:solidFill>
-                <a:latin typeface="Segoe UI"/>
-              </a:defRPr>
-            </a:pPr>
-            <a:r>
-              <a:t>Project Team: Himanshu B. Jain (25107117) | Rishikesh Deherkar (25107112) | Paran Das (25107070)</a:t>
-            </a:r>
-          </a:p>
-          <a:p>
-            <a:pPr algn="ctr">
-              <a:spcAft>
-                <a:spcPts val="400"/>
-              </a:spcAft>
-              <a:defRPr sz="1700">
-                <a:solidFill>
-                  <a:srgbClr val="28323C"/>
-                </a:solidFill>
-                <a:latin typeface="Segoe UI"/>
-              </a:defRPr>
-            </a:pPr>
-            <a:r>
-              <a:t>Project Guide: Prof. Rajashree Chaudhari | A.Y. 2025–2026</a:t>
-            </a:r>
-          </a:p>
-          <a:p>
-            <a:pPr algn="ctr">
-              <a:defRPr sz="1700" b="1">
-                <a:solidFill>
-                  <a:srgbClr val="71C9CE"/>
-                </a:solidFill>
-                <a:latin typeface="Segoe UI"/>
-              </a:defRPr>
-            </a:pPr>
-            <a:r>
-              <a:t>Department of Computer Science &amp; Engineering (Data Science) | A.P. Shah Institute of Technology</a:t>
             </a:r>
           </a:p>
         </p:txBody>
@@ -7218,7 +9985,7 @@
               </a:defRPr>
             </a:pPr>
             <a:r>
-              <a:t>EXECUTIVE ROADMAP &amp; CHAPTER NAVIGATION</a:t>
+              <a:t>ROADMAP &amp; CHAPTER SEQUENCE</a:t>
             </a:r>
           </a:p>
           <a:p>
@@ -7434,7 +10201,7 @@
                   <a:srgbClr val="0D3B4C"/>
                 </a:solidFill>
               </a:rPr>
-              <a:t>1. Introduction &amp; Motivation  —  </a:t>
+              <a:t>1. Introduction  —  </a:t>
             </a:r>
             <a:r>
               <a:rPr>
@@ -7442,7 +10209,7 @@
                   <a:srgbClr val="28323C"/>
                 </a:solidFill>
               </a:rPr>
-              <a:t>Academic domain bottlenecks, debarment stress &amp; core modernization drivers.</a:t>
+              <a:t>Real-time domain observations, problem analysis, motivation &amp; core objectives.</a:t>
             </a:r>
           </a:p>
           <a:p>
@@ -7460,7 +10227,7 @@
                   <a:srgbClr val="0D3B4C"/>
                 </a:solidFill>
               </a:rPr>
-              <a:t>2. Problem Statement &amp; Objectives  —  </a:t>
+              <a:t>2. Problem Statement  —  </a:t>
             </a:r>
             <a:r>
               <a:rPr>
@@ -7468,7 +10235,7 @@
                   <a:srgbClr val="28323C"/>
                 </a:solidFill>
               </a:rPr>
-              <a:t>Contemporary institutional silos, key engineering challenges &amp; project scope.</a:t>
+              <a:t>Contemporary institutional silos, key addressed challenges &amp; conceptual architecture.</a:t>
             </a:r>
           </a:p>
           <a:p>
@@ -7486,7 +10253,7 @@
                   <a:srgbClr val="0D3B4C"/>
                 </a:solidFill>
               </a:rPr>
-              <a:t>3. System Architecture  —  </a:t>
+              <a:t>3. System Design  —  </a:t>
             </a:r>
             <a:r>
               <a:rPr>
@@ -7494,7 +10261,7 @@
                   <a:srgbClr val="28323C"/>
                 </a:solidFill>
               </a:rPr>
-              <a:t>Decoupled three-tier client-server decomposition (React 19, Express, SQLite).</a:t>
+              <a:t>Three-tier architecture, 26-table relational SQL model (3NF) &amp; mathematical formulations.</a:t>
             </a:r>
           </a:p>
           <a:p>
@@ -7512,7 +10279,7 @@
                   <a:srgbClr val="0D3B4C"/>
                 </a:solidFill>
               </a:rPr>
-              <a:t>4. Relational Database Design  —  </a:t>
+              <a:t>4. Technologies &amp; Methodologies  —  </a:t>
             </a:r>
             <a:r>
               <a:rPr>
@@ -7520,7 +10287,7 @@
                   <a:srgbClr val="28323C"/>
                 </a:solidFill>
               </a:rPr>
-              <a:t>26-table normalized schema in 3NF with cascading referential integrity.</a:t>
+              <a:t>React 19 SPA, Express REST API, SQLite engine &amp; bespoke 4-color aquatic design system.</a:t>
             </a:r>
           </a:p>
           <a:p>
@@ -7538,7 +10305,7 @@
                   <a:srgbClr val="0D3B4C"/>
                 </a:solidFill>
               </a:rPr>
-              <a:t>5. Core Modules &amp; Math Models  —  </a:t>
+              <a:t>5. Implementation &amp; Workflows  —  </a:t>
             </a:r>
             <a:r>
               <a:rPr>
@@ -7546,7 +10313,7 @@
                   <a:srgbClr val="28323C"/>
                 </a:solidFill>
               </a:rPr>
-              <a:t>Dual-role operation (Student vs Admin) &amp; attendance safe-margin formulations.</a:t>
+              <a:t>Interactive role-based modules (Alex Turner vs. Dr. Vikram Malhotra) &amp; verified features.</a:t>
             </a:r>
           </a:p>
           <a:p>
@@ -7564,7 +10331,7 @@
                   <a:srgbClr val="0D3B4C"/>
                 </a:solidFill>
               </a:rPr>
-              <a:t>6. Implementation &amp; Verification  —  </a:t>
+              <a:t>6. Verification &amp; Results  —  </a:t>
             </a:r>
             <a:r>
               <a:rPr>
@@ -7572,7 +10339,7 @@
                   <a:srgbClr val="28323C"/>
                 </a:solidFill>
               </a:rPr>
-              <a:t>Interactive features, test matrix (TC-01 to TC-05) &amp; sub-50ms latency benchmarks.</a:t>
+              <a:t>Comprehensive test matrix (TC-01 to TC-05) &amp; sub-50ms empirical latency benchmarks.</a:t>
             </a:r>
           </a:p>
           <a:p>
@@ -7598,7 +10365,757 @@
                   <a:srgbClr val="28323C"/>
                 </a:solidFill>
               </a:rPr>
-              <a:t>Key project milestones, planned enhancements &amp; reverse-chronological citations.</a:t>
+              <a:t>Key deliverables, planned future enhancements &amp; reverse-chronological IEEE citations.</a:t>
+            </a:r>
+          </a:p>
+        </p:txBody>
+      </p:sp>
+    </p:spTree>
+  </p:cSld>
+  <p:clrMapOvr>
+    <a:masterClrMapping/>
+  </p:clrMapOvr>
+</p:sld>
+</file>
+
+<file path=ppt/slides/slide20.xml><?xml version="1.0" encoding="utf-8"?>
+<p:sld xmlns:a="http://schemas.openxmlformats.org/drawingml/2006/main" xmlns:p="http://schemas.openxmlformats.org/presentationml/2006/main" xmlns:r="http://schemas.openxmlformats.org/officeDocument/2006/relationships">
+  <p:cSld>
+    <p:spTree>
+      <p:nvGrpSpPr>
+        <p:cNvPr id="1" name=""/>
+        <p:cNvGrpSpPr/>
+        <p:nvPr/>
+      </p:nvGrpSpPr>
+      <p:grpSpPr/>
+      <p:pic>
+        <p:nvPicPr>
+          <p:cNvPr id="2" name="Picture 1" descr="page2_Image2.jpg"/>
+          <p:cNvPicPr>
+            <a:picLocks noChangeAspect="1"/>
+          </p:cNvPicPr>
+          <p:nvPr/>
+        </p:nvPicPr>
+        <p:blipFill>
+          <a:blip r:embed="rId2"/>
+          <a:stretch>
+            <a:fillRect/>
+          </a:stretch>
+        </p:blipFill>
+        <p:spPr>
+          <a:xfrm>
+            <a:off x="9784080" y="0"/>
+            <a:ext cx="2407615" cy="6858000"/>
+          </a:xfrm>
+          <a:prstGeom prst="rect">
+            <a:avLst/>
+          </a:prstGeom>
+        </p:spPr>
+      </p:pic>
+      <p:sp>
+        <p:nvSpPr>
+          <p:cNvPr id="3" name="TextBox 2"/>
+          <p:cNvSpPr txBox="1"/>
+          <p:nvPr/>
+        </p:nvSpPr>
+        <p:spPr>
+          <a:xfrm>
+            <a:off x="731520" y="320040"/>
+            <a:ext cx="8961120" cy="914400"/>
+          </a:xfrm>
+          <a:prstGeom prst="rect">
+            <a:avLst/>
+          </a:prstGeom>
+          <a:noFill/>
+        </p:spPr>
+        <p:txBody>
+          <a:bodyPr wrap="square" lIns="0" tIns="0" rIns="0" bIns="0">
+            <a:spAutoFit/>
+          </a:bodyPr>
+          <a:lstStyle/>
+          <a:p>
+            <a:pPr>
+              <a:spcAft>
+                <a:spcPts val="200"/>
+              </a:spcAft>
+              <a:defRPr sz="1700" b="1">
+                <a:solidFill>
+                  <a:srgbClr val="71C9CE"/>
+                </a:solidFill>
+                <a:latin typeface="Segoe UI"/>
+              </a:defRPr>
+            </a:pPr>
+            <a:r>
+              <a:t>REVERSE CHRONOLOGICAL: 2020 – 2017</a:t>
+            </a:r>
+          </a:p>
+          <a:p>
+            <a:pPr>
+              <a:defRPr sz="2800" b="1">
+                <a:solidFill>
+                  <a:srgbClr val="0D3B4C"/>
+                </a:solidFill>
+                <a:latin typeface="Segoe UI"/>
+              </a:defRPr>
+            </a:pPr>
+            <a:r>
+              <a:t>References: Foundational Systems</a:t>
+            </a:r>
+          </a:p>
+        </p:txBody>
+      </p:sp>
+      <p:sp>
+        <p:nvSpPr>
+          <p:cNvPr id="4" name="Rectangle 3"/>
+          <p:cNvSpPr/>
+          <p:nvPr/>
+        </p:nvSpPr>
+        <p:spPr>
+          <a:xfrm>
+            <a:off x="731520" y="1298448"/>
+            <a:ext cx="8961120" cy="36576"/>
+          </a:xfrm>
+          <a:prstGeom prst="rect">
+            <a:avLst/>
+          </a:prstGeom>
+          <a:solidFill>
+            <a:srgbClr val="71C9CE"/>
+          </a:solidFill>
+          <a:ln>
+            <a:solidFill>
+              <a:srgbClr val="71C9CE"/>
+            </a:solidFill>
+          </a:ln>
+        </p:spPr>
+        <p:style>
+          <a:lnRef idx="1">
+            <a:schemeClr val="accent1"/>
+          </a:lnRef>
+          <a:fillRef idx="3">
+            <a:schemeClr val="accent1"/>
+          </a:fillRef>
+          <a:effectRef idx="2">
+            <a:schemeClr val="accent1"/>
+          </a:effectRef>
+          <a:fontRef idx="minor">
+            <a:schemeClr val="lt1"/>
+          </a:fontRef>
+        </p:style>
+        <p:txBody>
+          <a:bodyPr rtlCol="0" anchor="ctr"/>
+          <a:lstStyle/>
+          <a:p>
+            <a:pPr algn="ctr"/>
+          </a:p>
+        </p:txBody>
+      </p:sp>
+      <p:sp>
+        <p:nvSpPr>
+          <p:cNvPr id="5" name="TextBox 4"/>
+          <p:cNvSpPr txBox="1"/>
+          <p:nvPr/>
+        </p:nvSpPr>
+        <p:spPr>
+          <a:xfrm>
+            <a:off x="731520" y="6446520"/>
+            <a:ext cx="7863840" cy="320040"/>
+          </a:xfrm>
+          <a:prstGeom prst="rect">
+            <a:avLst/>
+          </a:prstGeom>
+          <a:noFill/>
+        </p:spPr>
+        <p:txBody>
+          <a:bodyPr wrap="none" lIns="0" tIns="0" rIns="0" bIns="0">
+            <a:spAutoFit/>
+          </a:bodyPr>
+          <a:lstStyle/>
+          <a:p>
+            <a:pPr>
+              <a:defRPr sz="1700">
+                <a:solidFill>
+                  <a:srgbClr val="6E7882"/>
+                </a:solidFill>
+                <a:latin typeface="Segoe UI"/>
+              </a:defRPr>
+            </a:pPr>
+            <a:r>
+              <a:t>A.P. Shah Institute of Technology | Dept. of CSE (Data Science) | Campus 360</a:t>
+            </a:r>
+          </a:p>
+        </p:txBody>
+      </p:sp>
+      <p:sp>
+        <p:nvSpPr>
+          <p:cNvPr id="6" name="TextBox 5"/>
+          <p:cNvSpPr txBox="1"/>
+          <p:nvPr/>
+        </p:nvSpPr>
+        <p:spPr>
+          <a:xfrm>
+            <a:off x="8686800" y="6446520"/>
+            <a:ext cx="1005840" cy="320040"/>
+          </a:xfrm>
+          <a:prstGeom prst="rect">
+            <a:avLst/>
+          </a:prstGeom>
+          <a:noFill/>
+        </p:spPr>
+        <p:txBody>
+          <a:bodyPr wrap="none" lIns="0" tIns="0" rIns="0" bIns="0">
+            <a:spAutoFit/>
+          </a:bodyPr>
+          <a:lstStyle/>
+          <a:p>
+            <a:pPr algn="r">
+              <a:defRPr sz="1700" b="1">
+                <a:solidFill>
+                  <a:srgbClr val="0D3B4C"/>
+                </a:solidFill>
+                <a:latin typeface="Segoe UI"/>
+              </a:defRPr>
+            </a:pPr>
+            <a:r>
+              <a:t>Slide 20</a:t>
+            </a:r>
+          </a:p>
+        </p:txBody>
+      </p:sp>
+      <p:sp>
+        <p:nvSpPr>
+          <p:cNvPr id="7" name="Rounded Rectangle 6"/>
+          <p:cNvSpPr/>
+          <p:nvPr/>
+        </p:nvSpPr>
+        <p:spPr>
+          <a:xfrm>
+            <a:off x="731520" y="1463040"/>
+            <a:ext cx="8961120" cy="4709160"/>
+          </a:xfrm>
+          <a:prstGeom prst="roundRect">
+            <a:avLst/>
+          </a:prstGeom>
+          <a:solidFill>
+            <a:srgbClr val="FFFFFF"/>
+          </a:solidFill>
+          <a:ln w="19050">
+            <a:solidFill>
+              <a:srgbClr val="71C9CE"/>
+            </a:solidFill>
+          </a:ln>
+        </p:spPr>
+        <p:style>
+          <a:lnRef idx="1">
+            <a:schemeClr val="accent1"/>
+          </a:lnRef>
+          <a:fillRef idx="3">
+            <a:schemeClr val="accent1"/>
+          </a:fillRef>
+          <a:effectRef idx="2">
+            <a:schemeClr val="accent1"/>
+          </a:effectRef>
+          <a:fontRef idx="minor">
+            <a:schemeClr val="lt1"/>
+          </a:fontRef>
+        </p:style>
+        <p:txBody>
+          <a:bodyPr rtlCol="0" anchor="ctr"/>
+          <a:lstStyle/>
+          <a:p>
+            <a:pPr algn="ctr"/>
+          </a:p>
+        </p:txBody>
+      </p:sp>
+      <p:sp>
+        <p:nvSpPr>
+          <p:cNvPr id="8" name="TextBox 7"/>
+          <p:cNvSpPr txBox="1"/>
+          <p:nvPr/>
+        </p:nvSpPr>
+        <p:spPr>
+          <a:xfrm>
+            <a:off x="914400" y="1600200"/>
+            <a:ext cx="8595360" cy="4434840"/>
+          </a:xfrm>
+          <a:prstGeom prst="rect">
+            <a:avLst/>
+          </a:prstGeom>
+          <a:noFill/>
+        </p:spPr>
+        <p:txBody>
+          <a:bodyPr wrap="square">
+            <a:spAutoFit/>
+          </a:bodyPr>
+          <a:lstStyle/>
+          <a:p>
+            <a:pPr>
+              <a:spcAft>
+                <a:spcPts val="1800"/>
+              </a:spcAft>
+              <a:defRPr sz="1800">
+                <a:latin typeface="Segoe UI"/>
+              </a:defRPr>
+            </a:pPr>
+            <a:r>
+              <a:rPr>
+                <a:solidFill>
+                  <a:srgbClr val="28323C"/>
+                </a:solidFill>
+              </a:rPr>
+              <a:t>[5] A. Banks and E. Porcello, </a:t>
+            </a:r>
+            <a:r>
+              <a:rPr b="1">
+                <a:solidFill>
+                  <a:srgbClr val="0D3B4C"/>
+                </a:solidFill>
+              </a:rPr>
+              <a:t>"Learning React: Modern Patterns for Developing React Applications"</a:t>
+            </a:r>
+            <a:r>
+              <a:rPr>
+                <a:solidFill>
+                  <a:srgbClr val="28323C"/>
+                </a:solidFill>
+              </a:rPr>
+              <a:t>, 2nd ed., O'Reilly Media, pp. 45–112, </a:t>
+            </a:r>
+            <a:r>
+              <a:rPr b="1">
+                <a:solidFill>
+                  <a:srgbClr val="71C9CE"/>
+                </a:solidFill>
+              </a:rPr>
+              <a:t>Year: 2020. </a:t>
+            </a:r>
+            <a:r>
+              <a:rPr>
+                <a:solidFill>
+                  <a:srgbClr val="2563EB"/>
+                </a:solidFill>
+              </a:rPr>
+              <a:t>Link: https://www.oreilly.com</a:t>
+            </a:r>
+          </a:p>
+          <a:p>
+            <a:pPr>
+              <a:spcAft>
+                <a:spcPts val="1800"/>
+              </a:spcAft>
+              <a:defRPr sz="1800">
+                <a:latin typeface="Segoe UI"/>
+              </a:defRPr>
+            </a:pPr>
+            <a:r>
+              <a:rPr>
+                <a:solidFill>
+                  <a:srgbClr val="28323C"/>
+                </a:solidFill>
+              </a:rPr>
+              <a:t>[6] R. Elmasri and S. B. Navathe, </a:t>
+            </a:r>
+            <a:r>
+              <a:rPr b="1">
+                <a:solidFill>
+                  <a:srgbClr val="0D3B4C"/>
+                </a:solidFill>
+              </a:rPr>
+              <a:t>"Fundamentals of Database Systems: Normalization &amp; 3NF Integrity"</a:t>
+            </a:r>
+            <a:r>
+              <a:rPr>
+                <a:solidFill>
+                  <a:srgbClr val="28323C"/>
+                </a:solidFill>
+              </a:rPr>
+              <a:t>, 7th ed., Pearson Education, pp. 415–462, </a:t>
+            </a:r>
+            <a:r>
+              <a:rPr b="1">
+                <a:solidFill>
+                  <a:srgbClr val="71C9CE"/>
+                </a:solidFill>
+              </a:rPr>
+              <a:t>Year: 2017. </a:t>
+            </a:r>
+            <a:r>
+              <a:rPr>
+                <a:solidFill>
+                  <a:srgbClr val="2563EB"/>
+                </a:solidFill>
+              </a:rPr>
+              <a:t>Link: https://www.pearson.com</a:t>
+            </a:r>
+          </a:p>
+          <a:p>
+            <a:pPr>
+              <a:spcAft>
+                <a:spcPts val="1800"/>
+              </a:spcAft>
+              <a:defRPr sz="1800">
+                <a:latin typeface="Segoe UI"/>
+              </a:defRPr>
+            </a:pPr>
+            <a:r>
+              <a:rPr>
+                <a:solidFill>
+                  <a:srgbClr val="28323C"/>
+                </a:solidFill>
+              </a:rPr>
+              <a:t>[7] M. Cantelon, M. Harter, T. Holowaychuk, </a:t>
+            </a:r>
+            <a:r>
+              <a:rPr b="1">
+                <a:solidFill>
+                  <a:srgbClr val="0D3B4C"/>
+                </a:solidFill>
+              </a:rPr>
+              <a:t>"Node.js in Action: Event-Driven REST Architecture"</a:t>
+            </a:r>
+            <a:r>
+              <a:rPr>
+                <a:solidFill>
+                  <a:srgbClr val="28323C"/>
+                </a:solidFill>
+              </a:rPr>
+              <a:t>, 2nd ed., Manning Publications, pp. 88–140, </a:t>
+            </a:r>
+            <a:r>
+              <a:rPr b="1">
+                <a:solidFill>
+                  <a:srgbClr val="71C9CE"/>
+                </a:solidFill>
+              </a:rPr>
+              <a:t>Year: 2017. </a:t>
+            </a:r>
+            <a:r>
+              <a:rPr>
+                <a:solidFill>
+                  <a:srgbClr val="2563EB"/>
+                </a:solidFill>
+              </a:rPr>
+              <a:t>Link: https://www.manning.com</a:t>
+            </a:r>
+          </a:p>
+        </p:txBody>
+      </p:sp>
+    </p:spTree>
+  </p:cSld>
+  <p:clrMapOvr>
+    <a:masterClrMapping/>
+  </p:clrMapOvr>
+</p:sld>
+</file>
+
+<file path=ppt/slides/slide21.xml><?xml version="1.0" encoding="utf-8"?>
+<p:sld xmlns:a="http://schemas.openxmlformats.org/drawingml/2006/main" xmlns:p="http://schemas.openxmlformats.org/presentationml/2006/main" xmlns:r="http://schemas.openxmlformats.org/officeDocument/2006/relationships">
+  <p:cSld>
+    <p:spTree>
+      <p:nvGrpSpPr>
+        <p:cNvPr id="1" name=""/>
+        <p:cNvGrpSpPr/>
+        <p:nvPr/>
+      </p:nvGrpSpPr>
+      <p:grpSpPr/>
+      <p:pic>
+        <p:nvPicPr>
+          <p:cNvPr id="2" name="Picture 1" descr="page2_Image2.jpg"/>
+          <p:cNvPicPr>
+            <a:picLocks noChangeAspect="1"/>
+          </p:cNvPicPr>
+          <p:nvPr/>
+        </p:nvPicPr>
+        <p:blipFill>
+          <a:blip r:embed="rId2"/>
+          <a:stretch>
+            <a:fillRect/>
+          </a:stretch>
+        </p:blipFill>
+        <p:spPr>
+          <a:xfrm>
+            <a:off x="9784080" y="0"/>
+            <a:ext cx="2407615" cy="6858000"/>
+          </a:xfrm>
+          <a:prstGeom prst="rect">
+            <a:avLst/>
+          </a:prstGeom>
+        </p:spPr>
+      </p:pic>
+      <p:pic>
+        <p:nvPicPr>
+          <p:cNvPr id="3" name="Picture 2" descr="page2_Image4.jpg"/>
+          <p:cNvPicPr>
+            <a:picLocks noChangeAspect="1"/>
+          </p:cNvPicPr>
+          <p:nvPr/>
+        </p:nvPicPr>
+        <p:blipFill>
+          <a:blip r:embed="rId3"/>
+          <a:stretch>
+            <a:fillRect/>
+          </a:stretch>
+        </p:blipFill>
+        <p:spPr>
+          <a:xfrm>
+            <a:off x="914400" y="274320"/>
+            <a:ext cx="8412480" cy="1417320"/>
+          </a:xfrm>
+          <a:prstGeom prst="rect">
+            <a:avLst/>
+          </a:prstGeom>
+        </p:spPr>
+      </p:pic>
+      <p:sp>
+        <p:nvSpPr>
+          <p:cNvPr id="4" name="Rectangle 3"/>
+          <p:cNvSpPr/>
+          <p:nvPr/>
+        </p:nvSpPr>
+        <p:spPr>
+          <a:xfrm>
+            <a:off x="914400" y="1783080"/>
+            <a:ext cx="8412480" cy="36576"/>
+          </a:xfrm>
+          <a:prstGeom prst="rect">
+            <a:avLst/>
+          </a:prstGeom>
+          <a:solidFill>
+            <a:srgbClr val="71C9CE"/>
+          </a:solidFill>
+          <a:ln>
+            <a:solidFill>
+              <a:srgbClr val="71C9CE"/>
+            </a:solidFill>
+          </a:ln>
+        </p:spPr>
+        <p:style>
+          <a:lnRef idx="1">
+            <a:schemeClr val="accent1"/>
+          </a:lnRef>
+          <a:fillRef idx="3">
+            <a:schemeClr val="accent1"/>
+          </a:fillRef>
+          <a:effectRef idx="2">
+            <a:schemeClr val="accent1"/>
+          </a:effectRef>
+          <a:fontRef idx="minor">
+            <a:schemeClr val="lt1"/>
+          </a:fontRef>
+        </p:style>
+        <p:txBody>
+          <a:bodyPr rtlCol="0" anchor="ctr"/>
+          <a:lstStyle/>
+          <a:p>
+            <a:pPr algn="ctr"/>
+          </a:p>
+        </p:txBody>
+      </p:sp>
+      <p:sp>
+        <p:nvSpPr>
+          <p:cNvPr id="5" name="Rounded Rectangle 4"/>
+          <p:cNvSpPr/>
+          <p:nvPr/>
+        </p:nvSpPr>
+        <p:spPr>
+          <a:xfrm>
+            <a:off x="914400" y="2011680"/>
+            <a:ext cx="8412480" cy="2011680"/>
+          </a:xfrm>
+          <a:prstGeom prst="roundRect">
+            <a:avLst/>
+          </a:prstGeom>
+          <a:solidFill>
+            <a:srgbClr val="E3FDFD"/>
+          </a:solidFill>
+          <a:ln w="19050">
+            <a:solidFill>
+              <a:srgbClr val="71C9CE"/>
+            </a:solidFill>
+          </a:ln>
+        </p:spPr>
+        <p:style>
+          <a:lnRef idx="1">
+            <a:schemeClr val="accent1"/>
+          </a:lnRef>
+          <a:fillRef idx="3">
+            <a:schemeClr val="accent1"/>
+          </a:fillRef>
+          <a:effectRef idx="2">
+            <a:schemeClr val="accent1"/>
+          </a:effectRef>
+          <a:fontRef idx="minor">
+            <a:schemeClr val="lt1"/>
+          </a:fontRef>
+        </p:style>
+        <p:txBody>
+          <a:bodyPr rtlCol="0" anchor="ctr"/>
+          <a:lstStyle/>
+          <a:p>
+            <a:pPr algn="ctr"/>
+          </a:p>
+        </p:txBody>
+      </p:sp>
+      <p:sp>
+        <p:nvSpPr>
+          <p:cNvPr id="6" name="TextBox 5"/>
+          <p:cNvSpPr txBox="1"/>
+          <p:nvPr/>
+        </p:nvSpPr>
+        <p:spPr>
+          <a:xfrm>
+            <a:off x="1097280" y="2148840"/>
+            <a:ext cx="8046720" cy="1737360"/>
+          </a:xfrm>
+          <a:prstGeom prst="rect">
+            <a:avLst/>
+          </a:prstGeom>
+          <a:noFill/>
+        </p:spPr>
+        <p:txBody>
+          <a:bodyPr wrap="square">
+            <a:spAutoFit/>
+          </a:bodyPr>
+          <a:lstStyle/>
+          <a:p>
+            <a:pPr algn="ctr">
+              <a:spcAft>
+                <a:spcPts val="600"/>
+              </a:spcAft>
+              <a:defRPr sz="4000" b="1">
+                <a:solidFill>
+                  <a:srgbClr val="0D3B4C"/>
+                </a:solidFill>
+                <a:latin typeface="Segoe UI"/>
+              </a:defRPr>
+            </a:pPr>
+            <a:r>
+              <a:t>Thank You...!!</a:t>
+            </a:r>
+          </a:p>
+          <a:p>
+            <a:pPr algn="ctr">
+              <a:defRPr sz="2200" b="1">
+                <a:solidFill>
+                  <a:srgbClr val="71C9CE"/>
+                </a:solidFill>
+                <a:latin typeface="Segoe UI"/>
+              </a:defRPr>
+            </a:pPr>
+            <a:r>
+              <a:t>Questions &amp; Answers / Viva Discussion</a:t>
+            </a:r>
+          </a:p>
+        </p:txBody>
+      </p:sp>
+      <p:sp>
+        <p:nvSpPr>
+          <p:cNvPr id="7" name="Rounded Rectangle 6"/>
+          <p:cNvSpPr/>
+          <p:nvPr/>
+        </p:nvSpPr>
+        <p:spPr>
+          <a:xfrm>
+            <a:off x="914400" y="4206240"/>
+            <a:ext cx="8412480" cy="2148840"/>
+          </a:xfrm>
+          <a:prstGeom prst="roundRect">
+            <a:avLst/>
+          </a:prstGeom>
+          <a:solidFill>
+            <a:srgbClr val="FFFFFF"/>
+          </a:solidFill>
+          <a:ln w="19050">
+            <a:solidFill>
+              <a:srgbClr val="A6E3E9"/>
+            </a:solidFill>
+          </a:ln>
+        </p:spPr>
+        <p:style>
+          <a:lnRef idx="1">
+            <a:schemeClr val="accent1"/>
+          </a:lnRef>
+          <a:fillRef idx="3">
+            <a:schemeClr val="accent1"/>
+          </a:fillRef>
+          <a:effectRef idx="2">
+            <a:schemeClr val="accent1"/>
+          </a:effectRef>
+          <a:fontRef idx="minor">
+            <a:schemeClr val="lt1"/>
+          </a:fontRef>
+        </p:style>
+        <p:txBody>
+          <a:bodyPr rtlCol="0" anchor="ctr"/>
+          <a:lstStyle/>
+          <a:p>
+            <a:pPr algn="ctr"/>
+          </a:p>
+        </p:txBody>
+      </p:sp>
+      <p:sp>
+        <p:nvSpPr>
+          <p:cNvPr id="8" name="TextBox 7"/>
+          <p:cNvSpPr txBox="1"/>
+          <p:nvPr/>
+        </p:nvSpPr>
+        <p:spPr>
+          <a:xfrm>
+            <a:off x="1097280" y="4297680"/>
+            <a:ext cx="8046720" cy="1920240"/>
+          </a:xfrm>
+          <a:prstGeom prst="rect">
+            <a:avLst/>
+          </a:prstGeom>
+          <a:noFill/>
+        </p:spPr>
+        <p:txBody>
+          <a:bodyPr wrap="square">
+            <a:spAutoFit/>
+          </a:bodyPr>
+          <a:lstStyle/>
+          <a:p>
+            <a:pPr algn="ctr">
+              <a:spcAft>
+                <a:spcPts val="400"/>
+              </a:spcAft>
+              <a:defRPr sz="1700" b="1">
+                <a:solidFill>
+                  <a:srgbClr val="0D3B4C"/>
+                </a:solidFill>
+                <a:latin typeface="Segoe UI"/>
+              </a:defRPr>
+            </a:pPr>
+            <a:r>
+              <a:t>Project Team: Himanshu B. Jain (25107117) | Rishikesh Deherkar (25107112) | Paran Das (25107070)</a:t>
+            </a:r>
+          </a:p>
+          <a:p>
+            <a:pPr algn="ctr">
+              <a:spcAft>
+                <a:spcPts val="400"/>
+              </a:spcAft>
+              <a:defRPr sz="1700">
+                <a:solidFill>
+                  <a:srgbClr val="28323C"/>
+                </a:solidFill>
+                <a:latin typeface="Segoe UI"/>
+              </a:defRPr>
+            </a:pPr>
+            <a:r>
+              <a:t>Project Guide: Prof. Rajashri Chaudhari | A.Y. 2026–2027</a:t>
+            </a:r>
+          </a:p>
+          <a:p>
+            <a:pPr algn="ctr">
+              <a:defRPr sz="1700" b="1">
+                <a:solidFill>
+                  <a:srgbClr val="71C9CE"/>
+                </a:solidFill>
+                <a:latin typeface="Segoe UI"/>
+              </a:defRPr>
+            </a:pPr>
+            <a:r>
+              <a:t>Department of Computer Science &amp; Engineering (Data Science) | A.P. Shah Institute of Technology</a:t>
             </a:r>
           </a:p>
         </p:txBody>
@@ -7679,7 +11196,7 @@
               </a:defRPr>
             </a:pPr>
             <a:r>
-              <a:t>CHAPTER 1: DOMAIN REALITIES &amp; CATALYSTS</a:t>
+              <a:t>CHAPTER 1: PROBLEM DOMAIN REALITIES</a:t>
             </a:r>
           </a:p>
           <a:p>
@@ -7692,7 +11209,7 @@
               </a:defRPr>
             </a:pPr>
             <a:r>
-              <a:t>Introduction &amp; Project Motivation</a:t>
+              <a:t>Introduction: Domain Observations</a:t>
             </a:r>
           </a:p>
         </p:txBody>
@@ -7947,8 +11464,8 @@
         </p:nvSpPr>
         <p:spPr>
           <a:xfrm>
-            <a:off x="914400" y="2121408"/>
-            <a:ext cx="3931920" cy="3840480"/>
+            <a:off x="914400" y="2194560"/>
+            <a:ext cx="3931920" cy="3749039"/>
           </a:xfrm>
           <a:prstGeom prst="rect">
             <a:avLst/>
@@ -7964,7 +11481,7 @@
           <a:p>
             <a:pPr>
               <a:spcAft>
-                <a:spcPts val="800"/>
+                <a:spcPts val="1600"/>
               </a:spcAft>
               <a:defRPr sz="1800">
                 <a:latin typeface="Segoe UI"/>
@@ -7992,13 +11509,13 @@
                   <a:srgbClr val="28323C"/>
                 </a:solidFill>
               </a:rPr>
-              <a:t>Timetables, notices, and notes scattered across uncoordinated bulletin boards and chat groups [2].</a:t>
+              <a:t>Timetables, circulars, and notes scattered across uncoordinated bulletin boards and chat groups [8].</a:t>
             </a:r>
           </a:p>
           <a:p>
             <a:pPr>
               <a:spcAft>
-                <a:spcPts val="800"/>
+                <a:spcPts val="1600"/>
               </a:spcAft>
               <a:defRPr sz="1800">
                 <a:latin typeface="Segoe UI"/>
@@ -8018,7 +11535,7 @@
                   <a:srgbClr val="0D3B4C"/>
                 </a:solidFill>
               </a:rPr>
-              <a:t>Attendance Debarment Opacity: </a:t>
+              <a:t>Attendance Opacity: </a:t>
             </a:r>
             <a:r>
               <a:rPr>
@@ -8026,13 +11543,13 @@
                   <a:srgbClr val="28323C"/>
                 </a:solidFill>
               </a:rPr>
-              <a:t>Students lack predictive visibility into safe-bunk and deficit margins before crossing the 75% limit.</a:t>
+              <a:t>Students lack predictive visibility into safe-bunk and deficit margins, triggering exam debarment.</a:t>
             </a:r>
           </a:p>
           <a:p>
             <a:pPr>
               <a:spcAft>
-                <a:spcPts val="800"/>
+                <a:spcPts val="1600"/>
               </a:spcAft>
               <a:defRPr sz="1800">
                 <a:latin typeface="Segoe UI"/>
@@ -8052,7 +11569,7 @@
                   <a:srgbClr val="0D3B4C"/>
                 </a:solidFill>
               </a:rPr>
-              <a:t>Manual Paper &amp; Notice Latency: </a:t>
+              <a:t>Submissions Chaos: </a:t>
             </a:r>
             <a:r>
               <a:rPr>
@@ -8060,7 +11577,7 @@
                   <a:srgbClr val="28323C"/>
                 </a:solidFill>
               </a:rPr>
-              <a:t>Lost-and-found claims and grievance tracking rely on unindexed physical forms with zero tracking.</a:t>
+              <a:t>Assignment repositories and links get lost in ad-hoc faculty emails with zero audit tracking.</a:t>
             </a:r>
           </a:p>
         </p:txBody>
@@ -8185,7 +11702,7 @@
               </a:defRPr>
             </a:pPr>
             <a:r>
-              <a:t>PROJECT MOTIVATION &amp; OBJECTIVES</a:t>
+              <a:t>LIMITATIONS OF CURRENT SOLUTIONS</a:t>
             </a:r>
           </a:p>
         </p:txBody>
@@ -8198,8 +11715,8 @@
         </p:nvSpPr>
         <p:spPr>
           <a:xfrm>
-            <a:off x="5486400" y="2121408"/>
-            <a:ext cx="3931920" cy="3840480"/>
+            <a:off x="5486400" y="2194560"/>
+            <a:ext cx="3931920" cy="3749039"/>
           </a:xfrm>
           <a:prstGeom prst="rect">
             <a:avLst/>
@@ -8215,7 +11732,7 @@
           <a:p>
             <a:pPr>
               <a:spcAft>
-                <a:spcPts val="800"/>
+                <a:spcPts val="1600"/>
               </a:spcAft>
               <a:defRPr sz="1800">
                 <a:latin typeface="Segoe UI"/>
@@ -8235,7 +11752,7 @@
                   <a:srgbClr val="0D3B4C"/>
                 </a:solidFill>
               </a:rPr>
-              <a:t>Unified Single-Pane Ecosystem: </a:t>
+              <a:t>Legacy Monolithic ERPs: </a:t>
             </a:r>
             <a:r>
               <a:rPr>
@@ -8243,13 +11760,13 @@
                   <a:srgbClr val="28323C"/>
                 </a:solidFill>
               </a:rPr>
-              <a:t>Consolidates 8 academic and campus life services into a single responsive web application.</a:t>
+              <a:t>Cluttered desktop interfaces with high latency, complex schemas, and zero mobile responsiveness [1].</a:t>
             </a:r>
           </a:p>
           <a:p>
             <a:pPr>
               <a:spcAft>
-                <a:spcPts val="800"/>
+                <a:spcPts val="1600"/>
               </a:spcAft>
               <a:defRPr sz="1800">
                 <a:latin typeface="Segoe UI"/>
@@ -8269,7 +11786,7 @@
                   <a:srgbClr val="0D3B4C"/>
                 </a:solidFill>
               </a:rPr>
-              <a:t>Deterministic Attendance Math: </a:t>
+              <a:t>Paper-Based Manual Forms: </a:t>
             </a:r>
             <a:r>
               <a:rPr>
@@ -8277,13 +11794,13 @@
                   <a:srgbClr val="28323C"/>
                 </a:solidFill>
               </a:rPr>
-              <a:t>Embeds real-time safety threshold equations directly in the student dashboard to prevent debarment.</a:t>
+              <a:t>Grievances and lost-and-found items tracked via physical slips with zero status tracking.</a:t>
             </a:r>
           </a:p>
           <a:p>
             <a:pPr>
               <a:spcAft>
-                <a:spcPts val="800"/>
+                <a:spcPts val="1600"/>
               </a:spcAft>
               <a:defRPr sz="1800">
                 <a:latin typeface="Segoe UI"/>
@@ -8303,7 +11820,7 @@
                   <a:srgbClr val="0D3B4C"/>
                 </a:solidFill>
               </a:rPr>
-              <a:t>Modern Full-Stack Paradigm: </a:t>
+              <a:t>Absence of Grounded AI: </a:t>
             </a:r>
             <a:r>
               <a:rPr>
@@ -8311,7 +11828,7 @@
                   <a:srgbClr val="28323C"/>
                 </a:solidFill>
               </a:rPr>
-              <a:t>Replaces legacy monoliths with a decoupled React 19 and Express REST stack [1, 3].</a:t>
+              <a:t>Existing portals offer no contextual search assistant grounded directly on live institutional SQL records.</a:t>
             </a:r>
           </a:p>
         </p:txBody>
@@ -8392,7 +11909,7 @@
               </a:defRPr>
             </a:pPr>
             <a:r>
-              <a:t>CHAPTER 2: ENGINEERING SCOPE &amp; TARGETS</a:t>
+              <a:t>CHAPTER 1: INSTITUTIONAL DRIVERS</a:t>
             </a:r>
           </a:p>
           <a:p>
@@ -8405,7 +11922,7 @@
               </a:defRPr>
             </a:pPr>
             <a:r>
-              <a:t>Problem Statement &amp; Objectives</a:t>
+              <a:t>Introduction: Project Motivation</a:t>
             </a:r>
           </a:p>
         </p:txBody>
@@ -8536,7 +12053,7 @@
         <p:spPr>
           <a:xfrm>
             <a:off x="731520" y="1463040"/>
-            <a:ext cx="4297680" cy="4709160"/>
+            <a:ext cx="2834640" cy="4709160"/>
           </a:xfrm>
           <a:prstGeom prst="roundRect">
             <a:avLst/>
@@ -8546,7 +12063,7 @@
           </a:solidFill>
           <a:ln w="19050">
             <a:solidFill>
-              <a:srgbClr val="A6E3E9"/>
+              <a:srgbClr val="71C9CE"/>
             </a:solidFill>
           </a:ln>
         </p:spPr>
@@ -8581,7 +12098,7 @@
         <p:spPr>
           <a:xfrm>
             <a:off x="731520" y="1463040"/>
-            <a:ext cx="4297680" cy="594360"/>
+            <a:ext cx="2834640" cy="640080"/>
           </a:xfrm>
           <a:prstGeom prst="roundRect">
             <a:avLst/>
@@ -8625,43 +12142,8 @@
         </p:nvSpPr>
         <p:spPr>
           <a:xfrm>
-            <a:off x="914400" y="1527048"/>
-            <a:ext cx="3931920" cy="457200"/>
-          </a:xfrm>
-          <a:prstGeom prst="rect">
-            <a:avLst/>
-          </a:prstGeom>
-          <a:noFill/>
-        </p:spPr>
-        <p:txBody>
-          <a:bodyPr wrap="none">
-            <a:spAutoFit/>
-          </a:bodyPr>
-          <a:lstStyle/>
-          <a:p>
-            <a:pPr>
-              <a:defRPr sz="1800" b="1">
-                <a:solidFill>
-                  <a:srgbClr val="FFFFFF"/>
-                </a:solidFill>
-              </a:defRPr>
-            </a:pPr>
-            <a:r>
-              <a:t>CORE ENGINEERING CHALLENGES</a:t>
-            </a:r>
-          </a:p>
-        </p:txBody>
-      </p:sp>
-      <p:sp>
-        <p:nvSpPr>
-          <p:cNvPr id="10" name="TextBox 9"/>
-          <p:cNvSpPr txBox="1"/>
-          <p:nvPr/>
-        </p:nvSpPr>
-        <p:spPr>
-          <a:xfrm>
-            <a:off x="914400" y="2121408"/>
-            <a:ext cx="3931920" cy="3840480"/>
+            <a:off x="822960" y="1527048"/>
+            <a:ext cx="2651760" cy="502920"/>
           </a:xfrm>
           <a:prstGeom prst="rect">
             <a:avLst/>
@@ -8673,13 +12155,48 @@
             <a:spAutoFit/>
           </a:bodyPr>
           <a:lstStyle/>
+          <a:p>
+            <a:pPr>
+              <a:defRPr sz="1700" b="1">
+                <a:solidFill>
+                  <a:srgbClr val="FFFFFF"/>
+                </a:solidFill>
+              </a:defRPr>
+            </a:pPr>
+            <a:r>
+              <a:t>1. Student Empowerment</a:t>
+            </a:r>
+          </a:p>
+        </p:txBody>
+      </p:sp>
+      <p:sp>
+        <p:nvSpPr>
+          <p:cNvPr id="10" name="TextBox 9"/>
+          <p:cNvSpPr txBox="1"/>
+          <p:nvPr/>
+        </p:nvSpPr>
+        <p:spPr>
+          <a:xfrm>
+            <a:off x="868680" y="2240280"/>
+            <a:ext cx="2560320" cy="3749039"/>
+          </a:xfrm>
+          <a:prstGeom prst="rect">
+            <a:avLst/>
+          </a:prstGeom>
+          <a:noFill/>
+        </p:spPr>
+        <p:txBody>
+          <a:bodyPr wrap="square">
+            <a:spAutoFit/>
+          </a:bodyPr>
+          <a:lstStyle/>
           <a:p/>
           <a:p>
             <a:pPr>
               <a:spcAft>
-                <a:spcPts val="800"/>
+                <a:spcPts val="1800"/>
               </a:spcAft>
-              <a:defRPr sz="1800">
+              <a:defRPr sz="1700">
                 <a:latin typeface="Segoe UI"/>
               </a:defRPr>
             </a:pPr>
@@ -8697,7 +12214,7 @@
                   <a:srgbClr val="0D3B4C"/>
                 </a:solidFill>
               </a:rPr>
-              <a:t>Service Disconnection: </a:t>
+              <a:t>Eliminate Debarment Stress: </a:t>
             </a:r>
             <a:r>
               <a:rPr>
@@ -8705,15 +12222,15 @@
                   <a:srgbClr val="28323C"/>
                 </a:solidFill>
               </a:rPr>
-              <a:t>Isolated portals cause duplicate records, outdated schedules, and lost submissions.</a:t>
+              <a:t>Empower students with deterministic, real-time attendance margin calculations.</a:t>
             </a:r>
           </a:p>
           <a:p>
             <a:pPr>
               <a:spcAft>
-                <a:spcPts val="800"/>
+                <a:spcPts val="1800"/>
               </a:spcAft>
-              <a:defRPr sz="1800">
+              <a:defRPr sz="1700">
                 <a:latin typeface="Segoe UI"/>
               </a:defRPr>
             </a:pPr>
@@ -8731,7 +12248,7 @@
                   <a:srgbClr val="0D3B4C"/>
                 </a:solidFill>
               </a:rPr>
-              <a:t>Relational Redundancy: </a:t>
+              <a:t>Centralized Academic Hub: </a:t>
             </a:r>
             <a:r>
               <a:rPr>
@@ -8739,41 +12256,7 @@
                   <a:srgbClr val="28323C"/>
                 </a:solidFill>
               </a:rPr>
-              <a:t>Unnormalized flat files lead to update anomalies and inconsistent student records [1].</a:t>
-            </a:r>
-          </a:p>
-          <a:p>
-            <a:pPr>
-              <a:spcAft>
-                <a:spcPts val="800"/>
-              </a:spcAft>
-              <a:defRPr sz="1800">
-                <a:latin typeface="Segoe UI"/>
-              </a:defRPr>
-            </a:pPr>
-            <a:r>
-              <a:rPr b="1">
-                <a:solidFill>
-                  <a:srgbClr val="71C9CE"/>
-                </a:solidFill>
-              </a:rPr>
-              <a:t>▪ </a:t>
-            </a:r>
-            <a:r>
-              <a:rPr b="1">
-                <a:solidFill>
-                  <a:srgbClr val="0D3B4C"/>
-                </a:solidFill>
-              </a:rPr>
-              <a:t>Discovery Friction: </a:t>
-            </a:r>
-            <a:r>
-              <a:rPr>
-                <a:solidFill>
-                  <a:srgbClr val="28323C"/>
-                </a:solidFill>
-              </a:rPr>
-              <a:t>Campus policies, lecture notes, and grievance workflows remain unsearchable.</a:t>
+              <a:t>Single-pane access to dynamic schedules, handouts, and assignment submissions.</a:t>
             </a:r>
           </a:p>
         </p:txBody>
@@ -8786,8 +12269,8 @@
         </p:nvSpPr>
         <p:spPr>
           <a:xfrm>
-            <a:off x="5303520" y="1463040"/>
-            <a:ext cx="4297680" cy="4709160"/>
+            <a:off x="3794760" y="1463040"/>
+            <a:ext cx="2834640" cy="4709160"/>
           </a:xfrm>
           <a:prstGeom prst="roundRect">
             <a:avLst/>
@@ -8797,7 +12280,7 @@
           </a:solidFill>
           <a:ln w="19050">
             <a:solidFill>
-              <a:srgbClr val="A6E3E9"/>
+              <a:srgbClr val="71C9CE"/>
             </a:solidFill>
           </a:ln>
         </p:spPr>
@@ -8831,8 +12314,8 @@
         </p:nvSpPr>
         <p:spPr>
           <a:xfrm>
-            <a:off x="5303520" y="1463040"/>
-            <a:ext cx="4297680" cy="594360"/>
+            <a:off x="3794760" y="1463040"/>
+            <a:ext cx="2834640" cy="640080"/>
           </a:xfrm>
           <a:prstGeom prst="roundRect">
             <a:avLst/>
@@ -8876,43 +12359,8 @@
         </p:nvSpPr>
         <p:spPr>
           <a:xfrm>
-            <a:off x="5486400" y="1527048"/>
-            <a:ext cx="3931920" cy="457200"/>
-          </a:xfrm>
-          <a:prstGeom prst="rect">
-            <a:avLst/>
-          </a:prstGeom>
-          <a:noFill/>
-        </p:spPr>
-        <p:txBody>
-          <a:bodyPr wrap="none">
-            <a:spAutoFit/>
-          </a:bodyPr>
-          <a:lstStyle/>
-          <a:p>
-            <a:pPr>
-              <a:defRPr sz="1800" b="1">
-                <a:solidFill>
-                  <a:srgbClr val="FFFFFF"/>
-                </a:solidFill>
-              </a:defRPr>
-            </a:pPr>
-            <a:r>
-              <a:t>TARGET PROJECT OBJECTIVES</a:t>
-            </a:r>
-          </a:p>
-        </p:txBody>
-      </p:sp>
-      <p:sp>
-        <p:nvSpPr>
-          <p:cNvPr id="14" name="TextBox 13"/>
-          <p:cNvSpPr txBox="1"/>
-          <p:nvPr/>
-        </p:nvSpPr>
-        <p:spPr>
-          <a:xfrm>
-            <a:off x="5486400" y="2121408"/>
-            <a:ext cx="3931920" cy="3840480"/>
+            <a:off x="3886200" y="1527048"/>
+            <a:ext cx="2651760" cy="502920"/>
           </a:xfrm>
           <a:prstGeom prst="rect">
             <a:avLst/>
@@ -8924,13 +12372,48 @@
             <a:spAutoFit/>
           </a:bodyPr>
           <a:lstStyle/>
+          <a:p>
+            <a:pPr>
+              <a:defRPr sz="1700" b="1">
+                <a:solidFill>
+                  <a:srgbClr val="FFFFFF"/>
+                </a:solidFill>
+              </a:defRPr>
+            </a:pPr>
+            <a:r>
+              <a:t>2. Faculty Governance</a:t>
+            </a:r>
+          </a:p>
+        </p:txBody>
+      </p:sp>
+      <p:sp>
+        <p:nvSpPr>
+          <p:cNvPr id="14" name="TextBox 13"/>
+          <p:cNvSpPr txBox="1"/>
+          <p:nvPr/>
+        </p:nvSpPr>
+        <p:spPr>
+          <a:xfrm>
+            <a:off x="3931920" y="2240280"/>
+            <a:ext cx="2560320" cy="3749039"/>
+          </a:xfrm>
+          <a:prstGeom prst="rect">
+            <a:avLst/>
+          </a:prstGeom>
+          <a:noFill/>
+        </p:spPr>
+        <p:txBody>
+          <a:bodyPr wrap="square">
+            <a:spAutoFit/>
+          </a:bodyPr>
+          <a:lstStyle/>
           <a:p/>
           <a:p>
             <a:pPr>
               <a:spcAft>
-                <a:spcPts val="800"/>
+                <a:spcPts val="1800"/>
               </a:spcAft>
-              <a:defRPr sz="1800">
+              <a:defRPr sz="1700">
                 <a:latin typeface="Segoe UI"/>
               </a:defRPr>
             </a:pPr>
@@ -8948,7 +12431,7 @@
                   <a:srgbClr val="0D3B4C"/>
                 </a:solidFill>
               </a:rPr>
-              <a:t>Full-Stack Decoupled System: </a:t>
+              <a:t>Executive Telemetry Console: </a:t>
             </a:r>
             <a:r>
               <a:rPr>
@@ -8956,15 +12439,15 @@
                   <a:srgbClr val="28323C"/>
                 </a:solidFill>
               </a:rPr>
-              <a:t>React 19 SPA communicating with an asynchronous Express RESTful API [3].</a:t>
+              <a:t>Real-time visibility over active students, enrolled courses, and pending grievances.</a:t>
             </a:r>
           </a:p>
           <a:p>
             <a:pPr>
               <a:spcAft>
-                <a:spcPts val="800"/>
+                <a:spcPts val="1800"/>
               </a:spcAft>
-              <a:defRPr sz="1800">
+              <a:defRPr sz="1700">
                 <a:latin typeface="Segoe UI"/>
               </a:defRPr>
             </a:pPr>
@@ -8982,7 +12465,7 @@
                   <a:srgbClr val="0D3B4C"/>
                 </a:solidFill>
               </a:rPr>
-              <a:t>26-Table 3NF SQL Persistence: </a:t>
+              <a:t>Traceable Resolution Desk: </a:t>
             </a:r>
             <a:r>
               <a:rPr>
@@ -8990,15 +12473,164 @@
                   <a:srgbClr val="28323C"/>
                 </a:solidFill>
               </a:rPr>
-              <a:t>Normalized schema with cascading referential integrity and zero update anomalies [5].</a:t>
-            </a:r>
-          </a:p>
+              <a:t>Automated tracking IDs (e.g. ISSUE-2026-881) for infrastructure transparency.</a:t>
+            </a:r>
+          </a:p>
+        </p:txBody>
+      </p:sp>
+      <p:sp>
+        <p:nvSpPr>
+          <p:cNvPr id="15" name="Rounded Rectangle 14"/>
+          <p:cNvSpPr/>
+          <p:nvPr/>
+        </p:nvSpPr>
+        <p:spPr>
+          <a:xfrm>
+            <a:off x="6858000" y="1463040"/>
+            <a:ext cx="2834640" cy="4709160"/>
+          </a:xfrm>
+          <a:prstGeom prst="roundRect">
+            <a:avLst/>
+          </a:prstGeom>
+          <a:solidFill>
+            <a:srgbClr val="FFFFFF"/>
+          </a:solidFill>
+          <a:ln w="19050">
+            <a:solidFill>
+              <a:srgbClr val="71C9CE"/>
+            </a:solidFill>
+          </a:ln>
+        </p:spPr>
+        <p:style>
+          <a:lnRef idx="1">
+            <a:schemeClr val="accent1"/>
+          </a:lnRef>
+          <a:fillRef idx="3">
+            <a:schemeClr val="accent1"/>
+          </a:fillRef>
+          <a:effectRef idx="2">
+            <a:schemeClr val="accent1"/>
+          </a:effectRef>
+          <a:fontRef idx="minor">
+            <a:schemeClr val="lt1"/>
+          </a:fontRef>
+        </p:style>
+        <p:txBody>
+          <a:bodyPr rtlCol="0" anchor="ctr"/>
+          <a:lstStyle/>
+          <a:p>
+            <a:pPr algn="ctr"/>
+          </a:p>
+        </p:txBody>
+      </p:sp>
+      <p:sp>
+        <p:nvSpPr>
+          <p:cNvPr id="16" name="Rounded Rectangle 15"/>
+          <p:cNvSpPr/>
+          <p:nvPr/>
+        </p:nvSpPr>
+        <p:spPr>
+          <a:xfrm>
+            <a:off x="6858000" y="1463040"/>
+            <a:ext cx="2834640" cy="640080"/>
+          </a:xfrm>
+          <a:prstGeom prst="roundRect">
+            <a:avLst/>
+          </a:prstGeom>
+          <a:solidFill>
+            <a:srgbClr val="0D3B4C"/>
+          </a:solidFill>
+          <a:ln w="19050">
+            <a:solidFill>
+              <a:srgbClr val="0D3B4C"/>
+            </a:solidFill>
+          </a:ln>
+        </p:spPr>
+        <p:style>
+          <a:lnRef idx="1">
+            <a:schemeClr val="accent1"/>
+          </a:lnRef>
+          <a:fillRef idx="3">
+            <a:schemeClr val="accent1"/>
+          </a:fillRef>
+          <a:effectRef idx="2">
+            <a:schemeClr val="accent1"/>
+          </a:effectRef>
+          <a:fontRef idx="minor">
+            <a:schemeClr val="lt1"/>
+          </a:fontRef>
+        </p:style>
+        <p:txBody>
+          <a:bodyPr rtlCol="0" anchor="ctr"/>
+          <a:lstStyle/>
+          <a:p>
+            <a:pPr algn="ctr"/>
+          </a:p>
+        </p:txBody>
+      </p:sp>
+      <p:sp>
+        <p:nvSpPr>
+          <p:cNvPr id="17" name="TextBox 16"/>
+          <p:cNvSpPr txBox="1"/>
+          <p:nvPr/>
+        </p:nvSpPr>
+        <p:spPr>
+          <a:xfrm>
+            <a:off x="6949440" y="1527048"/>
+            <a:ext cx="2651760" cy="502920"/>
+          </a:xfrm>
+          <a:prstGeom prst="rect">
+            <a:avLst/>
+          </a:prstGeom>
+          <a:noFill/>
+        </p:spPr>
+        <p:txBody>
+          <a:bodyPr wrap="square">
+            <a:spAutoFit/>
+          </a:bodyPr>
+          <a:lstStyle/>
+          <a:p>
+            <a:pPr>
+              <a:defRPr sz="1700" b="1">
+                <a:solidFill>
+                  <a:srgbClr val="FFFFFF"/>
+                </a:solidFill>
+              </a:defRPr>
+            </a:pPr>
+            <a:r>
+              <a:t>3. Architecture Modernization</a:t>
+            </a:r>
+          </a:p>
+        </p:txBody>
+      </p:sp>
+      <p:sp>
+        <p:nvSpPr>
+          <p:cNvPr id="18" name="TextBox 17"/>
+          <p:cNvSpPr txBox="1"/>
+          <p:nvPr/>
+        </p:nvSpPr>
+        <p:spPr>
+          <a:xfrm>
+            <a:off x="6995160" y="2240280"/>
+            <a:ext cx="2560320" cy="3749039"/>
+          </a:xfrm>
+          <a:prstGeom prst="rect">
+            <a:avLst/>
+          </a:prstGeom>
+          <a:noFill/>
+        </p:spPr>
+        <p:txBody>
+          <a:bodyPr wrap="square">
+            <a:spAutoFit/>
+          </a:bodyPr>
+          <a:lstStyle/>
+          <a:p/>
           <a:p>
             <a:pPr>
               <a:spcAft>
-                <a:spcPts val="800"/>
+                <a:spcPts val="1800"/>
               </a:spcAft>
-              <a:defRPr sz="1800">
+              <a:defRPr sz="1700">
                 <a:latin typeface="Segoe UI"/>
               </a:defRPr>
             </a:pPr>
@@ -9016,7 +12648,7 @@
                   <a:srgbClr val="0D3B4C"/>
                 </a:solidFill>
               </a:rPr>
-              <a:t>Zero-Latency Intelligence: </a:t>
+              <a:t>Decoupled SPA Stack: </a:t>
             </a:r>
             <a:r>
               <a:rPr>
@@ -9024,7 +12656,41 @@
                   <a:srgbClr val="28323C"/>
                 </a:solidFill>
               </a:rPr>
-              <a:t>Real-time timetable sync, code submissions, digital event passes, and grounded query AI.</a:t>
+              <a:t>Modern React 19 + Express REST architecture replacing slow PHP monoliths [2].</a:t>
+            </a:r>
+          </a:p>
+          <a:p>
+            <a:pPr>
+              <a:spcAft>
+                <a:spcPts val="1800"/>
+              </a:spcAft>
+              <a:defRPr sz="1700">
+                <a:latin typeface="Segoe UI"/>
+              </a:defRPr>
+            </a:pPr>
+            <a:r>
+              <a:rPr b="1">
+                <a:solidFill>
+                  <a:srgbClr val="71C9CE"/>
+                </a:solidFill>
+              </a:rPr>
+              <a:t>▪ </a:t>
+            </a:r>
+            <a:r>
+              <a:rPr b="1">
+                <a:solidFill>
+                  <a:srgbClr val="0D3B4C"/>
+                </a:solidFill>
+              </a:rPr>
+              <a:t>26-Table SQL (3NF): </a:t>
+            </a:r>
+            <a:r>
+              <a:rPr>
+                <a:solidFill>
+                  <a:srgbClr val="28323C"/>
+                </a:solidFill>
+              </a:rPr>
+              <a:t>Strict referential integrity, foreign key cascading, and zero-dependency SQLite [1, 5].</a:t>
             </a:r>
           </a:p>
         </p:txBody>
@@ -9105,7 +12771,7 @@
               </a:defRPr>
             </a:pPr>
             <a:r>
-              <a:t>CHAPTER 3: HIGH-LEVEL CLIENT-SERVER DECOMPOSITION</a:t>
+              <a:t>CHAPTER 1: CORE DELIVERABLES &amp; SCOPE</a:t>
             </a:r>
           </a:p>
           <a:p>
@@ -9118,7 +12784,7 @@
               </a:defRPr>
             </a:pPr>
             <a:r>
-              <a:t>System Architecture: Three-Tier Decoupling</a:t>
+              <a:t>Introduction: Project Objectives</a:t>
             </a:r>
           </a:p>
         </p:txBody>
@@ -9240,46 +12906,22 @@
           </a:p>
         </p:txBody>
       </p:sp>
-      <p:pic>
-        <p:nvPicPr>
-          <p:cNvPr id="7" name="Picture 6" descr="diagram_architecture.png"/>
-          <p:cNvPicPr>
-            <a:picLocks noChangeAspect="1"/>
-          </p:cNvPicPr>
-          <p:nvPr/>
-        </p:nvPicPr>
-        <p:blipFill>
-          <a:blip r:embed="rId3"/>
-          <a:stretch>
-            <a:fillRect/>
-          </a:stretch>
-        </p:blipFill>
-        <p:spPr>
-          <a:xfrm>
-            <a:off x="731520" y="1444752"/>
-            <a:ext cx="8961120" cy="3383280"/>
-          </a:xfrm>
-          <a:prstGeom prst="rect">
-            <a:avLst/>
-          </a:prstGeom>
-        </p:spPr>
-      </p:pic>
-      <p:sp>
-        <p:nvSpPr>
-          <p:cNvPr id="8" name="Rounded Rectangle 7"/>
+      <p:sp>
+        <p:nvSpPr>
+          <p:cNvPr id="7" name="Rounded Rectangle 6"/>
           <p:cNvSpPr/>
           <p:nvPr/>
         </p:nvSpPr>
         <p:spPr>
           <a:xfrm>
-            <a:off x="731520" y="4956048"/>
-            <a:ext cx="8961120" cy="1280160"/>
+            <a:off x="731520" y="1463040"/>
+            <a:ext cx="8961120" cy="4709160"/>
           </a:xfrm>
           <a:prstGeom prst="roundRect">
             <a:avLst/>
           </a:prstGeom>
           <a:solidFill>
-            <a:srgbClr val="E3FDFD"/>
+            <a:srgbClr val="FFFFFF"/>
           </a:solidFill>
           <a:ln w="19050">
             <a:solidFill>
@@ -9311,14 +12953,14 @@
       </p:sp>
       <p:sp>
         <p:nvSpPr>
-          <p:cNvPr id="9" name="TextBox 8"/>
+          <p:cNvPr id="8" name="TextBox 7"/>
           <p:cNvSpPr txBox="1"/>
           <p:nvPr/>
         </p:nvSpPr>
         <p:spPr>
           <a:xfrm>
-            <a:off x="914400" y="5029200"/>
-            <a:ext cx="8595360" cy="1143000"/>
+            <a:off x="1005840" y="1600200"/>
+            <a:ext cx="8412480" cy="4434840"/>
           </a:xfrm>
           <a:prstGeom prst="rect">
             <a:avLst/>
@@ -9326,7 +12968,7 @@
           <a:noFill/>
         </p:spPr>
         <p:txBody>
-          <a:bodyPr wrap="square" tIns="0" bIns="0" lIns="0" rIns="0">
+          <a:bodyPr wrap="square">
             <a:spAutoFit/>
           </a:bodyPr>
           <a:lstStyle/>
@@ -9334,7 +12976,7 @@
           <a:p>
             <a:pPr>
               <a:spcAft>
-                <a:spcPts val="0"/>
+                <a:spcPts val="1200"/>
               </a:spcAft>
               <a:defRPr sz="1800">
                 <a:latin typeface="Segoe UI"/>
@@ -9354,7 +12996,7 @@
                   <a:srgbClr val="0D3B4C"/>
                 </a:solidFill>
               </a:rPr>
-              <a:t>Architectural Synthesis: </a:t>
+              <a:t>Objective 1: Design a Reactive Web Platform: </a:t>
             </a:r>
             <a:r>
               <a:rPr>
@@ -9362,7 +13004,143 @@
                   <a:srgbClr val="28323C"/>
                 </a:solidFill>
               </a:rPr>
-              <a:t>Decoupled React 19 SPA communicates via asynchronous JSON REST endpoints with Express backend, persisting to a 26-table native SQLite relational engine in 3NF [2, 5, 7].</a:t>
+              <a:t>Architect an interactive React 19 SPA with modular state to replace slow fragmented systems [2].</a:t>
+            </a:r>
+          </a:p>
+          <a:p>
+            <a:pPr>
+              <a:spcAft>
+                <a:spcPts val="1200"/>
+              </a:spcAft>
+              <a:defRPr sz="1800">
+                <a:latin typeface="Segoe UI"/>
+              </a:defRPr>
+            </a:pPr>
+            <a:r>
+              <a:rPr b="1">
+                <a:solidFill>
+                  <a:srgbClr val="71C9CE"/>
+                </a:solidFill>
+              </a:rPr>
+              <a:t>▪ </a:t>
+            </a:r>
+            <a:r>
+              <a:rPr b="1">
+                <a:solidFill>
+                  <a:srgbClr val="0D3B4C"/>
+                </a:solidFill>
+              </a:rPr>
+              <a:t>Objective 2: Engineer a 26-Table Relational Schema: </a:t>
+            </a:r>
+            <a:r>
+              <a:rPr>
+                <a:solidFill>
+                  <a:srgbClr val="28323C"/>
+                </a:solidFill>
+              </a:rPr>
+              <a:t>Normalize and deploy 26 SQL tables in 3NF, guaranteeing referential integrity and zero duplication [1].</a:t>
+            </a:r>
+          </a:p>
+          <a:p>
+            <a:pPr>
+              <a:spcAft>
+                <a:spcPts val="1200"/>
+              </a:spcAft>
+              <a:defRPr sz="1800">
+                <a:latin typeface="Segoe UI"/>
+              </a:defRPr>
+            </a:pPr>
+            <a:r>
+              <a:rPr b="1">
+                <a:solidFill>
+                  <a:srgbClr val="71C9CE"/>
+                </a:solidFill>
+              </a:rPr>
+              <a:t>▪ </a:t>
+            </a:r>
+            <a:r>
+              <a:rPr b="1">
+                <a:solidFill>
+                  <a:srgbClr val="0D3B4C"/>
+                </a:solidFill>
+              </a:rPr>
+              <a:t>Objective 3: Formulate Attendance Margin Math: </a:t>
+            </a:r>
+            <a:r>
+              <a:rPr>
+                <a:solidFill>
+                  <a:srgbClr val="28323C"/>
+                </a:solidFill>
+              </a:rPr>
+              <a:t>Implement predictive algorithms for statutory 75% attendance thresholds and Dijkstra route pathing.</a:t>
+            </a:r>
+          </a:p>
+          <a:p>
+            <a:pPr>
+              <a:spcAft>
+                <a:spcPts val="1200"/>
+              </a:spcAft>
+              <a:defRPr sz="1800">
+                <a:latin typeface="Segoe UI"/>
+              </a:defRPr>
+            </a:pPr>
+            <a:r>
+              <a:rPr b="1">
+                <a:solidFill>
+                  <a:srgbClr val="71C9CE"/>
+                </a:solidFill>
+              </a:rPr>
+              <a:t>▪ </a:t>
+            </a:r>
+            <a:r>
+              <a:rPr b="1">
+                <a:solidFill>
+                  <a:srgbClr val="0D3B4C"/>
+                </a:solidFill>
+              </a:rPr>
+              <a:t>Objective 4: Deploy Bespoke Aquatic Design System: </a:t>
+            </a:r>
+            <a:r>
+              <a:rPr>
+                <a:solidFill>
+                  <a:srgbClr val="28323C"/>
+                </a:solidFill>
+              </a:rPr>
+              <a:t>Establish a 4-tier visual theme (#E3FDFD to #71C9CE) compliant with WCAG 2.1 contrast standards [8].</a:t>
+            </a:r>
+          </a:p>
+          <a:p>
+            <a:pPr>
+              <a:spcAft>
+                <a:spcPts val="1200"/>
+              </a:spcAft>
+              <a:defRPr sz="1800">
+                <a:latin typeface="Segoe UI"/>
+              </a:defRPr>
+            </a:pPr>
+            <a:r>
+              <a:rPr b="1">
+                <a:solidFill>
+                  <a:srgbClr val="71C9CE"/>
+                </a:solidFill>
+              </a:rPr>
+              <a:t>▪ </a:t>
+            </a:r>
+            <a:r>
+              <a:rPr b="1">
+                <a:solidFill>
+                  <a:srgbClr val="0D3B4C"/>
+                </a:solidFill>
+              </a:rPr>
+              <a:t>Objective 5: Integrate Grounded Campus AI Engine: </a:t>
+            </a:r>
+            <a:r>
+              <a:rPr>
+                <a:solidFill>
+                  <a:srgbClr val="28323C"/>
+                </a:solidFill>
+              </a:rPr>
+              <a:t>Construct a zero-hallucination assistant translating natural queries to direct SQL lookups (&lt;15ms).</a:t>
             </a:r>
           </a:p>
         </p:txBody>
@@ -9443,7 +13221,7 @@
               </a:defRPr>
             </a:pPr>
             <a:r>
-              <a:t>CHAPTER 4: RELATIONAL DATA PERSISTENCE &amp; 3NF INTEGRITY</a:t>
+              <a:t>CHAPTER 2: PROBLEM DEFINITION</a:t>
             </a:r>
           </a:p>
           <a:p>
@@ -9456,7 +13234,7 @@
               </a:defRPr>
             </a:pPr>
             <a:r>
-              <a:t>Database Architecture: 26-Table SQL Model</a:t>
+              <a:t>Problem Statement &amp; Scope</a:t>
             </a:r>
           </a:p>
         </p:txBody>
@@ -9578,40 +13356,16 @@
           </a:p>
         </p:txBody>
       </p:sp>
-      <p:pic>
-        <p:nvPicPr>
-          <p:cNvPr id="7" name="Picture 6" descr="diagram_database_schema.png"/>
-          <p:cNvPicPr>
-            <a:picLocks noChangeAspect="1"/>
-          </p:cNvPicPr>
-          <p:nvPr/>
-        </p:nvPicPr>
-        <p:blipFill>
-          <a:blip r:embed="rId3"/>
-          <a:stretch>
-            <a:fillRect/>
-          </a:stretch>
-        </p:blipFill>
-        <p:spPr>
-          <a:xfrm>
-            <a:off x="731520" y="1444752"/>
-            <a:ext cx="8961120" cy="3383280"/>
-          </a:xfrm>
-          <a:prstGeom prst="rect">
-            <a:avLst/>
-          </a:prstGeom>
-        </p:spPr>
-      </p:pic>
-      <p:sp>
-        <p:nvSpPr>
-          <p:cNvPr id="8" name="Rounded Rectangle 7"/>
+      <p:sp>
+        <p:nvSpPr>
+          <p:cNvPr id="7" name="Rounded Rectangle 6"/>
           <p:cNvSpPr/>
           <p:nvPr/>
         </p:nvSpPr>
         <p:spPr>
           <a:xfrm>
-            <a:off x="731520" y="4956048"/>
-            <a:ext cx="8961120" cy="1280160"/>
+            <a:off x="731520" y="1463040"/>
+            <a:ext cx="8961120" cy="1508760"/>
           </a:xfrm>
           <a:prstGeom prst="roundRect">
             <a:avLst/>
@@ -9649,14 +13403,14 @@
       </p:sp>
       <p:sp>
         <p:nvSpPr>
-          <p:cNvPr id="9" name="TextBox 8"/>
+          <p:cNvPr id="8" name="TextBox 7"/>
           <p:cNvSpPr txBox="1"/>
           <p:nvPr/>
         </p:nvSpPr>
         <p:spPr>
           <a:xfrm>
-            <a:off x="914400" y="5029200"/>
-            <a:ext cx="8595360" cy="1143000"/>
+            <a:off x="914400" y="1554480"/>
+            <a:ext cx="8595360" cy="1325880"/>
           </a:xfrm>
           <a:prstGeom prst="rect">
             <a:avLst/>
@@ -9664,15 +13418,112 @@
           <a:noFill/>
         </p:spPr>
         <p:txBody>
-          <a:bodyPr wrap="square" tIns="0" bIns="0" lIns="0" rIns="0">
+          <a:bodyPr wrap="square">
             <a:spAutoFit/>
           </a:bodyPr>
           <a:lstStyle/>
+          <a:p>
+            <a:pPr>
+              <a:spcAft>
+                <a:spcPts val="400"/>
+              </a:spcAft>
+              <a:defRPr sz="1700" b="1">
+                <a:solidFill>
+                  <a:srgbClr val="0D3B4C"/>
+                </a:solidFill>
+                <a:latin typeface="Segoe UI"/>
+              </a:defRPr>
+            </a:pPr>
+            <a:r>
+              <a:t>CORE PROBLEM STATEMENT:</a:t>
+            </a:r>
+          </a:p>
+          <a:p>
+            <a:pPr>
+              <a:defRPr sz="1800" b="1">
+                <a:solidFill>
+                  <a:srgbClr val="102542"/>
+                </a:solidFill>
+                <a:latin typeface="Segoe UI"/>
+              </a:defRPr>
+            </a:pPr>
+            <a:r>
+              <a:t>"Modern higher education institutions suffer from deeply fragmented, un-synchronized, and non-responsive operational systems. Students experience severe debarment anxiety due to opaque attendance tracking, while administrative workflows for circulars, lost-and-found items, and facility grievances remain manual and error-prone."</a:t>
+            </a:r>
+          </a:p>
+        </p:txBody>
+      </p:sp>
+      <p:sp>
+        <p:nvSpPr>
+          <p:cNvPr id="9" name="Rounded Rectangle 8"/>
+          <p:cNvSpPr/>
+          <p:nvPr/>
+        </p:nvSpPr>
+        <p:spPr>
+          <a:xfrm>
+            <a:off x="731520" y="3154680"/>
+            <a:ext cx="8961120" cy="3017520"/>
+          </a:xfrm>
+          <a:prstGeom prst="roundRect">
+            <a:avLst/>
+          </a:prstGeom>
+          <a:solidFill>
+            <a:srgbClr val="FFFFFF"/>
+          </a:solidFill>
+          <a:ln w="19050">
+            <a:solidFill>
+              <a:srgbClr val="A6E3E9"/>
+            </a:solidFill>
+          </a:ln>
+        </p:spPr>
+        <p:style>
+          <a:lnRef idx="1">
+            <a:schemeClr val="accent1"/>
+          </a:lnRef>
+          <a:fillRef idx="3">
+            <a:schemeClr val="accent1"/>
+          </a:fillRef>
+          <a:effectRef idx="2">
+            <a:schemeClr val="accent1"/>
+          </a:effectRef>
+          <a:fontRef idx="minor">
+            <a:schemeClr val="lt1"/>
+          </a:fontRef>
+        </p:style>
+        <p:txBody>
+          <a:bodyPr rtlCol="0" anchor="ctr"/>
+          <a:lstStyle/>
+          <a:p>
+            <a:pPr algn="ctr"/>
+          </a:p>
+        </p:txBody>
+      </p:sp>
+      <p:sp>
+        <p:nvSpPr>
+          <p:cNvPr id="10" name="TextBox 9"/>
+          <p:cNvSpPr txBox="1"/>
+          <p:nvPr/>
+        </p:nvSpPr>
+        <p:spPr>
+          <a:xfrm>
+            <a:off x="914400" y="3246120"/>
+            <a:ext cx="8595360" cy="2834640"/>
+          </a:xfrm>
+          <a:prstGeom prst="rect">
+            <a:avLst/>
+          </a:prstGeom>
+          <a:noFill/>
+        </p:spPr>
+        <p:txBody>
+          <a:bodyPr wrap="square">
+            <a:spAutoFit/>
+          </a:bodyPr>
+          <a:lstStyle/>
           <a:p/>
           <a:p>
             <a:pPr>
               <a:spcAft>
-                <a:spcPts val="0"/>
+                <a:spcPts val="1200"/>
               </a:spcAft>
               <a:defRPr sz="1800">
                 <a:latin typeface="Segoe UI"/>
@@ -9692,7 +13543,7 @@
                   <a:srgbClr val="0D3B4C"/>
                 </a:solidFill>
               </a:rPr>
-              <a:t>Third Normal Form (3NF) Guarantee: </a:t>
+              <a:t>Challenge 1: Attendance Calculation Latency: </a:t>
             </a:r>
             <a:r>
               <a:rPr>
@@ -9700,7 +13551,109 @@
                   <a:srgbClr val="28323C"/>
                 </a:solidFill>
               </a:rPr>
-              <a:t>All 26 tables satisfy Boyced-Codd &amp; 3NF: non-prime attributes are fully functionally dependent solely on the primary key, preventing update circularities [1, 5].</a:t>
+              <a:t>Manual registers prevent students from forecasting safe-margin absences or required recovery classes.</a:t>
+            </a:r>
+          </a:p>
+          <a:p>
+            <a:pPr>
+              <a:spcAft>
+                <a:spcPts val="1200"/>
+              </a:spcAft>
+              <a:defRPr sz="1800">
+                <a:latin typeface="Segoe UI"/>
+              </a:defRPr>
+            </a:pPr>
+            <a:r>
+              <a:rPr b="1">
+                <a:solidFill>
+                  <a:srgbClr val="71C9CE"/>
+                </a:solidFill>
+              </a:rPr>
+              <a:t>▪ </a:t>
+            </a:r>
+            <a:r>
+              <a:rPr b="1">
+                <a:solidFill>
+                  <a:srgbClr val="0D3B4C"/>
+                </a:solidFill>
+              </a:rPr>
+              <a:t>Challenge 2: Database Inconsistencies &amp; Anomalies: </a:t>
+            </a:r>
+            <a:r>
+              <a:rPr>
+                <a:solidFill>
+                  <a:srgbClr val="28323C"/>
+                </a:solidFill>
+              </a:rPr>
+              <a:t>Legacy flat databases lack 3NF normalization, leading to orphaned records and deletion anomalies [1].</a:t>
+            </a:r>
+          </a:p>
+          <a:p>
+            <a:pPr>
+              <a:spcAft>
+                <a:spcPts val="1200"/>
+              </a:spcAft>
+              <a:defRPr sz="1800">
+                <a:latin typeface="Segoe UI"/>
+              </a:defRPr>
+            </a:pPr>
+            <a:r>
+              <a:rPr b="1">
+                <a:solidFill>
+                  <a:srgbClr val="71C9CE"/>
+                </a:solidFill>
+              </a:rPr>
+              <a:t>▪ </a:t>
+            </a:r>
+            <a:r>
+              <a:rPr b="1">
+                <a:solidFill>
+                  <a:srgbClr val="0D3B4C"/>
+                </a:solidFill>
+              </a:rPr>
+              <a:t>Challenge 3: Disjointed Academic Life &amp; Events: </a:t>
+            </a:r>
+            <a:r>
+              <a:rPr>
+                <a:solidFill>
+                  <a:srgbClr val="28323C"/>
+                </a:solidFill>
+              </a:rPr>
+              <a:t>Paper ticketing for campus events causes duplicate registrations and lost property disputes.</a:t>
+            </a:r>
+          </a:p>
+          <a:p>
+            <a:pPr>
+              <a:spcAft>
+                <a:spcPts val="1200"/>
+              </a:spcAft>
+              <a:defRPr sz="1800">
+                <a:latin typeface="Segoe UI"/>
+              </a:defRPr>
+            </a:pPr>
+            <a:r>
+              <a:rPr b="1">
+                <a:solidFill>
+                  <a:srgbClr val="71C9CE"/>
+                </a:solidFill>
+              </a:rPr>
+              <a:t>▪ </a:t>
+            </a:r>
+            <a:r>
+              <a:rPr b="1">
+                <a:solidFill>
+                  <a:srgbClr val="0D3B4C"/>
+                </a:solidFill>
+              </a:rPr>
+              <a:t>Challenge 4: High Deployment &amp; Evaluation Overhead: </a:t>
+            </a:r>
+            <a:r>
+              <a:rPr>
+                <a:solidFill>
+                  <a:srgbClr val="28323C"/>
+                </a:solidFill>
+              </a:rPr>
+              <a:t>Heavy enterprise software setups hinder agile academic project evaluation and portable grading.</a:t>
             </a:r>
           </a:p>
         </p:txBody>
@@ -9781,7 +13734,7 @@
               </a:defRPr>
             </a:pPr>
             <a:r>
-              <a:t>CHAPTER 5: STUDENT CONSOLE VS. ADMIN COMMAND</a:t>
+              <a:t>CHAPTER 2: ABSTRACT SYSTEM INTERACTION</a:t>
             </a:r>
           </a:p>
           <a:p>
@@ -9794,7 +13747,7 @@
               </a:defRPr>
             </a:pPr>
             <a:r>
-              <a:t>System Modules: Dual-Role Workflows</a:t>
+              <a:t>Conceptual Architecture</a:t>
             </a:r>
           </a:p>
         </p:txBody>
@@ -9916,26 +13869,50 @@
           </a:p>
         </p:txBody>
       </p:sp>
-      <p:sp>
-        <p:nvSpPr>
-          <p:cNvPr id="7" name="Rounded Rectangle 6"/>
+      <p:pic>
+        <p:nvPicPr>
+          <p:cNvPr id="7" name="Picture 6" descr="diagram_architecture.png"/>
+          <p:cNvPicPr>
+            <a:picLocks noChangeAspect="1"/>
+          </p:cNvPicPr>
+          <p:nvPr/>
+        </p:nvPicPr>
+        <p:blipFill>
+          <a:blip r:embed="rId3"/>
+          <a:stretch>
+            <a:fillRect/>
+          </a:stretch>
+        </p:blipFill>
+        <p:spPr>
+          <a:xfrm>
+            <a:off x="731520" y="1444752"/>
+            <a:ext cx="8961120" cy="3383280"/>
+          </a:xfrm>
+          <a:prstGeom prst="rect">
+            <a:avLst/>
+          </a:prstGeom>
+        </p:spPr>
+      </p:pic>
+      <p:sp>
+        <p:nvSpPr>
+          <p:cNvPr id="8" name="Rounded Rectangle 7"/>
           <p:cNvSpPr/>
           <p:nvPr/>
         </p:nvSpPr>
         <p:spPr>
           <a:xfrm>
-            <a:off x="731520" y="1463040"/>
-            <a:ext cx="4297680" cy="4709160"/>
+            <a:off x="731520" y="4956048"/>
+            <a:ext cx="8961120" cy="1280160"/>
           </a:xfrm>
           <a:prstGeom prst="roundRect">
             <a:avLst/>
           </a:prstGeom>
           <a:solidFill>
-            <a:srgbClr val="FFFFFF"/>
+            <a:srgbClr val="E3FDFD"/>
           </a:solidFill>
           <a:ln w="19050">
             <a:solidFill>
-              <a:srgbClr val="A6E3E9"/>
+              <a:srgbClr val="71C9CE"/>
             </a:solidFill>
           </a:ln>
         </p:spPr>
@@ -9963,59 +13940,14 @@
       </p:sp>
       <p:sp>
         <p:nvSpPr>
-          <p:cNvPr id="8" name="Rounded Rectangle 7"/>
-          <p:cNvSpPr/>
-          <p:nvPr/>
-        </p:nvSpPr>
-        <p:spPr>
-          <a:xfrm>
-            <a:off x="731520" y="1463040"/>
-            <a:ext cx="4297680" cy="594360"/>
-          </a:xfrm>
-          <a:prstGeom prst="roundRect">
-            <a:avLst/>
-          </a:prstGeom>
-          <a:solidFill>
-            <a:srgbClr val="0D3B4C"/>
-          </a:solidFill>
-          <a:ln w="19050">
-            <a:solidFill>
-              <a:srgbClr val="0D3B4C"/>
-            </a:solidFill>
-          </a:ln>
-        </p:spPr>
-        <p:style>
-          <a:lnRef idx="1">
-            <a:schemeClr val="accent1"/>
-          </a:lnRef>
-          <a:fillRef idx="3">
-            <a:schemeClr val="accent1"/>
-          </a:fillRef>
-          <a:effectRef idx="2">
-            <a:schemeClr val="accent1"/>
-          </a:effectRef>
-          <a:fontRef idx="minor">
-            <a:schemeClr val="lt1"/>
-          </a:fontRef>
-        </p:style>
-        <p:txBody>
-          <a:bodyPr rtlCol="0" anchor="ctr"/>
-          <a:lstStyle/>
-          <a:p>
-            <a:pPr algn="ctr"/>
-          </a:p>
-        </p:txBody>
-      </p:sp>
-      <p:sp>
-        <p:nvSpPr>
           <p:cNvPr id="9" name="TextBox 8"/>
           <p:cNvSpPr txBox="1"/>
           <p:nvPr/>
         </p:nvSpPr>
         <p:spPr>
           <a:xfrm>
-            <a:off x="914400" y="1527048"/>
-            <a:ext cx="3931920" cy="457200"/>
+            <a:off x="914400" y="5029200"/>
+            <a:ext cx="8595360" cy="1143000"/>
           </a:xfrm>
           <a:prstGeom prst="rect">
             <a:avLst/>
@@ -10023,50 +13955,15 @@
           <a:noFill/>
         </p:spPr>
         <p:txBody>
-          <a:bodyPr wrap="none">
+          <a:bodyPr wrap="square" tIns="0" bIns="0" lIns="0" rIns="0">
             <a:spAutoFit/>
           </a:bodyPr>
           <a:lstStyle/>
-          <a:p>
-            <a:pPr>
-              <a:defRPr sz="1800" b="1">
-                <a:solidFill>
-                  <a:srgbClr val="FFFFFF"/>
-                </a:solidFill>
-              </a:defRPr>
-            </a:pPr>
-            <a:r>
-              <a:t>STUDENT CONSOLE (ALEX TURNER)</a:t>
-            </a:r>
-          </a:p>
-        </p:txBody>
-      </p:sp>
-      <p:sp>
-        <p:nvSpPr>
-          <p:cNvPr id="10" name="TextBox 9"/>
-          <p:cNvSpPr txBox="1"/>
-          <p:nvPr/>
-        </p:nvSpPr>
-        <p:spPr>
-          <a:xfrm>
-            <a:off x="914400" y="2121408"/>
-            <a:ext cx="3931920" cy="3840480"/>
-          </a:xfrm>
-          <a:prstGeom prst="rect">
-            <a:avLst/>
-          </a:prstGeom>
-          <a:noFill/>
-        </p:spPr>
-        <p:txBody>
-          <a:bodyPr wrap="square">
-            <a:spAutoFit/>
-          </a:bodyPr>
-          <a:lstStyle/>
           <a:p/>
           <a:p>
             <a:pPr>
               <a:spcAft>
-                <a:spcPts val="800"/>
+                <a:spcPts val="0"/>
               </a:spcAft>
               <a:defRPr sz="1800">
                 <a:latin typeface="Segoe UI"/>
@@ -10086,7 +13983,7 @@
                   <a:srgbClr val="0D3B4C"/>
                 </a:solidFill>
               </a:rPr>
-              <a:t>Predictive Attendance: </a:t>
+              <a:t>Architectural Synthesis: </a:t>
             </a:r>
             <a:r>
               <a:rPr>
@@ -10094,326 +13991,7 @@
                   <a:srgbClr val="28323C"/>
                 </a:solidFill>
               </a:rPr>
-              <a:t>Real-time 85.2% display with shortage warning (DBMS at 72.0% -&gt; 'Need 3 more classes').</a:t>
-            </a:r>
-          </a:p>
-          <a:p>
-            <a:pPr>
-              <a:spcAft>
-                <a:spcPts val="800"/>
-              </a:spcAft>
-              <a:defRPr sz="1800">
-                <a:latin typeface="Segoe UI"/>
-              </a:defRPr>
-            </a:pPr>
-            <a:r>
-              <a:rPr b="1">
-                <a:solidFill>
-                  <a:srgbClr val="71C9CE"/>
-                </a:solidFill>
-              </a:rPr>
-              <a:t>▪ </a:t>
-            </a:r>
-            <a:r>
-              <a:rPr b="1">
-                <a:solidFill>
-                  <a:srgbClr val="0D3B4C"/>
-                </a:solidFill>
-              </a:rPr>
-              <a:t>Interactive Timetable: </a:t>
-            </a:r>
-            <a:r>
-              <a:rPr>
-                <a:solidFill>
-                  <a:srgbClr val="28323C"/>
-                </a:solidFill>
-              </a:rPr>
-              <a:t>Monday-to-Saturday schedule matrix with period highlight and lecture handouts.</a:t>
-            </a:r>
-          </a:p>
-          <a:p>
-            <a:pPr>
-              <a:spcAft>
-                <a:spcPts val="800"/>
-              </a:spcAft>
-              <a:defRPr sz="1800">
-                <a:latin typeface="Segoe UI"/>
-              </a:defRPr>
-            </a:pPr>
-            <a:r>
-              <a:rPr b="1">
-                <a:solidFill>
-                  <a:srgbClr val="71C9CE"/>
-                </a:solidFill>
-              </a:rPr>
-              <a:t>▪ </a:t>
-            </a:r>
-            <a:r>
-              <a:rPr b="1">
-                <a:solidFill>
-                  <a:srgbClr val="0D3B4C"/>
-                </a:solidFill>
-              </a:rPr>
-              <a:t>Submissions &amp; Passes: </a:t>
-            </a:r>
-            <a:r>
-              <a:rPr>
-                <a:solidFill>
-                  <a:srgbClr val="28323C"/>
-                </a:solidFill>
-              </a:rPr>
-              <a:t>GitHub repo submissions modal and digital barcode event passes (Technova 2026).</a:t>
-            </a:r>
-          </a:p>
-        </p:txBody>
-      </p:sp>
-      <p:sp>
-        <p:nvSpPr>
-          <p:cNvPr id="11" name="Rounded Rectangle 10"/>
-          <p:cNvSpPr/>
-          <p:nvPr/>
-        </p:nvSpPr>
-        <p:spPr>
-          <a:xfrm>
-            <a:off x="5303520" y="1463040"/>
-            <a:ext cx="4297680" cy="4709160"/>
-          </a:xfrm>
-          <a:prstGeom prst="roundRect">
-            <a:avLst/>
-          </a:prstGeom>
-          <a:solidFill>
-            <a:srgbClr val="FFFFFF"/>
-          </a:solidFill>
-          <a:ln w="19050">
-            <a:solidFill>
-              <a:srgbClr val="A6E3E9"/>
-            </a:solidFill>
-          </a:ln>
-        </p:spPr>
-        <p:style>
-          <a:lnRef idx="1">
-            <a:schemeClr val="accent1"/>
-          </a:lnRef>
-          <a:fillRef idx="3">
-            <a:schemeClr val="accent1"/>
-          </a:fillRef>
-          <a:effectRef idx="2">
-            <a:schemeClr val="accent1"/>
-          </a:effectRef>
-          <a:fontRef idx="minor">
-            <a:schemeClr val="lt1"/>
-          </a:fontRef>
-        </p:style>
-        <p:txBody>
-          <a:bodyPr rtlCol="0" anchor="ctr"/>
-          <a:lstStyle/>
-          <a:p>
-            <a:pPr algn="ctr"/>
-          </a:p>
-        </p:txBody>
-      </p:sp>
-      <p:sp>
-        <p:nvSpPr>
-          <p:cNvPr id="12" name="Rounded Rectangle 11"/>
-          <p:cNvSpPr/>
-          <p:nvPr/>
-        </p:nvSpPr>
-        <p:spPr>
-          <a:xfrm>
-            <a:off x="5303520" y="1463040"/>
-            <a:ext cx="4297680" cy="594360"/>
-          </a:xfrm>
-          <a:prstGeom prst="roundRect">
-            <a:avLst/>
-          </a:prstGeom>
-          <a:solidFill>
-            <a:srgbClr val="0D3B4C"/>
-          </a:solidFill>
-          <a:ln w="19050">
-            <a:solidFill>
-              <a:srgbClr val="0D3B4C"/>
-            </a:solidFill>
-          </a:ln>
-        </p:spPr>
-        <p:style>
-          <a:lnRef idx="1">
-            <a:schemeClr val="accent1"/>
-          </a:lnRef>
-          <a:fillRef idx="3">
-            <a:schemeClr val="accent1"/>
-          </a:fillRef>
-          <a:effectRef idx="2">
-            <a:schemeClr val="accent1"/>
-          </a:effectRef>
-          <a:fontRef idx="minor">
-            <a:schemeClr val="lt1"/>
-          </a:fontRef>
-        </p:style>
-        <p:txBody>
-          <a:bodyPr rtlCol="0" anchor="ctr"/>
-          <a:lstStyle/>
-          <a:p>
-            <a:pPr algn="ctr"/>
-          </a:p>
-        </p:txBody>
-      </p:sp>
-      <p:sp>
-        <p:nvSpPr>
-          <p:cNvPr id="13" name="TextBox 12"/>
-          <p:cNvSpPr txBox="1"/>
-          <p:nvPr/>
-        </p:nvSpPr>
-        <p:spPr>
-          <a:xfrm>
-            <a:off x="5486400" y="1527048"/>
-            <a:ext cx="3931920" cy="457200"/>
-          </a:xfrm>
-          <a:prstGeom prst="rect">
-            <a:avLst/>
-          </a:prstGeom>
-          <a:noFill/>
-        </p:spPr>
-        <p:txBody>
-          <a:bodyPr wrap="none">
-            <a:spAutoFit/>
-          </a:bodyPr>
-          <a:lstStyle/>
-          <a:p>
-            <a:pPr>
-              <a:defRPr sz="1800" b="1">
-                <a:solidFill>
-                  <a:srgbClr val="FFFFFF"/>
-                </a:solidFill>
-              </a:defRPr>
-            </a:pPr>
-            <a:r>
-              <a:t>ADMIN COMMAND (DR. V. MALHOTRA)</a:t>
-            </a:r>
-          </a:p>
-        </p:txBody>
-      </p:sp>
-      <p:sp>
-        <p:nvSpPr>
-          <p:cNvPr id="14" name="TextBox 13"/>
-          <p:cNvSpPr txBox="1"/>
-          <p:nvPr/>
-        </p:nvSpPr>
-        <p:spPr>
-          <a:xfrm>
-            <a:off x="5486400" y="2121408"/>
-            <a:ext cx="3931920" cy="3840480"/>
-          </a:xfrm>
-          <a:prstGeom prst="rect">
-            <a:avLst/>
-          </a:prstGeom>
-          <a:noFill/>
-        </p:spPr>
-        <p:txBody>
-          <a:bodyPr wrap="square">
-            <a:spAutoFit/>
-          </a:bodyPr>
-          <a:lstStyle/>
-          <a:p/>
-          <a:p>
-            <a:pPr>
-              <a:spcAft>
-                <a:spcPts val="800"/>
-              </a:spcAft>
-              <a:defRPr sz="1800">
-                <a:latin typeface="Segoe UI"/>
-              </a:defRPr>
-            </a:pPr>
-            <a:r>
-              <a:rPr b="1">
-                <a:solidFill>
-                  <a:srgbClr val="71C9CE"/>
-                </a:solidFill>
-              </a:rPr>
-              <a:t>▪ </a:t>
-            </a:r>
-            <a:r>
-              <a:rPr b="1">
-                <a:solidFill>
-                  <a:srgbClr val="0D3B4C"/>
-                </a:solidFill>
-              </a:rPr>
-              <a:t>Executive Telemetry: </a:t>
-            </a:r>
-            <a:r>
-              <a:rPr>
-                <a:solidFill>
-                  <a:srgbClr val="28323C"/>
-                </a:solidFill>
-              </a:rPr>
-              <a:t>Live metrics: 4 active enrolled students, 11 department courses, and 2 pending tickets.</a:t>
-            </a:r>
-          </a:p>
-          <a:p>
-            <a:pPr>
-              <a:spcAft>
-                <a:spcPts val="800"/>
-              </a:spcAft>
-              <a:defRPr sz="1800">
-                <a:latin typeface="Segoe UI"/>
-              </a:defRPr>
-            </a:pPr>
-            <a:r>
-              <a:rPr b="1">
-                <a:solidFill>
-                  <a:srgbClr val="71C9CE"/>
-                </a:solidFill>
-              </a:rPr>
-              <a:t>▪ </a:t>
-            </a:r>
-            <a:r>
-              <a:rPr b="1">
-                <a:solidFill>
-                  <a:srgbClr val="0D3B4C"/>
-                </a:solidFill>
-              </a:rPr>
-              <a:t>Grievance Resolution: </a:t>
-            </a:r>
-            <a:r>
-              <a:rPr>
-                <a:solidFill>
-                  <a:srgbClr val="28323C"/>
-                </a:solidFill>
-              </a:rPr>
-              <a:t>1-click status resolution transitioning ISSUE-2026-881 to 'Resolved' with audit remarks.</a:t>
-            </a:r>
-          </a:p>
-          <a:p>
-            <a:pPr>
-              <a:spcAft>
-                <a:spcPts val="800"/>
-              </a:spcAft>
-              <a:defRPr sz="1800">
-                <a:latin typeface="Segoe UI"/>
-              </a:defRPr>
-            </a:pPr>
-            <a:r>
-              <a:rPr b="1">
-                <a:solidFill>
-                  <a:srgbClr val="71C9CE"/>
-                </a:solidFill>
-              </a:rPr>
-              <a:t>▪ </a:t>
-            </a:r>
-            <a:r>
-              <a:rPr b="1">
-                <a:solidFill>
-                  <a:srgbClr val="0D3B4C"/>
-                </a:solidFill>
-              </a:rPr>
-              <a:t>Circulars &amp; Claims: </a:t>
-            </a:r>
-            <a:r>
-              <a:rPr>
-                <a:solidFill>
-                  <a:srgbClr val="28323C"/>
-                </a:solidFill>
-              </a:rPr>
-              <a:t>Departmental broadcast pipeline drafting circulars and Lost &amp; Found claims desk.</a:t>
+              <a:t>Decoupled React SPA communicates via asynchronous JSON REST endpoints with Express backend, persisting to a 26-table native SQLite relational engine [2, 5, 7].</a:t>
             </a:r>
           </a:p>
         </p:txBody>
@@ -10494,7 +14072,7 @@
               </a:defRPr>
             </a:pPr>
             <a:r>
-              <a:t>CHAPTER 5: ATTENDANCE MARGINS &amp; GRAPH PATHING</a:t>
+              <a:t>CHAPTER 5: DETAILED LAYER DECOMPOSITION</a:t>
             </a:r>
           </a:p>
           <a:p>
@@ -10507,7 +14085,7 @@
               </a:defRPr>
             </a:pPr>
             <a:r>
-              <a:t>Mathematical Models &amp; Formulations</a:t>
+              <a:t>System Design: Three-Tier Architecture</a:t>
             </a:r>
           </a:p>
         </p:txBody>
@@ -10629,46 +14207,22 @@
           </a:p>
         </p:txBody>
       </p:sp>
-      <p:pic>
-        <p:nvPicPr>
-          <p:cNvPr id="7" name="Picture 6" descr="diagram_attendance_math.png"/>
-          <p:cNvPicPr>
-            <a:picLocks noChangeAspect="1"/>
-          </p:cNvPicPr>
-          <p:nvPr/>
-        </p:nvPicPr>
-        <p:blipFill>
-          <a:blip r:embed="rId3"/>
-          <a:stretch>
-            <a:fillRect/>
-          </a:stretch>
-        </p:blipFill>
-        <p:spPr>
-          <a:xfrm>
-            <a:off x="731520" y="1444752"/>
-            <a:ext cx="8961120" cy="3383280"/>
-          </a:xfrm>
-          <a:prstGeom prst="rect">
-            <a:avLst/>
-          </a:prstGeom>
-        </p:spPr>
-      </p:pic>
-      <p:sp>
-        <p:nvSpPr>
-          <p:cNvPr id="8" name="Rounded Rectangle 7"/>
+      <p:sp>
+        <p:nvSpPr>
+          <p:cNvPr id="7" name="Rounded Rectangle 6"/>
           <p:cNvSpPr/>
           <p:nvPr/>
         </p:nvSpPr>
         <p:spPr>
           <a:xfrm>
-            <a:off x="731520" y="4956048"/>
-            <a:ext cx="8961120" cy="1280160"/>
+            <a:off x="731520" y="1463040"/>
+            <a:ext cx="2834640" cy="4709160"/>
           </a:xfrm>
           <a:prstGeom prst="roundRect">
             <a:avLst/>
           </a:prstGeom>
           <a:solidFill>
-            <a:srgbClr val="E3FDFD"/>
+            <a:srgbClr val="FFFFFF"/>
           </a:solidFill>
           <a:ln w="19050">
             <a:solidFill>
@@ -10700,14 +14254,59 @@
       </p:sp>
       <p:sp>
         <p:nvSpPr>
+          <p:cNvPr id="8" name="Rounded Rectangle 7"/>
+          <p:cNvSpPr/>
+          <p:nvPr/>
+        </p:nvSpPr>
+        <p:spPr>
+          <a:xfrm>
+            <a:off x="731520" y="1463040"/>
+            <a:ext cx="2834640" cy="640080"/>
+          </a:xfrm>
+          <a:prstGeom prst="roundRect">
+            <a:avLst/>
+          </a:prstGeom>
+          <a:solidFill>
+            <a:srgbClr val="0D3B4C"/>
+          </a:solidFill>
+          <a:ln w="19050">
+            <a:solidFill>
+              <a:srgbClr val="0D3B4C"/>
+            </a:solidFill>
+          </a:ln>
+        </p:spPr>
+        <p:style>
+          <a:lnRef idx="1">
+            <a:schemeClr val="accent1"/>
+          </a:lnRef>
+          <a:fillRef idx="3">
+            <a:schemeClr val="accent1"/>
+          </a:fillRef>
+          <a:effectRef idx="2">
+            <a:schemeClr val="accent1"/>
+          </a:effectRef>
+          <a:fontRef idx="minor">
+            <a:schemeClr val="lt1"/>
+          </a:fontRef>
+        </p:style>
+        <p:txBody>
+          <a:bodyPr rtlCol="0" anchor="ctr"/>
+          <a:lstStyle/>
+          <a:p>
+            <a:pPr algn="ctr"/>
+          </a:p>
+        </p:txBody>
+      </p:sp>
+      <p:sp>
+        <p:nvSpPr>
           <p:cNvPr id="9" name="TextBox 8"/>
           <p:cNvSpPr txBox="1"/>
           <p:nvPr/>
         </p:nvSpPr>
         <p:spPr>
           <a:xfrm>
-            <a:off x="914400" y="5029200"/>
-            <a:ext cx="8595360" cy="1143000"/>
+            <a:off x="822960" y="1527048"/>
+            <a:ext cx="2651760" cy="502920"/>
           </a:xfrm>
           <a:prstGeom prst="rect">
             <a:avLst/>
@@ -10715,17 +14314,52 @@
           <a:noFill/>
         </p:spPr>
         <p:txBody>
-          <a:bodyPr wrap="square" tIns="0" bIns="0" lIns="0" rIns="0">
+          <a:bodyPr wrap="square">
             <a:spAutoFit/>
           </a:bodyPr>
           <a:lstStyle/>
+          <a:p>
+            <a:pPr>
+              <a:defRPr sz="1700" b="1">
+                <a:solidFill>
+                  <a:srgbClr val="FFFFFF"/>
+                </a:solidFill>
+              </a:defRPr>
+            </a:pPr>
+            <a:r>
+              <a:t>Tier 1: Presentation Layer</a:t>
+            </a:r>
+          </a:p>
+        </p:txBody>
+      </p:sp>
+      <p:sp>
+        <p:nvSpPr>
+          <p:cNvPr id="10" name="TextBox 9"/>
+          <p:cNvSpPr txBox="1"/>
+          <p:nvPr/>
+        </p:nvSpPr>
+        <p:spPr>
+          <a:xfrm>
+            <a:off x="868680" y="2240280"/>
+            <a:ext cx="2560320" cy="3749039"/>
+          </a:xfrm>
+          <a:prstGeom prst="rect">
+            <a:avLst/>
+          </a:prstGeom>
+          <a:noFill/>
+        </p:spPr>
+        <p:txBody>
+          <a:bodyPr wrap="square">
+            <a:spAutoFit/>
+          </a:bodyPr>
+          <a:lstStyle/>
           <a:p/>
           <a:p>
             <a:pPr>
               <a:spcAft>
-                <a:spcPts val="0"/>
+                <a:spcPts val="2200"/>
               </a:spcAft>
-              <a:defRPr sz="1800">
+              <a:defRPr sz="1700">
                 <a:latin typeface="Segoe UI"/>
               </a:defRPr>
             </a:pPr>
@@ -10743,7 +14377,7 @@
                   <a:srgbClr val="0D3B4C"/>
                 </a:solidFill>
               </a:rPr>
-              <a:t>Algorithmic Precision: </a:t>
+              <a:t>React 19 &amp; Vite SPA: </a:t>
             </a:r>
             <a:r>
               <a:rPr>
@@ -10751,7 +14385,475 @@
                   <a:srgbClr val="28323C"/>
                 </a:solidFill>
               </a:rPr>
-              <a:t>Deterministic calculations compute safe bunk margin ceil/floor formulas, alerting students prior to 75% threshold breaches and providing exact class recovery targets.</a:t>
+              <a:t>Declarative UI with instant sub-100ms client-side route transitions [2].</a:t>
+            </a:r>
+          </a:p>
+          <a:p>
+            <a:pPr>
+              <a:spcAft>
+                <a:spcPts val="2200"/>
+              </a:spcAft>
+              <a:defRPr sz="1700">
+                <a:latin typeface="Segoe UI"/>
+              </a:defRPr>
+            </a:pPr>
+            <a:r>
+              <a:rPr b="1">
+                <a:solidFill>
+                  <a:srgbClr val="71C9CE"/>
+                </a:solidFill>
+              </a:rPr>
+              <a:t>▪ </a:t>
+            </a:r>
+            <a:r>
+              <a:rPr b="1">
+                <a:solidFill>
+                  <a:srgbClr val="0D3B4C"/>
+                </a:solidFill>
+              </a:rPr>
+              <a:t>Two-Way Role Switcher: </a:t>
+            </a:r>
+            <a:r>
+              <a:rPr>
+                <a:solidFill>
+                  <a:srgbClr val="28323C"/>
+                </a:solidFill>
+              </a:rPr>
+              <a:t>Seamless viva toggling between Alex Turner (Student) and Dr. Vikram (Admin).</a:t>
+            </a:r>
+          </a:p>
+        </p:txBody>
+      </p:sp>
+      <p:sp>
+        <p:nvSpPr>
+          <p:cNvPr id="11" name="Rounded Rectangle 10"/>
+          <p:cNvSpPr/>
+          <p:nvPr/>
+        </p:nvSpPr>
+        <p:spPr>
+          <a:xfrm>
+            <a:off x="3794760" y="1463040"/>
+            <a:ext cx="2834640" cy="4709160"/>
+          </a:xfrm>
+          <a:prstGeom prst="roundRect">
+            <a:avLst/>
+          </a:prstGeom>
+          <a:solidFill>
+            <a:srgbClr val="FFFFFF"/>
+          </a:solidFill>
+          <a:ln w="19050">
+            <a:solidFill>
+              <a:srgbClr val="71C9CE"/>
+            </a:solidFill>
+          </a:ln>
+        </p:spPr>
+        <p:style>
+          <a:lnRef idx="1">
+            <a:schemeClr val="accent1"/>
+          </a:lnRef>
+          <a:fillRef idx="3">
+            <a:schemeClr val="accent1"/>
+          </a:fillRef>
+          <a:effectRef idx="2">
+            <a:schemeClr val="accent1"/>
+          </a:effectRef>
+          <a:fontRef idx="minor">
+            <a:schemeClr val="lt1"/>
+          </a:fontRef>
+        </p:style>
+        <p:txBody>
+          <a:bodyPr rtlCol="0" anchor="ctr"/>
+          <a:lstStyle/>
+          <a:p>
+            <a:pPr algn="ctr"/>
+          </a:p>
+        </p:txBody>
+      </p:sp>
+      <p:sp>
+        <p:nvSpPr>
+          <p:cNvPr id="12" name="Rounded Rectangle 11"/>
+          <p:cNvSpPr/>
+          <p:nvPr/>
+        </p:nvSpPr>
+        <p:spPr>
+          <a:xfrm>
+            <a:off x="3794760" y="1463040"/>
+            <a:ext cx="2834640" cy="640080"/>
+          </a:xfrm>
+          <a:prstGeom prst="roundRect">
+            <a:avLst/>
+          </a:prstGeom>
+          <a:solidFill>
+            <a:srgbClr val="0D3B4C"/>
+          </a:solidFill>
+          <a:ln w="19050">
+            <a:solidFill>
+              <a:srgbClr val="0D3B4C"/>
+            </a:solidFill>
+          </a:ln>
+        </p:spPr>
+        <p:style>
+          <a:lnRef idx="1">
+            <a:schemeClr val="accent1"/>
+          </a:lnRef>
+          <a:fillRef idx="3">
+            <a:schemeClr val="accent1"/>
+          </a:fillRef>
+          <a:effectRef idx="2">
+            <a:schemeClr val="accent1"/>
+          </a:effectRef>
+          <a:fontRef idx="minor">
+            <a:schemeClr val="lt1"/>
+          </a:fontRef>
+        </p:style>
+        <p:txBody>
+          <a:bodyPr rtlCol="0" anchor="ctr"/>
+          <a:lstStyle/>
+          <a:p>
+            <a:pPr algn="ctr"/>
+          </a:p>
+        </p:txBody>
+      </p:sp>
+      <p:sp>
+        <p:nvSpPr>
+          <p:cNvPr id="13" name="TextBox 12"/>
+          <p:cNvSpPr txBox="1"/>
+          <p:nvPr/>
+        </p:nvSpPr>
+        <p:spPr>
+          <a:xfrm>
+            <a:off x="3886200" y="1527048"/>
+            <a:ext cx="2651760" cy="502920"/>
+          </a:xfrm>
+          <a:prstGeom prst="rect">
+            <a:avLst/>
+          </a:prstGeom>
+          <a:noFill/>
+        </p:spPr>
+        <p:txBody>
+          <a:bodyPr wrap="square">
+            <a:spAutoFit/>
+          </a:bodyPr>
+          <a:lstStyle/>
+          <a:p>
+            <a:pPr>
+              <a:defRPr sz="1700" b="1">
+                <a:solidFill>
+                  <a:srgbClr val="FFFFFF"/>
+                </a:solidFill>
+              </a:defRPr>
+            </a:pPr>
+            <a:r>
+              <a:t>Tier 2: Application Layer</a:t>
+            </a:r>
+          </a:p>
+        </p:txBody>
+      </p:sp>
+      <p:sp>
+        <p:nvSpPr>
+          <p:cNvPr id="14" name="TextBox 13"/>
+          <p:cNvSpPr txBox="1"/>
+          <p:nvPr/>
+        </p:nvSpPr>
+        <p:spPr>
+          <a:xfrm>
+            <a:off x="3931920" y="2240280"/>
+            <a:ext cx="2560320" cy="3749039"/>
+          </a:xfrm>
+          <a:prstGeom prst="rect">
+            <a:avLst/>
+          </a:prstGeom>
+          <a:noFill/>
+        </p:spPr>
+        <p:txBody>
+          <a:bodyPr wrap="square">
+            <a:spAutoFit/>
+          </a:bodyPr>
+          <a:lstStyle/>
+          <a:p/>
+          <a:p>
+            <a:pPr>
+              <a:spcAft>
+                <a:spcPts val="2200"/>
+              </a:spcAft>
+              <a:defRPr sz="1700">
+                <a:latin typeface="Segoe UI"/>
+              </a:defRPr>
+            </a:pPr>
+            <a:r>
+              <a:rPr b="1">
+                <a:solidFill>
+                  <a:srgbClr val="71C9CE"/>
+                </a:solidFill>
+              </a:rPr>
+              <a:t>▪ </a:t>
+            </a:r>
+            <a:r>
+              <a:rPr b="1">
+                <a:solidFill>
+                  <a:srgbClr val="0D3B4C"/>
+                </a:solidFill>
+              </a:rPr>
+              <a:t>Express RESTful Server: </a:t>
+            </a:r>
+            <a:r>
+              <a:rPr>
+                <a:solidFill>
+                  <a:srgbClr val="28323C"/>
+                </a:solidFill>
+              </a:rPr>
+              <a:t>Modular asynchronous microservice architecture running on port 5000 [3, 7].</a:t>
+            </a:r>
+          </a:p>
+          <a:p>
+            <a:pPr>
+              <a:spcAft>
+                <a:spcPts val="2200"/>
+              </a:spcAft>
+              <a:defRPr sz="1700">
+                <a:latin typeface="Segoe UI"/>
+              </a:defRPr>
+            </a:pPr>
+            <a:r>
+              <a:rPr b="1">
+                <a:solidFill>
+                  <a:srgbClr val="71C9CE"/>
+                </a:solidFill>
+              </a:rPr>
+              <a:t>▪ </a:t>
+            </a:r>
+            <a:r>
+              <a:rPr b="1">
+                <a:solidFill>
+                  <a:srgbClr val="0D3B4C"/>
+                </a:solidFill>
+              </a:rPr>
+              <a:t>Attendance Margin Engine: </a:t>
+            </a:r>
+            <a:r>
+              <a:rPr>
+                <a:solidFill>
+                  <a:srgbClr val="28323C"/>
+                </a:solidFill>
+              </a:rPr>
+              <a:t>Server-side algorithmic execution of predictive 75% attendance calculations.</a:t>
+            </a:r>
+          </a:p>
+        </p:txBody>
+      </p:sp>
+      <p:sp>
+        <p:nvSpPr>
+          <p:cNvPr id="15" name="Rounded Rectangle 14"/>
+          <p:cNvSpPr/>
+          <p:nvPr/>
+        </p:nvSpPr>
+        <p:spPr>
+          <a:xfrm>
+            <a:off x="6858000" y="1463040"/>
+            <a:ext cx="2834640" cy="4709160"/>
+          </a:xfrm>
+          <a:prstGeom prst="roundRect">
+            <a:avLst/>
+          </a:prstGeom>
+          <a:solidFill>
+            <a:srgbClr val="FFFFFF"/>
+          </a:solidFill>
+          <a:ln w="19050">
+            <a:solidFill>
+              <a:srgbClr val="71C9CE"/>
+            </a:solidFill>
+          </a:ln>
+        </p:spPr>
+        <p:style>
+          <a:lnRef idx="1">
+            <a:schemeClr val="accent1"/>
+          </a:lnRef>
+          <a:fillRef idx="3">
+            <a:schemeClr val="accent1"/>
+          </a:fillRef>
+          <a:effectRef idx="2">
+            <a:schemeClr val="accent1"/>
+          </a:effectRef>
+          <a:fontRef idx="minor">
+            <a:schemeClr val="lt1"/>
+          </a:fontRef>
+        </p:style>
+        <p:txBody>
+          <a:bodyPr rtlCol="0" anchor="ctr"/>
+          <a:lstStyle/>
+          <a:p>
+            <a:pPr algn="ctr"/>
+          </a:p>
+        </p:txBody>
+      </p:sp>
+      <p:sp>
+        <p:nvSpPr>
+          <p:cNvPr id="16" name="Rounded Rectangle 15"/>
+          <p:cNvSpPr/>
+          <p:nvPr/>
+        </p:nvSpPr>
+        <p:spPr>
+          <a:xfrm>
+            <a:off x="6858000" y="1463040"/>
+            <a:ext cx="2834640" cy="640080"/>
+          </a:xfrm>
+          <a:prstGeom prst="roundRect">
+            <a:avLst/>
+          </a:prstGeom>
+          <a:solidFill>
+            <a:srgbClr val="0D3B4C"/>
+          </a:solidFill>
+          <a:ln w="19050">
+            <a:solidFill>
+              <a:srgbClr val="0D3B4C"/>
+            </a:solidFill>
+          </a:ln>
+        </p:spPr>
+        <p:style>
+          <a:lnRef idx="1">
+            <a:schemeClr val="accent1"/>
+          </a:lnRef>
+          <a:fillRef idx="3">
+            <a:schemeClr val="accent1"/>
+          </a:fillRef>
+          <a:effectRef idx="2">
+            <a:schemeClr val="accent1"/>
+          </a:effectRef>
+          <a:fontRef idx="minor">
+            <a:schemeClr val="lt1"/>
+          </a:fontRef>
+        </p:style>
+        <p:txBody>
+          <a:bodyPr rtlCol="0" anchor="ctr"/>
+          <a:lstStyle/>
+          <a:p>
+            <a:pPr algn="ctr"/>
+          </a:p>
+        </p:txBody>
+      </p:sp>
+      <p:sp>
+        <p:nvSpPr>
+          <p:cNvPr id="17" name="TextBox 16"/>
+          <p:cNvSpPr txBox="1"/>
+          <p:nvPr/>
+        </p:nvSpPr>
+        <p:spPr>
+          <a:xfrm>
+            <a:off x="6949440" y="1527048"/>
+            <a:ext cx="2651760" cy="502920"/>
+          </a:xfrm>
+          <a:prstGeom prst="rect">
+            <a:avLst/>
+          </a:prstGeom>
+          <a:noFill/>
+        </p:spPr>
+        <p:txBody>
+          <a:bodyPr wrap="square">
+            <a:spAutoFit/>
+          </a:bodyPr>
+          <a:lstStyle/>
+          <a:p>
+            <a:pPr>
+              <a:defRPr sz="1700" b="1">
+                <a:solidFill>
+                  <a:srgbClr val="FFFFFF"/>
+                </a:solidFill>
+              </a:defRPr>
+            </a:pPr>
+            <a:r>
+              <a:t>Tier 3: Persistence Layer</a:t>
+            </a:r>
+          </a:p>
+        </p:txBody>
+      </p:sp>
+      <p:sp>
+        <p:nvSpPr>
+          <p:cNvPr id="18" name="TextBox 17"/>
+          <p:cNvSpPr txBox="1"/>
+          <p:nvPr/>
+        </p:nvSpPr>
+        <p:spPr>
+          <a:xfrm>
+            <a:off x="6995160" y="2240280"/>
+            <a:ext cx="2560320" cy="3749039"/>
+          </a:xfrm>
+          <a:prstGeom prst="rect">
+            <a:avLst/>
+          </a:prstGeom>
+          <a:noFill/>
+        </p:spPr>
+        <p:txBody>
+          <a:bodyPr wrap="square">
+            <a:spAutoFit/>
+          </a:bodyPr>
+          <a:lstStyle/>
+          <a:p/>
+          <a:p>
+            <a:pPr>
+              <a:spcAft>
+                <a:spcPts val="2200"/>
+              </a:spcAft>
+              <a:defRPr sz="1700">
+                <a:latin typeface="Segoe UI"/>
+              </a:defRPr>
+            </a:pPr>
+            <a:r>
+              <a:rPr b="1">
+                <a:solidFill>
+                  <a:srgbClr val="71C9CE"/>
+                </a:solidFill>
+              </a:rPr>
+              <a:t>▪ </a:t>
+            </a:r>
+            <a:r>
+              <a:rPr b="1">
+                <a:solidFill>
+                  <a:srgbClr val="0D3B4C"/>
+                </a:solidFill>
+              </a:rPr>
+              <a:t>26 Relational Tables: </a:t>
+            </a:r>
+            <a:r>
+              <a:rPr>
+                <a:solidFill>
+                  <a:srgbClr val="28323C"/>
+                </a:solidFill>
+              </a:rPr>
+              <a:t>Normalized in 3NF to eliminate duplicate records and update anomalies [1].</a:t>
+            </a:r>
+          </a:p>
+          <a:p>
+            <a:pPr>
+              <a:spcAft>
+                <a:spcPts val="2200"/>
+              </a:spcAft>
+              <a:defRPr sz="1700">
+                <a:latin typeface="Segoe UI"/>
+              </a:defRPr>
+            </a:pPr>
+            <a:r>
+              <a:rPr b="1">
+                <a:solidFill>
+                  <a:srgbClr val="71C9CE"/>
+                </a:solidFill>
+              </a:rPr>
+              <a:t>▪ </a:t>
+            </a:r>
+            <a:r>
+              <a:rPr b="1">
+                <a:solidFill>
+                  <a:srgbClr val="0D3B4C"/>
+                </a:solidFill>
+              </a:rPr>
+              <a:t>Native SQLite Engine: </a:t>
+            </a:r>
+            <a:r>
+              <a:rPr>
+                <a:solidFill>
+                  <a:srgbClr val="28323C"/>
+                </a:solidFill>
+              </a:rPr>
+              <a:t>Zero-dependency embedded relational database running natively in Node.js [5].</a:t>
             </a:r>
           </a:p>
         </p:txBody>
@@ -10832,7 +14934,7 @@
               </a:defRPr>
             </a:pPr>
             <a:r>
-              <a:t>CHAPTER 4: DECOUPLED TECH STACK &amp; VISUAL PALETTE</a:t>
+              <a:t>CHAPTER 5: RELATIONAL SCHEMA &amp; 3NF INTEGRITY</a:t>
             </a:r>
           </a:p>
           <a:p>
@@ -10845,7 +14947,7 @@
               </a:defRPr>
             </a:pPr>
             <a:r>
-              <a:t>Technologies &amp; Aquatic Design System</a:t>
+              <a:t>System Design: 26-Table SQL Model</a:t>
             </a:r>
           </a:p>
         </p:txBody>
@@ -10967,26 +15069,50 @@
           </a:p>
         </p:txBody>
       </p:sp>
-      <p:sp>
-        <p:nvSpPr>
-          <p:cNvPr id="7" name="Rounded Rectangle 6"/>
+      <p:pic>
+        <p:nvPicPr>
+          <p:cNvPr id="7" name="Picture 6" descr="diagram_database_schema.png"/>
+          <p:cNvPicPr>
+            <a:picLocks noChangeAspect="1"/>
+          </p:cNvPicPr>
+          <p:nvPr/>
+        </p:nvPicPr>
+        <p:blipFill>
+          <a:blip r:embed="rId3"/>
+          <a:stretch>
+            <a:fillRect/>
+          </a:stretch>
+        </p:blipFill>
+        <p:spPr>
+          <a:xfrm>
+            <a:off x="731520" y="1444752"/>
+            <a:ext cx="8961120" cy="3383280"/>
+          </a:xfrm>
+          <a:prstGeom prst="rect">
+            <a:avLst/>
+          </a:prstGeom>
+        </p:spPr>
+      </p:pic>
+      <p:sp>
+        <p:nvSpPr>
+          <p:cNvPr id="8" name="Rounded Rectangle 7"/>
           <p:cNvSpPr/>
           <p:nvPr/>
         </p:nvSpPr>
         <p:spPr>
           <a:xfrm>
-            <a:off x="731520" y="1463040"/>
-            <a:ext cx="4297680" cy="4709160"/>
+            <a:off x="731520" y="4956048"/>
+            <a:ext cx="8961120" cy="1280160"/>
           </a:xfrm>
           <a:prstGeom prst="roundRect">
             <a:avLst/>
           </a:prstGeom>
           <a:solidFill>
-            <a:srgbClr val="FFFFFF"/>
+            <a:srgbClr val="E3FDFD"/>
           </a:solidFill>
           <a:ln w="19050">
             <a:solidFill>
-              <a:srgbClr val="A6E3E9"/>
+              <a:srgbClr val="71C9CE"/>
             </a:solidFill>
           </a:ln>
         </p:spPr>
@@ -11014,59 +15140,14 @@
       </p:sp>
       <p:sp>
         <p:nvSpPr>
-          <p:cNvPr id="8" name="Rounded Rectangle 7"/>
-          <p:cNvSpPr/>
-          <p:nvPr/>
-        </p:nvSpPr>
-        <p:spPr>
-          <a:xfrm>
-            <a:off x="731520" y="1463040"/>
-            <a:ext cx="4297680" cy="594360"/>
-          </a:xfrm>
-          <a:prstGeom prst="roundRect">
-            <a:avLst/>
-          </a:prstGeom>
-          <a:solidFill>
-            <a:srgbClr val="0D3B4C"/>
-          </a:solidFill>
-          <a:ln w="19050">
-            <a:solidFill>
-              <a:srgbClr val="0D3B4C"/>
-            </a:solidFill>
-          </a:ln>
-        </p:spPr>
-        <p:style>
-          <a:lnRef idx="1">
-            <a:schemeClr val="accent1"/>
-          </a:lnRef>
-          <a:fillRef idx="3">
-            <a:schemeClr val="accent1"/>
-          </a:fillRef>
-          <a:effectRef idx="2">
-            <a:schemeClr val="accent1"/>
-          </a:effectRef>
-          <a:fontRef idx="minor">
-            <a:schemeClr val="lt1"/>
-          </a:fontRef>
-        </p:style>
-        <p:txBody>
-          <a:bodyPr rtlCol="0" anchor="ctr"/>
-          <a:lstStyle/>
-          <a:p>
-            <a:pPr algn="ctr"/>
-          </a:p>
-        </p:txBody>
-      </p:sp>
-      <p:sp>
-        <p:nvSpPr>
           <p:cNvPr id="9" name="TextBox 8"/>
           <p:cNvSpPr txBox="1"/>
           <p:nvPr/>
         </p:nvSpPr>
         <p:spPr>
           <a:xfrm>
-            <a:off x="914400" y="1527048"/>
-            <a:ext cx="3931920" cy="457200"/>
+            <a:off x="914400" y="5029200"/>
+            <a:ext cx="8595360" cy="1143000"/>
           </a:xfrm>
           <a:prstGeom prst="rect">
             <a:avLst/>
@@ -11074,50 +15155,15 @@
           <a:noFill/>
         </p:spPr>
         <p:txBody>
-          <a:bodyPr wrap="none">
+          <a:bodyPr wrap="square" tIns="0" bIns="0" lIns="0" rIns="0">
             <a:spAutoFit/>
           </a:bodyPr>
           <a:lstStyle/>
-          <a:p>
-            <a:pPr>
-              <a:defRPr sz="1800" b="1">
-                <a:solidFill>
-                  <a:srgbClr val="FFFFFF"/>
-                </a:solidFill>
-              </a:defRPr>
-            </a:pPr>
-            <a:r>
-              <a:t>MODERN DECOUPLED TECH STACK</a:t>
-            </a:r>
-          </a:p>
-        </p:txBody>
-      </p:sp>
-      <p:sp>
-        <p:nvSpPr>
-          <p:cNvPr id="10" name="TextBox 9"/>
-          <p:cNvSpPr txBox="1"/>
-          <p:nvPr/>
-        </p:nvSpPr>
-        <p:spPr>
-          <a:xfrm>
-            <a:off x="914400" y="2121408"/>
-            <a:ext cx="3931920" cy="3840480"/>
-          </a:xfrm>
-          <a:prstGeom prst="rect">
-            <a:avLst/>
-          </a:prstGeom>
-          <a:noFill/>
-        </p:spPr>
-        <p:txBody>
-          <a:bodyPr wrap="square">
-            <a:spAutoFit/>
-          </a:bodyPr>
-          <a:lstStyle/>
           <a:p/>
           <a:p>
             <a:pPr>
               <a:spcAft>
-                <a:spcPts val="800"/>
+                <a:spcPts val="0"/>
               </a:spcAft>
               <a:defRPr sz="1800">
                 <a:latin typeface="Segoe UI"/>
@@ -11137,7 +15183,7 @@
                   <a:srgbClr val="0D3B4C"/>
                 </a:solidFill>
               </a:rPr>
-              <a:t>React 19 &amp; Vite SPA: </a:t>
+              <a:t>Third Normal Form (3NF) Guarantee: </a:t>
             </a:r>
             <a:r>
               <a:rPr>
@@ -11145,326 +15191,7 @@
                   <a:srgbClr val="28323C"/>
                 </a:solidFill>
               </a:rPr>
-              <a:t>Declarative component UI with sub-100ms route transitions and instant HMR (&lt;150ms) [1].</a:t>
-            </a:r>
-          </a:p>
-          <a:p>
-            <a:pPr>
-              <a:spcAft>
-                <a:spcPts val="800"/>
-              </a:spcAft>
-              <a:defRPr sz="1800">
-                <a:latin typeface="Segoe UI"/>
-              </a:defRPr>
-            </a:pPr>
-            <a:r>
-              <a:rPr b="1">
-                <a:solidFill>
-                  <a:srgbClr val="71C9CE"/>
-                </a:solidFill>
-              </a:rPr>
-              <a:t>▪ </a:t>
-            </a:r>
-            <a:r>
-              <a:rPr b="1">
-                <a:solidFill>
-                  <a:srgbClr val="0D3B4C"/>
-                </a:solidFill>
-              </a:rPr>
-              <a:t>Node.js &amp; Express API: </a:t>
-            </a:r>
-            <a:r>
-              <a:rPr>
-                <a:solidFill>
-                  <a:srgbClr val="28323C"/>
-                </a:solidFill>
-              </a:rPr>
-              <a:t>Asynchronous RESTful microservice with CORS security and role-based access control [3].</a:t>
-            </a:r>
-          </a:p>
-          <a:p>
-            <a:pPr>
-              <a:spcAft>
-                <a:spcPts val="800"/>
-              </a:spcAft>
-              <a:defRPr sz="1800">
-                <a:latin typeface="Segoe UI"/>
-              </a:defRPr>
-            </a:pPr>
-            <a:r>
-              <a:rPr b="1">
-                <a:solidFill>
-                  <a:srgbClr val="71C9CE"/>
-                </a:solidFill>
-              </a:rPr>
-              <a:t>▪ </a:t>
-            </a:r>
-            <a:r>
-              <a:rPr b="1">
-                <a:solidFill>
-                  <a:srgbClr val="0D3B4C"/>
-                </a:solidFill>
-              </a:rPr>
-              <a:t>Native SQLite (3NF): </a:t>
-            </a:r>
-            <a:r>
-              <a:rPr>
-                <a:solidFill>
-                  <a:srgbClr val="28323C"/>
-                </a:solidFill>
-              </a:rPr>
-              <a:t>Embedded zero-dependency SQL engine executing atomic ACID transactions in &lt;10ms [2].</a:t>
-            </a:r>
-          </a:p>
-        </p:txBody>
-      </p:sp>
-      <p:sp>
-        <p:nvSpPr>
-          <p:cNvPr id="11" name="Rounded Rectangle 10"/>
-          <p:cNvSpPr/>
-          <p:nvPr/>
-        </p:nvSpPr>
-        <p:spPr>
-          <a:xfrm>
-            <a:off x="5303520" y="1463040"/>
-            <a:ext cx="4297680" cy="4709160"/>
-          </a:xfrm>
-          <a:prstGeom prst="roundRect">
-            <a:avLst/>
-          </a:prstGeom>
-          <a:solidFill>
-            <a:srgbClr val="FFFFFF"/>
-          </a:solidFill>
-          <a:ln w="19050">
-            <a:solidFill>
-              <a:srgbClr val="A6E3E9"/>
-            </a:solidFill>
-          </a:ln>
-        </p:spPr>
-        <p:style>
-          <a:lnRef idx="1">
-            <a:schemeClr val="accent1"/>
-          </a:lnRef>
-          <a:fillRef idx="3">
-            <a:schemeClr val="accent1"/>
-          </a:fillRef>
-          <a:effectRef idx="2">
-            <a:schemeClr val="accent1"/>
-          </a:effectRef>
-          <a:fontRef idx="minor">
-            <a:schemeClr val="lt1"/>
-          </a:fontRef>
-        </p:style>
-        <p:txBody>
-          <a:bodyPr rtlCol="0" anchor="ctr"/>
-          <a:lstStyle/>
-          <a:p>
-            <a:pPr algn="ctr"/>
-          </a:p>
-        </p:txBody>
-      </p:sp>
-      <p:sp>
-        <p:nvSpPr>
-          <p:cNvPr id="12" name="Rounded Rectangle 11"/>
-          <p:cNvSpPr/>
-          <p:nvPr/>
-        </p:nvSpPr>
-        <p:spPr>
-          <a:xfrm>
-            <a:off x="5303520" y="1463040"/>
-            <a:ext cx="4297680" cy="594360"/>
-          </a:xfrm>
-          <a:prstGeom prst="roundRect">
-            <a:avLst/>
-          </a:prstGeom>
-          <a:solidFill>
-            <a:srgbClr val="0D3B4C"/>
-          </a:solidFill>
-          <a:ln w="19050">
-            <a:solidFill>
-              <a:srgbClr val="0D3B4C"/>
-            </a:solidFill>
-          </a:ln>
-        </p:spPr>
-        <p:style>
-          <a:lnRef idx="1">
-            <a:schemeClr val="accent1"/>
-          </a:lnRef>
-          <a:fillRef idx="3">
-            <a:schemeClr val="accent1"/>
-          </a:fillRef>
-          <a:effectRef idx="2">
-            <a:schemeClr val="accent1"/>
-          </a:effectRef>
-          <a:fontRef idx="minor">
-            <a:schemeClr val="lt1"/>
-          </a:fontRef>
-        </p:style>
-        <p:txBody>
-          <a:bodyPr rtlCol="0" anchor="ctr"/>
-          <a:lstStyle/>
-          <a:p>
-            <a:pPr algn="ctr"/>
-          </a:p>
-        </p:txBody>
-      </p:sp>
-      <p:sp>
-        <p:nvSpPr>
-          <p:cNvPr id="13" name="TextBox 12"/>
-          <p:cNvSpPr txBox="1"/>
-          <p:nvPr/>
-        </p:nvSpPr>
-        <p:spPr>
-          <a:xfrm>
-            <a:off x="5486400" y="1527048"/>
-            <a:ext cx="3931920" cy="457200"/>
-          </a:xfrm>
-          <a:prstGeom prst="rect">
-            <a:avLst/>
-          </a:prstGeom>
-          <a:noFill/>
-        </p:spPr>
-        <p:txBody>
-          <a:bodyPr wrap="none">
-            <a:spAutoFit/>
-          </a:bodyPr>
-          <a:lstStyle/>
-          <a:p>
-            <a:pPr>
-              <a:defRPr sz="1800" b="1">
-                <a:solidFill>
-                  <a:srgbClr val="FFFFFF"/>
-                </a:solidFill>
-              </a:defRPr>
-            </a:pPr>
-            <a:r>
-              <a:t>AQUATIC THEME DESIGN SYSTEM</a:t>
-            </a:r>
-          </a:p>
-        </p:txBody>
-      </p:sp>
-      <p:sp>
-        <p:nvSpPr>
-          <p:cNvPr id="14" name="TextBox 13"/>
-          <p:cNvSpPr txBox="1"/>
-          <p:nvPr/>
-        </p:nvSpPr>
-        <p:spPr>
-          <a:xfrm>
-            <a:off x="5486400" y="2121408"/>
-            <a:ext cx="3931920" cy="3840480"/>
-          </a:xfrm>
-          <a:prstGeom prst="rect">
-            <a:avLst/>
-          </a:prstGeom>
-          <a:noFill/>
-        </p:spPr>
-        <p:txBody>
-          <a:bodyPr wrap="square">
-            <a:spAutoFit/>
-          </a:bodyPr>
-          <a:lstStyle/>
-          <a:p/>
-          <a:p>
-            <a:pPr>
-              <a:spcAft>
-                <a:spcPts val="800"/>
-              </a:spcAft>
-              <a:defRPr sz="1800">
-                <a:latin typeface="Segoe UI"/>
-              </a:defRPr>
-            </a:pPr>
-            <a:r>
-              <a:rPr b="1">
-                <a:solidFill>
-                  <a:srgbClr val="71C9CE"/>
-                </a:solidFill>
-              </a:rPr>
-              <a:t>▪ </a:t>
-            </a:r>
-            <a:r>
-              <a:rPr b="1">
-                <a:solidFill>
-                  <a:srgbClr val="0D3B4C"/>
-                </a:solidFill>
-              </a:rPr>
-              <a:t>4-Tier Color Scheme: </a:t>
-            </a:r>
-            <a:r>
-              <a:rPr>
-                <a:solidFill>
-                  <a:srgbClr val="28323C"/>
-                </a:solidFill>
-              </a:rPr>
-              <a:t>Mint (#E3FDFD), Soft Aqua (#CBF1F5), Cyan (#A6E3E9), Turquoise (#71C9CE), Slate Navy (#0D3B4C).</a:t>
-            </a:r>
-          </a:p>
-          <a:p>
-            <a:pPr>
-              <a:spcAft>
-                <a:spcPts val="800"/>
-              </a:spcAft>
-              <a:defRPr sz="1800">
-                <a:latin typeface="Segoe UI"/>
-              </a:defRPr>
-            </a:pPr>
-            <a:r>
-              <a:rPr b="1">
-                <a:solidFill>
-                  <a:srgbClr val="71C9CE"/>
-                </a:solidFill>
-              </a:rPr>
-              <a:t>▪ </a:t>
-            </a:r>
-            <a:r>
-              <a:rPr b="1">
-                <a:solidFill>
-                  <a:srgbClr val="0D3B4C"/>
-                </a:solidFill>
-              </a:rPr>
-              <a:t>WCAG AA Compliance: </a:t>
-            </a:r>
-            <a:r>
-              <a:rPr>
-                <a:solidFill>
-                  <a:srgbClr val="28323C"/>
-                </a:solidFill>
-              </a:rPr>
-              <a:t>Contrast ratios (&gt;=4.5:1) ensure effortless readability across all screen conditions [4].</a:t>
-            </a:r>
-          </a:p>
-          <a:p>
-            <a:pPr>
-              <a:spcAft>
-                <a:spcPts val="800"/>
-              </a:spcAft>
-              <a:defRPr sz="1800">
-                <a:latin typeface="Segoe UI"/>
-              </a:defRPr>
-            </a:pPr>
-            <a:r>
-              <a:rPr b="1">
-                <a:solidFill>
-                  <a:srgbClr val="71C9CE"/>
-                </a:solidFill>
-              </a:rPr>
-              <a:t>▪ </a:t>
-            </a:r>
-            <a:r>
-              <a:rPr b="1">
-                <a:solidFill>
-                  <a:srgbClr val="0D3B4C"/>
-                </a:solidFill>
-              </a:rPr>
-              <a:t>Visual Ergonomics: </a:t>
-            </a:r>
-            <a:r>
-              <a:rPr>
-                <a:solidFill>
-                  <a:srgbClr val="28323C"/>
-                </a:solidFill>
-              </a:rPr>
-              <a:t>Cohesive card-based layout, subtle rounded borders, intuitive icons, and responsive flow.</a:t>
+              <a:t>All 26 tables satisfy Boyced-Codd &amp; 3NF: non-prime attributes are fully functionally dependent solely on the primary key, preventing update circularities [1].</a:t>
             </a:r>
           </a:p>
         </p:txBody>
